--- a/docs/presentations/AIPAR-ETA-intro.pptx
+++ b/docs/presentations/AIPAR-ETA-intro.pptx
@@ -4,24 +4,26 @@
   <p:sldMasterIdLst>
     <p:sldMasterId id="2147483648" r:id="rId1"/>
   </p:sldMasterIdLst>
+  <p:notesMasterIdLst>
+    <p:notesMasterId r:id="rId16"/>
+  </p:notesMasterIdLst>
   <p:sldIdLst>
-    <p:sldId id="256" r:id="rId7"/>
-    <p:sldId id="257" r:id="rId9"/>
-    <p:sldId id="258" r:id="rId10"/>
-    <p:sldId id="259" r:id="rId11"/>
-    <p:sldId id="260" r:id="rId12"/>
-    <p:sldId id="261" r:id="rId13"/>
-    <p:sldId id="262" r:id="rId14"/>
-    <p:sldId id="263" r:id="rId15"/>
-    <p:sldId id="264" r:id="rId16"/>
-    <p:sldId id="265" r:id="rId17"/>
-    <p:sldId id="266" r:id="rId18"/>
-    <p:sldId id="267" r:id="rId19"/>
-    <p:sldId id="268" r:id="rId20"/>
-    <p:sldId id="269" r:id="rId21"/>
-    <p:sldId id="270" r:id="rId22"/>
+    <p:sldId id="256" r:id="rId2"/>
+    <p:sldId id="257" r:id="rId3"/>
+    <p:sldId id="258" r:id="rId4"/>
+    <p:sldId id="259" r:id="rId5"/>
+    <p:sldId id="260" r:id="rId6"/>
+    <p:sldId id="261" r:id="rId7"/>
+    <p:sldId id="262" r:id="rId8"/>
+    <p:sldId id="263" r:id="rId9"/>
+    <p:sldId id="264" r:id="rId10"/>
+    <p:sldId id="265" r:id="rId11"/>
+    <p:sldId id="266" r:id="rId12"/>
+    <p:sldId id="267" r:id="rId13"/>
+    <p:sldId id="268" r:id="rId14"/>
+    <p:sldId id="269" r:id="rId15"/>
   </p:sldIdLst>
-  <p:sldSz cx="12191695" cy="6858000" type="screen4x3"/>
+  <p:sldSz cx="12192000" cy="6858000"/>
   <p:notesSz cx="6858000" cy="9144000"/>
   <p:defaultTextStyle>
     <a:defPPr>
@@ -118,11 +120,27 @@
       </a:defRPr>
     </a:lvl9pPr>
   </p:defaultTextStyle>
+  <p:extLst>
+    <p:ext uri="{EFAFB233-063F-42B5-8137-9DF3F51BA10A}">
+      <p15:sldGuideLst xmlns:p15="http://schemas.microsoft.com/office/powerpoint/2012/main">
+        <p15:guide id="1" orient="horz" pos="2160">
+          <p15:clr>
+            <a:srgbClr val="A4A3A4"/>
+          </p15:clr>
+        </p15:guide>
+        <p15:guide id="2" pos="2880">
+          <p15:clr>
+            <a:srgbClr val="A4A3A4"/>
+          </p15:clr>
+        </p15:guide>
+      </p15:sldGuideLst>
+    </p:ext>
+  </p:extLst>
 </p:presentation>
 </file>
 
 <file path=ppt/notesMasters/notesMaster1.xml><?xml version="1.0" encoding="utf-8"?>
-<p:notesMaster xmlns:a="http://schemas.openxmlformats.org/drawingml/2006/main" xmlns:p="http://schemas.openxmlformats.org/presentationml/2006/main" xmlns:r="http://schemas.openxmlformats.org/officeDocument/2006/relationships">
+<p:notesMaster xmlns:a="http://schemas.openxmlformats.org/drawingml/2006/main" xmlns:r="http://schemas.openxmlformats.org/officeDocument/2006/relationships" xmlns:p="http://schemas.openxmlformats.org/presentationml/2006/main">
   <p:cSld>
     <p:bg>
       <p:bgRef idx="1001">
@@ -143,241 +161,16 @@
           <a:chExt cx="0" cy="0"/>
         </a:xfrm>
       </p:grpSpPr>
-      <p:sp>
-        <p:nvSpPr>
-          <p:cNvPr id="2" name="Header Placeholder 1"/>
-          <p:cNvSpPr>
-            <a:spLocks noGrp="1"/>
-          </p:cNvSpPr>
-          <p:nvPr>
-            <p:ph type="hdr" sz="quarter"/>
-          </p:nvPr>
-        </p:nvSpPr>
-        <p:spPr>
-          <a:xfrm>
-            <a:off x="0" y="0"/>
-            <a:ext cx="2971800" cy="457200"/>
-          </a:xfrm>
-          <a:prstGeom prst="rect">
-            <a:avLst/>
-          </a:prstGeom>
-        </p:spPr>
-        <p:txBody>
-          <a:bodyPr vert="horz" lIns="91440" tIns="45720" rIns="91440" bIns="45720" rtlCol="0"/>
-          <a:lstStyle>
-            <a:lvl1pPr algn="l">
-              <a:defRPr sz="1200"/>
-            </a:lvl1pPr>
-          </a:lstStyle>
-          <a:p>
-            <a:endParaRPr lang="en-US"/>
-          </a:p>
-        </p:txBody>
-      </p:sp>
-      <p:sp>
-        <p:nvSpPr>
-          <p:cNvPr id="3" name="Date Placeholder 2"/>
-          <p:cNvSpPr>
-            <a:spLocks noGrp="1"/>
-          </p:cNvSpPr>
-          <p:nvPr>
-            <p:ph type="dt" idx="1"/>
-          </p:nvPr>
-        </p:nvSpPr>
-        <p:spPr>
-          <a:xfrm>
-            <a:off x="3884613" y="0"/>
-            <a:ext cx="2971800" cy="457200"/>
-          </a:xfrm>
-          <a:prstGeom prst="rect">
-            <a:avLst/>
-          </a:prstGeom>
-        </p:spPr>
-        <p:txBody>
-          <a:bodyPr vert="horz" lIns="91440" tIns="45720" rIns="91440" bIns="45720" rtlCol="0"/>
-          <a:lstStyle>
-            <a:lvl1pPr algn="r">
-              <a:defRPr sz="1200"/>
-            </a:lvl1pPr>
-          </a:lstStyle>
-          <a:p>
-            <a:fld id="{0F89C1C7-3DCD-1040-A9CF-14679D8B5DDD}" type="datetimeFigureOut">
-              <a:rPr lang="en-US" smtClean="0"/>
-              <a:t>10/17/16</a:t>
-            </a:fld>
-            <a:endParaRPr lang="en-US"/>
-          </a:p>
-        </p:txBody>
-      </p:sp>
-      <p:sp>
-        <p:nvSpPr>
-          <p:cNvPr id="4" name="Slide Image Placeholder 3"/>
-          <p:cNvSpPr>
-            <a:spLocks noGrp="1" noRot="1" noChangeAspect="1"/>
-          </p:cNvSpPr>
-          <p:nvPr>
-            <p:ph type="sldImg" idx="2"/>
-          </p:nvPr>
-        </p:nvSpPr>
-        <p:spPr>
-          <a:xfrm>
-            <a:off x="1143000" y="685800"/>
-            <a:ext cx="4572000" cy="3429000"/>
-          </a:xfrm>
-          <a:prstGeom prst="rect">
-            <a:avLst/>
-          </a:prstGeom>
-          <a:noFill/>
-          <a:ln w="12700">
-            <a:solidFill>
-              <a:prstClr val="black"/>
-            </a:solidFill>
-          </a:ln>
-        </p:spPr>
-        <p:txBody>
-          <a:bodyPr vert="horz" lIns="91440" tIns="45720" rIns="91440" bIns="45720" rtlCol="0" anchor="ctr"/>
-          <a:lstStyle/>
-          <a:p>
-            <a:endParaRPr lang="en-US"/>
-          </a:p>
-        </p:txBody>
-      </p:sp>
-      <p:sp>
-        <p:nvSpPr>
-          <p:cNvPr id="5" name="Notes Placeholder 4"/>
-          <p:cNvSpPr>
-            <a:spLocks noGrp="1"/>
-          </p:cNvSpPr>
-          <p:nvPr>
-            <p:ph type="body" sz="quarter" idx="3"/>
-          </p:nvPr>
-        </p:nvSpPr>
-        <p:spPr>
-          <a:xfrm>
-            <a:off x="685800" y="4343400"/>
-            <a:ext cx="5486400" cy="4114800"/>
-          </a:xfrm>
-          <a:prstGeom prst="rect">
-            <a:avLst/>
-          </a:prstGeom>
-        </p:spPr>
-        <p:txBody>
-          <a:bodyPr vert="horz" lIns="91440" tIns="45720" rIns="91440" bIns="45720" rtlCol="0"/>
-          <a:lstStyle/>
-          <a:p>
-            <a:pPr lvl="0"/>
-            <a:r>
-              <a:rPr lang="en-US" smtClean="0"/>
-              <a:t>Click to edit Master text styles</a:t>
-            </a:r>
-          </a:p>
-          <a:p>
-            <a:pPr lvl="1"/>
-            <a:r>
-              <a:rPr lang="en-US" smtClean="0"/>
-              <a:t>Second level</a:t>
-            </a:r>
-          </a:p>
-          <a:p>
-            <a:pPr lvl="2"/>
-            <a:r>
-              <a:rPr lang="en-US" smtClean="0"/>
-              <a:t>Third level</a:t>
-            </a:r>
-          </a:p>
-          <a:p>
-            <a:pPr lvl="3"/>
-            <a:r>
-              <a:rPr lang="en-US" smtClean="0"/>
-              <a:t>Fourth level</a:t>
-            </a:r>
-          </a:p>
-          <a:p>
-            <a:pPr lvl="4"/>
-            <a:r>
-              <a:rPr lang="en-US" smtClean="0"/>
-              <a:t>Fifth level</a:t>
-            </a:r>
-            <a:endParaRPr lang="en-US"/>
-          </a:p>
-        </p:txBody>
-      </p:sp>
-      <p:sp>
-        <p:nvSpPr>
-          <p:cNvPr id="6" name="Footer Placeholder 5"/>
-          <p:cNvSpPr>
-            <a:spLocks noGrp="1"/>
-          </p:cNvSpPr>
-          <p:nvPr>
-            <p:ph type="ftr" sz="quarter" idx="4"/>
-          </p:nvPr>
-        </p:nvSpPr>
-        <p:spPr>
-          <a:xfrm>
-            <a:off x="0" y="8685213"/>
-            <a:ext cx="2971800" cy="457200"/>
-          </a:xfrm>
-          <a:prstGeom prst="rect">
-            <a:avLst/>
-          </a:prstGeom>
-        </p:spPr>
-        <p:txBody>
-          <a:bodyPr vert="horz" lIns="91440" tIns="45720" rIns="91440" bIns="45720" rtlCol="0" anchor="b"/>
-          <a:lstStyle>
-            <a:lvl1pPr algn="l">
-              <a:defRPr sz="1200"/>
-            </a:lvl1pPr>
-          </a:lstStyle>
-          <a:p>
-            <a:endParaRPr lang="en-US"/>
-          </a:p>
-        </p:txBody>
-      </p:sp>
-      <p:sp>
-        <p:nvSpPr>
-          <p:cNvPr id="7" name="Slide Number Placeholder 6"/>
-          <p:cNvSpPr>
-            <a:spLocks noGrp="1"/>
-          </p:cNvSpPr>
-          <p:nvPr>
-            <p:ph type="sldNum" sz="quarter" idx="5"/>
-          </p:nvPr>
-        </p:nvSpPr>
-        <p:spPr>
-          <a:xfrm>
-            <a:off x="3884613" y="8685213"/>
-            <a:ext cx="2971800" cy="457200"/>
-          </a:xfrm>
-          <a:prstGeom prst="rect">
-            <a:avLst/>
-          </a:prstGeom>
-        </p:spPr>
-        <p:txBody>
-          <a:bodyPr vert="horz" lIns="91440" tIns="45720" rIns="91440" bIns="45720" rtlCol="0" anchor="b"/>
-          <a:lstStyle>
-            <a:lvl1pPr algn="r">
-              <a:defRPr sz="1200"/>
-            </a:lvl1pPr>
-          </a:lstStyle>
-          <a:p>
-            <a:fld id="{BB5E49A5-4136-284D-997B-48E1D791AD67}" type="slidenum">
-              <a:rPr lang="en-US" smtClean="0"/>
-              <a:t>‹#›</a:t>
-            </a:fld>
-            <a:endParaRPr lang="en-US"/>
-          </a:p>
-        </p:txBody>
-      </p:sp>
     </p:spTree>
     <p:extLst>
       <p:ext uri="{BB962C8B-B14F-4D97-AF65-F5344CB8AC3E}">
-        <p14:creationId xmlns:p14="http://schemas.microsoft.com/office/powerpoint/2010/main" val="2623252185"/>
+        <p14:creationId xmlns:p14="http://schemas.microsoft.com/office/powerpoint/2010/main" val="4224462681"/>
       </p:ext>
     </p:extLst>
   </p:cSld>
   <p:clrMap bg1="lt1" tx1="dk1" bg2="lt2" tx2="dk2" accent1="accent1" accent2="accent2" accent3="accent3" accent4="accent4" accent5="accent5" accent6="accent6" hlink="hlink" folHlink="folHlink"/>
   <p:notesStyle>
-    <a:lvl1pPr marL="0" algn="l" defTabSz="457200" rtl="0" eaLnBrk="1" latinLnBrk="0" hangingPunct="1">
+    <a:lvl1pPr marL="0" algn="l" defTabSz="914400" rtl="0" eaLnBrk="1" latinLnBrk="0" hangingPunct="1">
       <a:defRPr sz="1200" kern="1200">
         <a:solidFill>
           <a:schemeClr val="tx1"/>
@@ -387,7 +180,7 @@
         <a:cs typeface="+mn-cs"/>
       </a:defRPr>
     </a:lvl1pPr>
-    <a:lvl2pPr marL="457200" algn="l" defTabSz="457200" rtl="0" eaLnBrk="1" latinLnBrk="0" hangingPunct="1">
+    <a:lvl2pPr marL="457200" algn="l" defTabSz="914400" rtl="0" eaLnBrk="1" latinLnBrk="0" hangingPunct="1">
       <a:defRPr sz="1200" kern="1200">
         <a:solidFill>
           <a:schemeClr val="tx1"/>
@@ -397,7 +190,7 @@
         <a:cs typeface="+mn-cs"/>
       </a:defRPr>
     </a:lvl2pPr>
-    <a:lvl3pPr marL="914400" algn="l" defTabSz="457200" rtl="0" eaLnBrk="1" latinLnBrk="0" hangingPunct="1">
+    <a:lvl3pPr marL="914400" algn="l" defTabSz="914400" rtl="0" eaLnBrk="1" latinLnBrk="0" hangingPunct="1">
       <a:defRPr sz="1200" kern="1200">
         <a:solidFill>
           <a:schemeClr val="tx1"/>
@@ -407,7 +200,7 @@
         <a:cs typeface="+mn-cs"/>
       </a:defRPr>
     </a:lvl3pPr>
-    <a:lvl4pPr marL="1371600" algn="l" defTabSz="457200" rtl="0" eaLnBrk="1" latinLnBrk="0" hangingPunct="1">
+    <a:lvl4pPr marL="1371600" algn="l" defTabSz="914400" rtl="0" eaLnBrk="1" latinLnBrk="0" hangingPunct="1">
       <a:defRPr sz="1200" kern="1200">
         <a:solidFill>
           <a:schemeClr val="tx1"/>
@@ -417,7 +210,7 @@
         <a:cs typeface="+mn-cs"/>
       </a:defRPr>
     </a:lvl4pPr>
-    <a:lvl5pPr marL="1828800" algn="l" defTabSz="457200" rtl="0" eaLnBrk="1" latinLnBrk="0" hangingPunct="1">
+    <a:lvl5pPr marL="1828800" algn="l" defTabSz="914400" rtl="0" eaLnBrk="1" latinLnBrk="0" hangingPunct="1">
       <a:defRPr sz="1200" kern="1200">
         <a:solidFill>
           <a:schemeClr val="tx1"/>
@@ -427,7 +220,7 @@
         <a:cs typeface="+mn-cs"/>
       </a:defRPr>
     </a:lvl5pPr>
-    <a:lvl6pPr marL="2286000" algn="l" defTabSz="457200" rtl="0" eaLnBrk="1" latinLnBrk="0" hangingPunct="1">
+    <a:lvl6pPr marL="2286000" algn="l" defTabSz="914400" rtl="0" eaLnBrk="1" latinLnBrk="0" hangingPunct="1">
       <a:defRPr sz="1200" kern="1200">
         <a:solidFill>
           <a:schemeClr val="tx1"/>
@@ -437,7 +230,7 @@
         <a:cs typeface="+mn-cs"/>
       </a:defRPr>
     </a:lvl6pPr>
-    <a:lvl7pPr marL="2743200" algn="l" defTabSz="457200" rtl="0" eaLnBrk="1" latinLnBrk="0" hangingPunct="1">
+    <a:lvl7pPr marL="2743200" algn="l" defTabSz="914400" rtl="0" eaLnBrk="1" latinLnBrk="0" hangingPunct="1">
       <a:defRPr sz="1200" kern="1200">
         <a:solidFill>
           <a:schemeClr val="tx1"/>
@@ -447,7 +240,7 @@
         <a:cs typeface="+mn-cs"/>
       </a:defRPr>
     </a:lvl7pPr>
-    <a:lvl8pPr marL="3200400" algn="l" defTabSz="457200" rtl="0" eaLnBrk="1" latinLnBrk="0" hangingPunct="1">
+    <a:lvl8pPr marL="3200400" algn="l" defTabSz="914400" rtl="0" eaLnBrk="1" latinLnBrk="0" hangingPunct="1">
       <a:defRPr sz="1200" kern="1200">
         <a:solidFill>
           <a:schemeClr val="tx1"/>
@@ -457,7 +250,7 @@
         <a:cs typeface="+mn-cs"/>
       </a:defRPr>
     </a:lvl8pPr>
-    <a:lvl9pPr marL="3657600" algn="l" defTabSz="457200" rtl="0" eaLnBrk="1" latinLnBrk="0" hangingPunct="1">
+    <a:lvl9pPr marL="3657600" algn="l" defTabSz="914400" rtl="0" eaLnBrk="1" latinLnBrk="0" hangingPunct="1">
       <a:defRPr sz="1200" kern="1200">
         <a:solidFill>
           <a:schemeClr val="tx1"/>
@@ -472,7 +265,7 @@
 </file>
 
 <file path=ppt/notesSlides/notesSlide1.xml><?xml version="1.0" encoding="utf-8"?>
-<p:notes xmlns:a="http://schemas.openxmlformats.org/drawingml/2006/main" xmlns:p="http://schemas.openxmlformats.org/presentationml/2006/main" xmlns:r="http://schemas.openxmlformats.org/officeDocument/2006/relationships">
+<p:notes xmlns:a="http://schemas.openxmlformats.org/drawingml/2006/main" xmlns:r="http://schemas.openxmlformats.org/officeDocument/2006/relationships" xmlns:p="http://schemas.openxmlformats.org/presentationml/2006/main">
   <p:cSld>
     <p:spTree>
       <p:nvGrpSpPr>
@@ -492,7 +285,7 @@
         <p:nvSpPr>
           <p:cNvPr id="2" name="Slide Image Placeholder 1"/>
           <p:cNvSpPr>
-            <a:spLocks noGrp="1"/>
+            <a:spLocks noGrp="1" noRot="1" noChangeAspect="1"/>
           </p:cNvSpPr>
           <p:nvPr>
             <p:ph type="sldImg" idx="2"/>
@@ -507,7 +300,7 @@
             <a:spLocks noGrp="1"/>
           </p:cNvSpPr>
           <p:nvPr>
-            <p:ph type="body" idx="3" sz="quarter"/>
+            <p:ph type="body" sz="quarter" idx="3"/>
           </p:nvPr>
         </p:nvSpPr>
         <p:spPr/>
@@ -528,7 +321,7 @@
             <a:spLocks noGrp="1"/>
           </p:cNvSpPr>
           <p:nvPr>
-            <p:ph type="sldNum" idx="5" sz="quarter"/>
+            <p:ph type="sldNum" sz="quarter" idx="5"/>
           </p:nvPr>
         </p:nvSpPr>
         <p:spPr/>
@@ -542,7 +335,7 @@
 </file>
 
 <file path=ppt/notesSlides/notesSlide10.xml><?xml version="1.0" encoding="utf-8"?>
-<p:notes xmlns:a="http://schemas.openxmlformats.org/drawingml/2006/main" xmlns:p="http://schemas.openxmlformats.org/presentationml/2006/main" xmlns:r="http://schemas.openxmlformats.org/officeDocument/2006/relationships">
+<p:notes xmlns:a="http://schemas.openxmlformats.org/drawingml/2006/main" xmlns:r="http://schemas.openxmlformats.org/officeDocument/2006/relationships" xmlns:p="http://schemas.openxmlformats.org/presentationml/2006/main">
   <p:cSld>
     <p:spTree>
       <p:nvGrpSpPr>
@@ -562,7 +355,7 @@
         <p:nvSpPr>
           <p:cNvPr id="2" name="Slide Image Placeholder 1"/>
           <p:cNvSpPr>
-            <a:spLocks noGrp="1"/>
+            <a:spLocks noGrp="1" noRot="1" noChangeAspect="1"/>
           </p:cNvSpPr>
           <p:nvPr>
             <p:ph type="sldImg" idx="2"/>
@@ -577,7 +370,7 @@
             <a:spLocks noGrp="1"/>
           </p:cNvSpPr>
           <p:nvPr>
-            <p:ph type="body" idx="3" sz="quarter"/>
+            <p:ph type="body" sz="quarter" idx="3"/>
           </p:nvPr>
         </p:nvSpPr>
         <p:spPr/>
@@ -598,7 +391,7 @@
             <a:spLocks noGrp="1"/>
           </p:cNvSpPr>
           <p:nvPr>
-            <p:ph type="sldNum" idx="5" sz="quarter"/>
+            <p:ph type="sldNum" sz="quarter" idx="5"/>
           </p:nvPr>
         </p:nvSpPr>
         <p:spPr/>
@@ -612,7 +405,7 @@
 </file>
 
 <file path=ppt/notesSlides/notesSlide11.xml><?xml version="1.0" encoding="utf-8"?>
-<p:notes xmlns:a="http://schemas.openxmlformats.org/drawingml/2006/main" xmlns:p="http://schemas.openxmlformats.org/presentationml/2006/main" xmlns:r="http://schemas.openxmlformats.org/officeDocument/2006/relationships">
+<p:notes xmlns:a="http://schemas.openxmlformats.org/drawingml/2006/main" xmlns:r="http://schemas.openxmlformats.org/officeDocument/2006/relationships" xmlns:p="http://schemas.openxmlformats.org/presentationml/2006/main">
   <p:cSld>
     <p:spTree>
       <p:nvGrpSpPr>
@@ -632,7 +425,7 @@
         <p:nvSpPr>
           <p:cNvPr id="2" name="Slide Image Placeholder 1"/>
           <p:cNvSpPr>
-            <a:spLocks noGrp="1"/>
+            <a:spLocks noGrp="1" noRot="1" noChangeAspect="1"/>
           </p:cNvSpPr>
           <p:nvPr>
             <p:ph type="sldImg" idx="2"/>
@@ -647,7 +440,7 @@
             <a:spLocks noGrp="1"/>
           </p:cNvSpPr>
           <p:nvPr>
-            <p:ph type="body" idx="3" sz="quarter"/>
+            <p:ph type="body" sz="quarter" idx="3"/>
           </p:nvPr>
         </p:nvSpPr>
         <p:spPr/>
@@ -668,7 +461,7 @@
             <a:spLocks noGrp="1"/>
           </p:cNvSpPr>
           <p:nvPr>
-            <p:ph type="sldNum" idx="5" sz="quarter"/>
+            <p:ph type="sldNum" sz="quarter" idx="5"/>
           </p:nvPr>
         </p:nvSpPr>
         <p:spPr/>
@@ -682,7 +475,7 @@
 </file>
 
 <file path=ppt/notesSlides/notesSlide12.xml><?xml version="1.0" encoding="utf-8"?>
-<p:notes xmlns:a="http://schemas.openxmlformats.org/drawingml/2006/main" xmlns:p="http://schemas.openxmlformats.org/presentationml/2006/main" xmlns:r="http://schemas.openxmlformats.org/officeDocument/2006/relationships">
+<p:notes xmlns:a="http://schemas.openxmlformats.org/drawingml/2006/main" xmlns:r="http://schemas.openxmlformats.org/officeDocument/2006/relationships" xmlns:p="http://schemas.openxmlformats.org/presentationml/2006/main">
   <p:cSld>
     <p:spTree>
       <p:nvGrpSpPr>
@@ -702,7 +495,7 @@
         <p:nvSpPr>
           <p:cNvPr id="2" name="Slide Image Placeholder 1"/>
           <p:cNvSpPr>
-            <a:spLocks noGrp="1"/>
+            <a:spLocks noGrp="1" noRot="1" noChangeAspect="1"/>
           </p:cNvSpPr>
           <p:nvPr>
             <p:ph type="sldImg" idx="2"/>
@@ -717,7 +510,7 @@
             <a:spLocks noGrp="1"/>
           </p:cNvSpPr>
           <p:nvPr>
-            <p:ph type="body" idx="3" sz="quarter"/>
+            <p:ph type="body" sz="quarter" idx="3"/>
           </p:nvPr>
         </p:nvSpPr>
         <p:spPr/>
@@ -738,7 +531,7 @@
             <a:spLocks noGrp="1"/>
           </p:cNvSpPr>
           <p:nvPr>
-            <p:ph type="sldNum" idx="5" sz="quarter"/>
+            <p:ph type="sldNum" sz="quarter" idx="5"/>
           </p:nvPr>
         </p:nvSpPr>
         <p:spPr/>
@@ -752,7 +545,7 @@
 </file>
 
 <file path=ppt/notesSlides/notesSlide13.xml><?xml version="1.0" encoding="utf-8"?>
-<p:notes xmlns:a="http://schemas.openxmlformats.org/drawingml/2006/main" xmlns:p="http://schemas.openxmlformats.org/presentationml/2006/main" xmlns:r="http://schemas.openxmlformats.org/officeDocument/2006/relationships">
+<p:notes xmlns:a="http://schemas.openxmlformats.org/drawingml/2006/main" xmlns:r="http://schemas.openxmlformats.org/officeDocument/2006/relationships" xmlns:p="http://schemas.openxmlformats.org/presentationml/2006/main">
   <p:cSld>
     <p:spTree>
       <p:nvGrpSpPr>
@@ -772,7 +565,7 @@
         <p:nvSpPr>
           <p:cNvPr id="2" name="Slide Image Placeholder 1"/>
           <p:cNvSpPr>
-            <a:spLocks noGrp="1"/>
+            <a:spLocks noGrp="1" noRot="1" noChangeAspect="1"/>
           </p:cNvSpPr>
           <p:nvPr>
             <p:ph type="sldImg" idx="2"/>
@@ -787,7 +580,7 @@
             <a:spLocks noGrp="1"/>
           </p:cNvSpPr>
           <p:nvPr>
-            <p:ph type="body" idx="3" sz="quarter"/>
+            <p:ph type="body" sz="quarter" idx="3"/>
           </p:nvPr>
         </p:nvSpPr>
         <p:spPr/>
@@ -808,7 +601,7 @@
             <a:spLocks noGrp="1"/>
           </p:cNvSpPr>
           <p:nvPr>
-            <p:ph type="sldNum" idx="5" sz="quarter"/>
+            <p:ph type="sldNum" sz="quarter" idx="5"/>
           </p:nvPr>
         </p:nvSpPr>
         <p:spPr/>
@@ -822,7 +615,7 @@
 </file>
 
 <file path=ppt/notesSlides/notesSlide14.xml><?xml version="1.0" encoding="utf-8"?>
-<p:notes xmlns:a="http://schemas.openxmlformats.org/drawingml/2006/main" xmlns:p="http://schemas.openxmlformats.org/presentationml/2006/main" xmlns:r="http://schemas.openxmlformats.org/officeDocument/2006/relationships">
+<p:notes xmlns:a="http://schemas.openxmlformats.org/drawingml/2006/main" xmlns:r="http://schemas.openxmlformats.org/officeDocument/2006/relationships" xmlns:p="http://schemas.openxmlformats.org/presentationml/2006/main">
   <p:cSld>
     <p:spTree>
       <p:nvGrpSpPr>
@@ -842,7 +635,7 @@
         <p:nvSpPr>
           <p:cNvPr id="2" name="Slide Image Placeholder 1"/>
           <p:cNvSpPr>
-            <a:spLocks noGrp="1"/>
+            <a:spLocks noGrp="1" noRot="1" noChangeAspect="1"/>
           </p:cNvSpPr>
           <p:nvPr>
             <p:ph type="sldImg" idx="2"/>
@@ -857,7 +650,7 @@
             <a:spLocks noGrp="1"/>
           </p:cNvSpPr>
           <p:nvPr>
-            <p:ph type="body" idx="3" sz="quarter"/>
+            <p:ph type="body" sz="quarter" idx="3"/>
           </p:nvPr>
         </p:nvSpPr>
         <p:spPr/>
@@ -878,7 +671,7 @@
             <a:spLocks noGrp="1"/>
           </p:cNvSpPr>
           <p:nvPr>
-            <p:ph type="sldNum" idx="5" sz="quarter"/>
+            <p:ph type="sldNum" sz="quarter" idx="5"/>
           </p:nvPr>
         </p:nvSpPr>
         <p:spPr/>
@@ -891,8 +684,8 @@
 </p:notes>
 </file>
 
-<file path=ppt/notesSlides/notesSlide15.xml><?xml version="1.0" encoding="utf-8"?>
-<p:notes xmlns:a="http://schemas.openxmlformats.org/drawingml/2006/main" xmlns:p="http://schemas.openxmlformats.org/presentationml/2006/main" xmlns:r="http://schemas.openxmlformats.org/officeDocument/2006/relationships">
+<file path=ppt/notesSlides/notesSlide2.xml><?xml version="1.0" encoding="utf-8"?>
+<p:notes xmlns:a="http://schemas.openxmlformats.org/drawingml/2006/main" xmlns:r="http://schemas.openxmlformats.org/officeDocument/2006/relationships" xmlns:p="http://schemas.openxmlformats.org/presentationml/2006/main">
   <p:cSld>
     <p:spTree>
       <p:nvGrpSpPr>
@@ -912,7 +705,7 @@
         <p:nvSpPr>
           <p:cNvPr id="2" name="Slide Image Placeholder 1"/>
           <p:cNvSpPr>
-            <a:spLocks noGrp="1"/>
+            <a:spLocks noGrp="1" noRot="1" noChangeAspect="1"/>
           </p:cNvSpPr>
           <p:nvPr>
             <p:ph type="sldImg" idx="2"/>
@@ -927,7 +720,7 @@
             <a:spLocks noGrp="1"/>
           </p:cNvSpPr>
           <p:nvPr>
-            <p:ph type="body" idx="3" sz="quarter"/>
+            <p:ph type="body" sz="quarter" idx="3"/>
           </p:nvPr>
         </p:nvSpPr>
         <p:spPr/>
@@ -936,7 +729,7 @@
           <a:lstStyle/>
           <a:p>
             <a:r>
-              <a:t>收束到三句：確認菜單、對到品項、程式算錢。留下時間問指令或網站怎麼開。</a:t>
+              <a:t>約 12–15 分鐘。強調聽完能回答：誰用、做什麼、錢怎麼算、從哪裡操作。</a:t>
             </a:r>
           </a:p>
         </p:txBody>
@@ -948,7 +741,7 @@
             <a:spLocks noGrp="1"/>
           </p:cNvSpPr>
           <p:nvPr>
-            <p:ph type="sldNum" idx="5" sz="quarter"/>
+            <p:ph type="sldNum" sz="quarter" idx="5"/>
           </p:nvPr>
         </p:nvSpPr>
         <p:spPr/>
@@ -961,8 +754,8 @@
 </p:notes>
 </file>
 
-<file path=ppt/notesSlides/notesSlide2.xml><?xml version="1.0" encoding="utf-8"?>
-<p:notes xmlns:a="http://schemas.openxmlformats.org/drawingml/2006/main" xmlns:p="http://schemas.openxmlformats.org/presentationml/2006/main" xmlns:r="http://schemas.openxmlformats.org/officeDocument/2006/relationships">
+<file path=ppt/notesSlides/notesSlide3.xml><?xml version="1.0" encoding="utf-8"?>
+<p:notes xmlns:a="http://schemas.openxmlformats.org/drawingml/2006/main" xmlns:r="http://schemas.openxmlformats.org/officeDocument/2006/relationships" xmlns:p="http://schemas.openxmlformats.org/presentationml/2006/main">
   <p:cSld>
     <p:spTree>
       <p:nvGrpSpPr>
@@ -982,7 +775,7 @@
         <p:nvSpPr>
           <p:cNvPr id="2" name="Slide Image Placeholder 1"/>
           <p:cNvSpPr>
-            <a:spLocks noGrp="1"/>
+            <a:spLocks noGrp="1" noRot="1" noChangeAspect="1"/>
           </p:cNvSpPr>
           <p:nvPr>
             <p:ph type="sldImg" idx="2"/>
@@ -997,7 +790,7 @@
             <a:spLocks noGrp="1"/>
           </p:cNvSpPr>
           <p:nvPr>
-            <p:ph type="body" idx="3" sz="quarter"/>
+            <p:ph type="body" sz="quarter" idx="3"/>
           </p:nvPr>
         </p:nvSpPr>
         <p:spPr/>
@@ -1006,7 +799,7 @@
           <a:lstStyle/>
           <a:p>
             <a:r>
-              <a:t>約 12–15 分鐘。強調聽完能回答：誰用、做什麼、錢怎麼算、從哪裡操作。</a:t>
+              <a:t>用實驗室午餐的日常痛點帶入，不要談實作缺陷。聽眾若不是工程背景，停在這三句就夠。</a:t>
             </a:r>
           </a:p>
         </p:txBody>
@@ -1018,7 +811,7 @@
             <a:spLocks noGrp="1"/>
           </p:cNvSpPr>
           <p:nvPr>
-            <p:ph type="sldNum" idx="5" sz="quarter"/>
+            <p:ph type="sldNum" sz="quarter" idx="5"/>
           </p:nvPr>
         </p:nvSpPr>
         <p:spPr/>
@@ -1031,8 +824,8 @@
 </p:notes>
 </file>
 
-<file path=ppt/notesSlides/notesSlide3.xml><?xml version="1.0" encoding="utf-8"?>
-<p:notes xmlns:a="http://schemas.openxmlformats.org/drawingml/2006/main" xmlns:p="http://schemas.openxmlformats.org/presentationml/2006/main" xmlns:r="http://schemas.openxmlformats.org/officeDocument/2006/relationships">
+<file path=ppt/notesSlides/notesSlide4.xml><?xml version="1.0" encoding="utf-8"?>
+<p:notes xmlns:a="http://schemas.openxmlformats.org/drawingml/2006/main" xmlns:r="http://schemas.openxmlformats.org/officeDocument/2006/relationships" xmlns:p="http://schemas.openxmlformats.org/presentationml/2006/main">
   <p:cSld>
     <p:spTree>
       <p:nvGrpSpPr>
@@ -1052,7 +845,7 @@
         <p:nvSpPr>
           <p:cNvPr id="2" name="Slide Image Placeholder 1"/>
           <p:cNvSpPr>
-            <a:spLocks noGrp="1"/>
+            <a:spLocks noGrp="1" noRot="1" noChangeAspect="1"/>
           </p:cNvSpPr>
           <p:nvPr>
             <p:ph type="sldImg" idx="2"/>
@@ -1067,7 +860,7 @@
             <a:spLocks noGrp="1"/>
           </p:cNvSpPr>
           <p:nvPr>
-            <p:ph type="body" idx="3" sz="quarter"/>
+            <p:ph type="body" sz="quarter" idx="3"/>
           </p:nvPr>
         </p:nvSpPr>
         <p:spPr/>
@@ -1076,7 +869,7 @@
           <a:lstStyle/>
           <a:p>
             <a:r>
-              <a:t>用實驗室午餐的日常痛點帶入，不要談實作缺陷。聽眾若不是工程背景，停在這三句就夠。</a:t>
+              <a:t>這頁是整場的定位句，後面功能都回到這三行。可念一次 README 的副標題。</a:t>
             </a:r>
           </a:p>
         </p:txBody>
@@ -1088,7 +881,7 @@
             <a:spLocks noGrp="1"/>
           </p:cNvSpPr>
           <p:nvPr>
-            <p:ph type="sldNum" idx="5" sz="quarter"/>
+            <p:ph type="sldNum" sz="quarter" idx="5"/>
           </p:nvPr>
         </p:nvSpPr>
         <p:spPr/>
@@ -1101,8 +894,8 @@
 </p:notes>
 </file>
 
-<file path=ppt/notesSlides/notesSlide4.xml><?xml version="1.0" encoding="utf-8"?>
-<p:notes xmlns:a="http://schemas.openxmlformats.org/drawingml/2006/main" xmlns:p="http://schemas.openxmlformats.org/presentationml/2006/main" xmlns:r="http://schemas.openxmlformats.org/officeDocument/2006/relationships">
+<file path=ppt/notesSlides/notesSlide5.xml><?xml version="1.0" encoding="utf-8"?>
+<p:notes xmlns:a="http://schemas.openxmlformats.org/drawingml/2006/main" xmlns:r="http://schemas.openxmlformats.org/officeDocument/2006/relationships" xmlns:p="http://schemas.openxmlformats.org/presentationml/2006/main">
   <p:cSld>
     <p:spTree>
       <p:nvGrpSpPr>
@@ -1122,7 +915,7 @@
         <p:nvSpPr>
           <p:cNvPr id="2" name="Slide Image Placeholder 1"/>
           <p:cNvSpPr>
-            <a:spLocks noGrp="1"/>
+            <a:spLocks noGrp="1" noRot="1" noChangeAspect="1"/>
           </p:cNvSpPr>
           <p:nvPr>
             <p:ph type="sldImg" idx="2"/>
@@ -1137,7 +930,7 @@
             <a:spLocks noGrp="1"/>
           </p:cNvSpPr>
           <p:nvPr>
-            <p:ph type="body" idx="3" sz="quarter"/>
+            <p:ph type="body" sz="quarter" idx="3"/>
           </p:nvPr>
         </p:nvSpPr>
         <p:spPr/>
@@ -1146,7 +939,7 @@
           <a:lstStyle/>
           <a:p>
             <a:r>
-              <a:t>這頁是整場的定位句，後面功能都回到這三行。可念一次 README 的副標題。</a:t>
+              <a:t>三塊對應產品範圍。下一頁起各用一張真實畫面展開。</a:t>
             </a:r>
           </a:p>
         </p:txBody>
@@ -1158,7 +951,7 @@
             <a:spLocks noGrp="1"/>
           </p:cNvSpPr>
           <p:nvPr>
-            <p:ph type="sldNum" idx="5" sz="quarter"/>
+            <p:ph type="sldNum" sz="quarter" idx="5"/>
           </p:nvPr>
         </p:nvSpPr>
         <p:spPr/>
@@ -1171,8 +964,8 @@
 </p:notes>
 </file>
 
-<file path=ppt/notesSlides/notesSlide5.xml><?xml version="1.0" encoding="utf-8"?>
-<p:notes xmlns:a="http://schemas.openxmlformats.org/drawingml/2006/main" xmlns:p="http://schemas.openxmlformats.org/presentationml/2006/main" xmlns:r="http://schemas.openxmlformats.org/officeDocument/2006/relationships">
+<file path=ppt/notesSlides/notesSlide6.xml><?xml version="1.0" encoding="utf-8"?>
+<p:notes xmlns:a="http://schemas.openxmlformats.org/drawingml/2006/main" xmlns:r="http://schemas.openxmlformats.org/officeDocument/2006/relationships" xmlns:p="http://schemas.openxmlformats.org/presentationml/2006/main">
   <p:cSld>
     <p:spTree>
       <p:nvGrpSpPr>
@@ -1192,7 +985,7 @@
         <p:nvSpPr>
           <p:cNvPr id="2" name="Slide Image Placeholder 1"/>
           <p:cNvSpPr>
-            <a:spLocks noGrp="1"/>
+            <a:spLocks noGrp="1" noRot="1" noChangeAspect="1"/>
           </p:cNvSpPr>
           <p:nvPr>
             <p:ph type="sldImg" idx="2"/>
@@ -1207,7 +1000,7 @@
             <a:spLocks noGrp="1"/>
           </p:cNvSpPr>
           <p:nvPr>
-            <p:ph type="body" idx="3" sz="quarter"/>
+            <p:ph type="body" sz="quarter" idx="3"/>
           </p:nvPr>
         </p:nvSpPr>
         <p:spPr/>
@@ -1216,7 +1009,7 @@
           <a:lstStyle/>
           <a:p>
             <a:r>
-              <a:t>三塊對應產品範圍。下一頁起各用一張真實畫面展開。</a:t>
+              <a:t>右圖是本機網站 2026-09-18 的真實菜單頁，來源標為 vision，代表圖片辨識後經人工確認上線。</a:t>
             </a:r>
           </a:p>
         </p:txBody>
@@ -1228,7 +1021,7 @@
             <a:spLocks noGrp="1"/>
           </p:cNvSpPr>
           <p:nvPr>
-            <p:ph type="sldNum" idx="5" sz="quarter"/>
+            <p:ph type="sldNum" sz="quarter" idx="5"/>
           </p:nvPr>
         </p:nvSpPr>
         <p:spPr/>
@@ -1241,8 +1034,8 @@
 </p:notes>
 </file>
 
-<file path=ppt/notesSlides/notesSlide6.xml><?xml version="1.0" encoding="utf-8"?>
-<p:notes xmlns:a="http://schemas.openxmlformats.org/drawingml/2006/main" xmlns:p="http://schemas.openxmlformats.org/presentationml/2006/main" xmlns:r="http://schemas.openxmlformats.org/officeDocument/2006/relationships">
+<file path=ppt/notesSlides/notesSlide7.xml><?xml version="1.0" encoding="utf-8"?>
+<p:notes xmlns:a="http://schemas.openxmlformats.org/drawingml/2006/main" xmlns:r="http://schemas.openxmlformats.org/officeDocument/2006/relationships" xmlns:p="http://schemas.openxmlformats.org/presentationml/2006/main">
   <p:cSld>
     <p:spTree>
       <p:nvGrpSpPr>
@@ -1262,7 +1055,7 @@
         <p:nvSpPr>
           <p:cNvPr id="2" name="Slide Image Placeholder 1"/>
           <p:cNvSpPr>
-            <a:spLocks noGrp="1"/>
+            <a:spLocks noGrp="1" noRot="1" noChangeAspect="1"/>
           </p:cNvSpPr>
           <p:nvPr>
             <p:ph type="sldImg" idx="2"/>
@@ -1277,7 +1070,7 @@
             <a:spLocks noGrp="1"/>
           </p:cNvSpPr>
           <p:nvPr>
-            <p:ph type="body" idx="3" sz="quarter"/>
+            <p:ph type="body" sz="quarter" idx="3"/>
           </p:nvPr>
         </p:nvSpPr>
         <p:spPr/>
@@ -1286,7 +1079,7 @@
           <a:lstStyle/>
           <a:p>
             <a:r>
-              <a:t>右圖是本機網站 2026-09-18 的真實菜單頁，來源標為 vision，代表圖片辨識後經人工確認上線。</a:t>
+              <a:t>Discord 客戶端無法在簡報機截到實際伺服器畫面，故用專案字串表與網站標誌拼出對等畫面；品項來自雷荷豆腐鍋真實菜單。</a:t>
             </a:r>
           </a:p>
         </p:txBody>
@@ -1298,7 +1091,7 @@
             <a:spLocks noGrp="1"/>
           </p:cNvSpPr>
           <p:nvPr>
-            <p:ph type="sldNum" idx="5" sz="quarter"/>
+            <p:ph type="sldNum" sz="quarter" idx="5"/>
           </p:nvPr>
         </p:nvSpPr>
         <p:spPr/>
@@ -1311,8 +1104,8 @@
 </p:notes>
 </file>
 
-<file path=ppt/notesSlides/notesSlide7.xml><?xml version="1.0" encoding="utf-8"?>
-<p:notes xmlns:a="http://schemas.openxmlformats.org/drawingml/2006/main" xmlns:p="http://schemas.openxmlformats.org/presentationml/2006/main" xmlns:r="http://schemas.openxmlformats.org/officeDocument/2006/relationships">
+<file path=ppt/notesSlides/notesSlide8.xml><?xml version="1.0" encoding="utf-8"?>
+<p:notes xmlns:a="http://schemas.openxmlformats.org/drawingml/2006/main" xmlns:r="http://schemas.openxmlformats.org/officeDocument/2006/relationships" xmlns:p="http://schemas.openxmlformats.org/presentationml/2006/main">
   <p:cSld>
     <p:spTree>
       <p:nvGrpSpPr>
@@ -1332,7 +1125,7 @@
         <p:nvSpPr>
           <p:cNvPr id="2" name="Slide Image Placeholder 1"/>
           <p:cNvSpPr>
-            <a:spLocks noGrp="1"/>
+            <a:spLocks noGrp="1" noRot="1" noChangeAspect="1"/>
           </p:cNvSpPr>
           <p:nvPr>
             <p:ph type="sldImg" idx="2"/>
@@ -1347,7 +1140,7 @@
             <a:spLocks noGrp="1"/>
           </p:cNvSpPr>
           <p:nvPr>
-            <p:ph type="body" idx="3" sz="quarter"/>
+            <p:ph type="body" sz="quarter" idx="3"/>
           </p:nvPr>
         </p:nvSpPr>
         <p:spPr/>
@@ -1356,7 +1149,7 @@
           <a:lstStyle/>
           <a:p>
             <a:r>
-              <a:t>Discord 客戶端無法在簡報機截到實際伺服器畫面，故用專案字串表與網站標誌拼出對等畫面；品項來自雷荷豆腐鍋真實菜單。</a:t>
+              <a:t>結餘與債務是兩件事：結餘是吃了多少付了多少；債務是該把錢拿給哪一位。不要在這頁談空帳本。</a:t>
             </a:r>
           </a:p>
         </p:txBody>
@@ -1368,7 +1161,7 @@
             <a:spLocks noGrp="1"/>
           </p:cNvSpPr>
           <p:nvPr>
-            <p:ph type="sldNum" idx="5" sz="quarter"/>
+            <p:ph type="sldNum" sz="quarter" idx="5"/>
           </p:nvPr>
         </p:nvSpPr>
         <p:spPr/>
@@ -1381,8 +1174,8 @@
 </p:notes>
 </file>
 
-<file path=ppt/notesSlides/notesSlide8.xml><?xml version="1.0" encoding="utf-8"?>
-<p:notes xmlns:a="http://schemas.openxmlformats.org/drawingml/2006/main" xmlns:p="http://schemas.openxmlformats.org/presentationml/2006/main" xmlns:r="http://schemas.openxmlformats.org/officeDocument/2006/relationships">
+<file path=ppt/notesSlides/notesSlide9.xml><?xml version="1.0" encoding="utf-8"?>
+<p:notes xmlns:a="http://schemas.openxmlformats.org/drawingml/2006/main" xmlns:r="http://schemas.openxmlformats.org/officeDocument/2006/relationships" xmlns:p="http://schemas.openxmlformats.org/presentationml/2006/main">
   <p:cSld>
     <p:spTree>
       <p:nvGrpSpPr>
@@ -1402,7 +1195,7 @@
         <p:nvSpPr>
           <p:cNvPr id="2" name="Slide Image Placeholder 1"/>
           <p:cNvSpPr>
-            <a:spLocks noGrp="1"/>
+            <a:spLocks noGrp="1" noRot="1" noChangeAspect="1"/>
           </p:cNvSpPr>
           <p:nvPr>
             <p:ph type="sldImg" idx="2"/>
@@ -1417,7 +1210,7 @@
             <a:spLocks noGrp="1"/>
           </p:cNvSpPr>
           <p:nvPr>
-            <p:ph type="body" idx="3" sz="quarter"/>
+            <p:ph type="body" sz="quarter" idx="3"/>
           </p:nvPr>
         </p:nvSpPr>
         <p:spPr/>
@@ -1426,7 +1219,7 @@
           <a:lstStyle/>
           <a:p>
             <a:r>
-              <a:t>結餘與債務是兩件事：結餘是吃了多少付了多少；債務是該把錢拿給哪一位。不要在這頁談空帳本。</a:t>
+              <a:t>跟著 1 到 6 走一遍。強調第 3 步的人工確認與第 6 步的結算。網站頁面列在圖下方黑條。</a:t>
             </a:r>
           </a:p>
         </p:txBody>
@@ -1438,77 +1231,7 @@
             <a:spLocks noGrp="1"/>
           </p:cNvSpPr>
           <p:nvPr>
-            <p:ph type="sldNum" idx="5" sz="quarter"/>
-          </p:nvPr>
-        </p:nvSpPr>
-        <p:spPr/>
-      </p:sp>
-    </p:spTree>
-  </p:cSld>
-  <p:clrMapOvr>
-    <a:masterClrMapping/>
-  </p:clrMapOvr>
-</p:notes>
-</file>
-
-<file path=ppt/notesSlides/notesSlide9.xml><?xml version="1.0" encoding="utf-8"?>
-<p:notes xmlns:a="http://schemas.openxmlformats.org/drawingml/2006/main" xmlns:p="http://schemas.openxmlformats.org/presentationml/2006/main" xmlns:r="http://schemas.openxmlformats.org/officeDocument/2006/relationships">
-  <p:cSld>
-    <p:spTree>
-      <p:nvGrpSpPr>
-        <p:cNvPr id="1" name=""/>
-        <p:cNvGrpSpPr/>
-        <p:nvPr/>
-      </p:nvGrpSpPr>
-      <p:grpSpPr>
-        <a:xfrm>
-          <a:off x="0" y="0"/>
-          <a:ext cx="0" cy="0"/>
-          <a:chOff x="0" y="0"/>
-          <a:chExt cx="0" cy="0"/>
-        </a:xfrm>
-      </p:grpSpPr>
-      <p:sp>
-        <p:nvSpPr>
-          <p:cNvPr id="2" name="Slide Image Placeholder 1"/>
-          <p:cNvSpPr>
-            <a:spLocks noGrp="1"/>
-          </p:cNvSpPr>
-          <p:nvPr>
-            <p:ph type="sldImg" idx="2"/>
-          </p:nvPr>
-        </p:nvSpPr>
-        <p:spPr/>
-      </p:sp>
-      <p:sp>
-        <p:nvSpPr>
-          <p:cNvPr id="3" name="Notes Placeholder 2"/>
-          <p:cNvSpPr>
-            <a:spLocks noGrp="1"/>
-          </p:cNvSpPr>
-          <p:nvPr>
-            <p:ph type="body" idx="3" sz="quarter"/>
-          </p:nvPr>
-        </p:nvSpPr>
-        <p:spPr/>
-        <p:txBody>
-          <a:bodyPr/>
-          <a:lstStyle/>
-          <a:p>
-            <a:r>
-              <a:t>跟著 1 到 6 走一遍。強調第 3 步的人工確認與第 6 步的結算。網站頁面列在圖下方黑條。</a:t>
-            </a:r>
-          </a:p>
-        </p:txBody>
-      </p:sp>
-      <p:sp>
-        <p:nvSpPr>
-          <p:cNvPr id="4" name="Slide Number Placeholder 3"/>
-          <p:cNvSpPr>
-            <a:spLocks noGrp="1"/>
-          </p:cNvSpPr>
-          <p:nvPr>
-            <p:ph type="sldNum" idx="5" sz="quarter"/>
+            <p:ph type="sldNum" sz="quarter" idx="5"/>
           </p:nvPr>
         </p:nvSpPr>
         <p:spPr/>
@@ -1559,10 +1282,9 @@
           <a:lstStyle/>
           <a:p>
             <a:r>
-              <a:rPr lang="en-US" smtClean="0"/>
+              <a:rPr lang="en-US"/>
               <a:t>Click to edit Master title style</a:t>
             </a:r>
-            <a:endParaRPr lang="en-US"/>
           </a:p>
         </p:txBody>
       </p:sp>
@@ -1678,10 +1400,9 @@
           </a:lstStyle>
           <a:p>
             <a:r>
-              <a:rPr lang="en-US" smtClean="0"/>
+              <a:rPr lang="en-US"/>
               <a:t>Click to edit Master subtitle style</a:t>
             </a:r>
-            <a:endParaRPr lang="en-US"/>
           </a:p>
         </p:txBody>
       </p:sp>
@@ -1702,7 +1423,7 @@
           <a:p>
             <a:fld id="{5BCAD085-E8A6-8845-BD4E-CB4CCA059FC4}" type="datetimeFigureOut">
               <a:rPr lang="en-US" smtClean="0"/>
-              <a:t>1/27/13</a:t>
+              <a:t>9/18/2026</a:t>
             </a:fld>
             <a:endParaRPr lang="en-US"/>
           </a:p>
@@ -1796,10 +1517,9 @@
           <a:lstStyle/>
           <a:p>
             <a:r>
-              <a:rPr lang="en-US" smtClean="0"/>
+              <a:rPr lang="en-US"/>
               <a:t>Click to edit Master title style</a:t>
             </a:r>
-            <a:endParaRPr lang="en-US"/>
           </a:p>
         </p:txBody>
       </p:sp>
@@ -1820,38 +1540,37 @@
           <a:p>
             <a:pPr lvl="0"/>
             <a:r>
-              <a:rPr lang="en-US" smtClean="0"/>
+              <a:rPr lang="en-US"/>
               <a:t>Click to edit Master text styles</a:t>
             </a:r>
           </a:p>
           <a:p>
             <a:pPr lvl="1"/>
             <a:r>
-              <a:rPr lang="en-US" smtClean="0"/>
+              <a:rPr lang="en-US"/>
               <a:t>Second level</a:t>
             </a:r>
           </a:p>
           <a:p>
             <a:pPr lvl="2"/>
             <a:r>
-              <a:rPr lang="en-US" smtClean="0"/>
+              <a:rPr lang="en-US"/>
               <a:t>Third level</a:t>
             </a:r>
           </a:p>
           <a:p>
             <a:pPr lvl="3"/>
             <a:r>
-              <a:rPr lang="en-US" smtClean="0"/>
+              <a:rPr lang="en-US"/>
               <a:t>Fourth level</a:t>
             </a:r>
           </a:p>
           <a:p>
             <a:pPr lvl="4"/>
             <a:r>
-              <a:rPr lang="en-US" smtClean="0"/>
+              <a:rPr lang="en-US"/>
               <a:t>Fifth level</a:t>
             </a:r>
-            <a:endParaRPr lang="en-US"/>
           </a:p>
         </p:txBody>
       </p:sp>
@@ -1872,7 +1591,7 @@
           <a:p>
             <a:fld id="{5BCAD085-E8A6-8845-BD4E-CB4CCA059FC4}" type="datetimeFigureOut">
               <a:rPr lang="en-US" smtClean="0"/>
-              <a:t>1/27/13</a:t>
+              <a:t>9/18/2026</a:t>
             </a:fld>
             <a:endParaRPr lang="en-US"/>
           </a:p>
@@ -1971,10 +1690,9 @@
           <a:lstStyle/>
           <a:p>
             <a:r>
-              <a:rPr lang="en-US" smtClean="0"/>
+              <a:rPr lang="en-US"/>
               <a:t>Click to edit Master title style</a:t>
             </a:r>
-            <a:endParaRPr lang="en-US"/>
           </a:p>
         </p:txBody>
       </p:sp>
@@ -2000,38 +1718,37 @@
           <a:p>
             <a:pPr lvl="0"/>
             <a:r>
-              <a:rPr lang="en-US" smtClean="0"/>
+              <a:rPr lang="en-US"/>
               <a:t>Click to edit Master text styles</a:t>
             </a:r>
           </a:p>
           <a:p>
             <a:pPr lvl="1"/>
             <a:r>
-              <a:rPr lang="en-US" smtClean="0"/>
+              <a:rPr lang="en-US"/>
               <a:t>Second level</a:t>
             </a:r>
           </a:p>
           <a:p>
             <a:pPr lvl="2"/>
             <a:r>
-              <a:rPr lang="en-US" smtClean="0"/>
+              <a:rPr lang="en-US"/>
               <a:t>Third level</a:t>
             </a:r>
           </a:p>
           <a:p>
             <a:pPr lvl="3"/>
             <a:r>
-              <a:rPr lang="en-US" smtClean="0"/>
+              <a:rPr lang="en-US"/>
               <a:t>Fourth level</a:t>
             </a:r>
           </a:p>
           <a:p>
             <a:pPr lvl="4"/>
             <a:r>
-              <a:rPr lang="en-US" smtClean="0"/>
+              <a:rPr lang="en-US"/>
               <a:t>Fifth level</a:t>
             </a:r>
-            <a:endParaRPr lang="en-US"/>
           </a:p>
         </p:txBody>
       </p:sp>
@@ -2052,7 +1769,7 @@
           <a:p>
             <a:fld id="{5BCAD085-E8A6-8845-BD4E-CB4CCA059FC4}" type="datetimeFigureOut">
               <a:rPr lang="en-US" smtClean="0"/>
-              <a:t>1/27/13</a:t>
+              <a:t>9/18/2026</a:t>
             </a:fld>
             <a:endParaRPr lang="en-US"/>
           </a:p>
@@ -2146,10 +1863,9 @@
           <a:lstStyle/>
           <a:p>
             <a:r>
-              <a:rPr lang="en-US" smtClean="0"/>
+              <a:rPr lang="en-US"/>
               <a:t>Click to edit Master title style</a:t>
             </a:r>
-            <a:endParaRPr lang="en-US"/>
           </a:p>
         </p:txBody>
       </p:sp>
@@ -2170,38 +1886,37 @@
           <a:p>
             <a:pPr lvl="0"/>
             <a:r>
-              <a:rPr lang="en-US" smtClean="0"/>
+              <a:rPr lang="en-US"/>
               <a:t>Click to edit Master text styles</a:t>
             </a:r>
           </a:p>
           <a:p>
             <a:pPr lvl="1"/>
             <a:r>
-              <a:rPr lang="en-US" smtClean="0"/>
+              <a:rPr lang="en-US"/>
               <a:t>Second level</a:t>
             </a:r>
           </a:p>
           <a:p>
             <a:pPr lvl="2"/>
             <a:r>
-              <a:rPr lang="en-US" smtClean="0"/>
+              <a:rPr lang="en-US"/>
               <a:t>Third level</a:t>
             </a:r>
           </a:p>
           <a:p>
             <a:pPr lvl="3"/>
             <a:r>
-              <a:rPr lang="en-US" smtClean="0"/>
+              <a:rPr lang="en-US"/>
               <a:t>Fourth level</a:t>
             </a:r>
           </a:p>
           <a:p>
             <a:pPr lvl="4"/>
             <a:r>
-              <a:rPr lang="en-US" smtClean="0"/>
+              <a:rPr lang="en-US"/>
               <a:t>Fifth level</a:t>
             </a:r>
-            <a:endParaRPr lang="en-US"/>
           </a:p>
         </p:txBody>
       </p:sp>
@@ -2222,7 +1937,7 @@
           <a:p>
             <a:fld id="{5BCAD085-E8A6-8845-BD4E-CB4CCA059FC4}" type="datetimeFigureOut">
               <a:rPr lang="en-US" smtClean="0"/>
-              <a:t>1/27/13</a:t>
+              <a:t>9/18/2026</a:t>
             </a:fld>
             <a:endParaRPr lang="en-US"/>
           </a:p>
@@ -2325,10 +2040,9 @@
           </a:lstStyle>
           <a:p>
             <a:r>
-              <a:rPr lang="en-US" smtClean="0"/>
+              <a:rPr lang="en-US"/>
               <a:t>Click to edit Master title style</a:t>
             </a:r>
-            <a:endParaRPr lang="en-US"/>
           </a:p>
         </p:txBody>
       </p:sp>
@@ -2445,7 +2159,7 @@
           <a:p>
             <a:pPr lvl="0"/>
             <a:r>
-              <a:rPr lang="en-US" smtClean="0"/>
+              <a:rPr lang="en-US"/>
               <a:t>Click to edit Master text styles</a:t>
             </a:r>
           </a:p>
@@ -2468,7 +2182,7 @@
           <a:p>
             <a:fld id="{5BCAD085-E8A6-8845-BD4E-CB4CCA059FC4}" type="datetimeFigureOut">
               <a:rPr lang="en-US" smtClean="0"/>
-              <a:t>1/27/13</a:t>
+              <a:t>9/18/2026</a:t>
             </a:fld>
             <a:endParaRPr lang="en-US"/>
           </a:p>
@@ -2562,10 +2276,9 @@
           <a:lstStyle/>
           <a:p>
             <a:r>
-              <a:rPr lang="en-US" smtClean="0"/>
+              <a:rPr lang="en-US"/>
               <a:t>Click to edit Master title style</a:t>
             </a:r>
-            <a:endParaRPr lang="en-US"/>
           </a:p>
         </p:txBody>
       </p:sp>
@@ -2619,38 +2332,37 @@
           <a:p>
             <a:pPr lvl="0"/>
             <a:r>
-              <a:rPr lang="en-US" smtClean="0"/>
+              <a:rPr lang="en-US"/>
               <a:t>Click to edit Master text styles</a:t>
             </a:r>
           </a:p>
           <a:p>
             <a:pPr lvl="1"/>
             <a:r>
-              <a:rPr lang="en-US" smtClean="0"/>
+              <a:rPr lang="en-US"/>
               <a:t>Second level</a:t>
             </a:r>
           </a:p>
           <a:p>
             <a:pPr lvl="2"/>
             <a:r>
-              <a:rPr lang="en-US" smtClean="0"/>
+              <a:rPr lang="en-US"/>
               <a:t>Third level</a:t>
             </a:r>
           </a:p>
           <a:p>
             <a:pPr lvl="3"/>
             <a:r>
-              <a:rPr lang="en-US" smtClean="0"/>
+              <a:rPr lang="en-US"/>
               <a:t>Fourth level</a:t>
             </a:r>
           </a:p>
           <a:p>
             <a:pPr lvl="4"/>
             <a:r>
-              <a:rPr lang="en-US" smtClean="0"/>
+              <a:rPr lang="en-US"/>
               <a:t>Fifth level</a:t>
             </a:r>
-            <a:endParaRPr lang="en-US"/>
           </a:p>
         </p:txBody>
       </p:sp>
@@ -2704,38 +2416,37 @@
           <a:p>
             <a:pPr lvl="0"/>
             <a:r>
-              <a:rPr lang="en-US" smtClean="0"/>
+              <a:rPr lang="en-US"/>
               <a:t>Click to edit Master text styles</a:t>
             </a:r>
           </a:p>
           <a:p>
             <a:pPr lvl="1"/>
             <a:r>
-              <a:rPr lang="en-US" smtClean="0"/>
+              <a:rPr lang="en-US"/>
               <a:t>Second level</a:t>
             </a:r>
           </a:p>
           <a:p>
             <a:pPr lvl="2"/>
             <a:r>
-              <a:rPr lang="en-US" smtClean="0"/>
+              <a:rPr lang="en-US"/>
               <a:t>Third level</a:t>
             </a:r>
           </a:p>
           <a:p>
             <a:pPr lvl="3"/>
             <a:r>
-              <a:rPr lang="en-US" smtClean="0"/>
+              <a:rPr lang="en-US"/>
               <a:t>Fourth level</a:t>
             </a:r>
           </a:p>
           <a:p>
             <a:pPr lvl="4"/>
             <a:r>
-              <a:rPr lang="en-US" smtClean="0"/>
+              <a:rPr lang="en-US"/>
               <a:t>Fifth level</a:t>
             </a:r>
-            <a:endParaRPr lang="en-US"/>
           </a:p>
         </p:txBody>
       </p:sp>
@@ -2756,7 +2467,7 @@
           <a:p>
             <a:fld id="{5BCAD085-E8A6-8845-BD4E-CB4CCA059FC4}" type="datetimeFigureOut">
               <a:rPr lang="en-US" smtClean="0"/>
-              <a:t>1/27/13</a:t>
+              <a:t>9/18/2026</a:t>
             </a:fld>
             <a:endParaRPr lang="en-US"/>
           </a:p>
@@ -2854,10 +2565,9 @@
           </a:lstStyle>
           <a:p>
             <a:r>
-              <a:rPr lang="en-US" smtClean="0"/>
+              <a:rPr lang="en-US"/>
               <a:t>Click to edit Master title style</a:t>
             </a:r>
-            <a:endParaRPr lang="en-US"/>
           </a:p>
         </p:txBody>
       </p:sp>
@@ -2920,7 +2630,7 @@
           <a:p>
             <a:pPr lvl="0"/>
             <a:r>
-              <a:rPr lang="en-US" smtClean="0"/>
+              <a:rPr lang="en-US"/>
               <a:t>Click to edit Master text styles</a:t>
             </a:r>
           </a:p>
@@ -2976,38 +2686,37 @@
           <a:p>
             <a:pPr lvl="0"/>
             <a:r>
-              <a:rPr lang="en-US" smtClean="0"/>
+              <a:rPr lang="en-US"/>
               <a:t>Click to edit Master text styles</a:t>
             </a:r>
           </a:p>
           <a:p>
             <a:pPr lvl="1"/>
             <a:r>
-              <a:rPr lang="en-US" smtClean="0"/>
+              <a:rPr lang="en-US"/>
               <a:t>Second level</a:t>
             </a:r>
           </a:p>
           <a:p>
             <a:pPr lvl="2"/>
             <a:r>
-              <a:rPr lang="en-US" smtClean="0"/>
+              <a:rPr lang="en-US"/>
               <a:t>Third level</a:t>
             </a:r>
           </a:p>
           <a:p>
             <a:pPr lvl="3"/>
             <a:r>
-              <a:rPr lang="en-US" smtClean="0"/>
+              <a:rPr lang="en-US"/>
               <a:t>Fourth level</a:t>
             </a:r>
           </a:p>
           <a:p>
             <a:pPr lvl="4"/>
             <a:r>
-              <a:rPr lang="en-US" smtClean="0"/>
+              <a:rPr lang="en-US"/>
               <a:t>Fifth level</a:t>
             </a:r>
-            <a:endParaRPr lang="en-US"/>
           </a:p>
         </p:txBody>
       </p:sp>
@@ -3070,7 +2779,7 @@
           <a:p>
             <a:pPr lvl="0"/>
             <a:r>
-              <a:rPr lang="en-US" smtClean="0"/>
+              <a:rPr lang="en-US"/>
               <a:t>Click to edit Master text styles</a:t>
             </a:r>
           </a:p>
@@ -3126,38 +2835,37 @@
           <a:p>
             <a:pPr lvl="0"/>
             <a:r>
-              <a:rPr lang="en-US" smtClean="0"/>
+              <a:rPr lang="en-US"/>
               <a:t>Click to edit Master text styles</a:t>
             </a:r>
           </a:p>
           <a:p>
             <a:pPr lvl="1"/>
             <a:r>
-              <a:rPr lang="en-US" smtClean="0"/>
+              <a:rPr lang="en-US"/>
               <a:t>Second level</a:t>
             </a:r>
           </a:p>
           <a:p>
             <a:pPr lvl="2"/>
             <a:r>
-              <a:rPr lang="en-US" smtClean="0"/>
+              <a:rPr lang="en-US"/>
               <a:t>Third level</a:t>
             </a:r>
           </a:p>
           <a:p>
             <a:pPr lvl="3"/>
             <a:r>
-              <a:rPr lang="en-US" smtClean="0"/>
+              <a:rPr lang="en-US"/>
               <a:t>Fourth level</a:t>
             </a:r>
           </a:p>
           <a:p>
             <a:pPr lvl="4"/>
             <a:r>
-              <a:rPr lang="en-US" smtClean="0"/>
+              <a:rPr lang="en-US"/>
               <a:t>Fifth level</a:t>
             </a:r>
-            <a:endParaRPr lang="en-US"/>
           </a:p>
         </p:txBody>
       </p:sp>
@@ -3178,7 +2886,7 @@
           <a:p>
             <a:fld id="{5BCAD085-E8A6-8845-BD4E-CB4CCA059FC4}" type="datetimeFigureOut">
               <a:rPr lang="en-US" smtClean="0"/>
-              <a:t>1/27/13</a:t>
+              <a:t>9/18/2026</a:t>
             </a:fld>
             <a:endParaRPr lang="en-US"/>
           </a:p>
@@ -3272,10 +2980,9 @@
           <a:lstStyle/>
           <a:p>
             <a:r>
-              <a:rPr lang="en-US" smtClean="0"/>
+              <a:rPr lang="en-US"/>
               <a:t>Click to edit Master title style</a:t>
             </a:r>
-            <a:endParaRPr lang="en-US"/>
           </a:p>
         </p:txBody>
       </p:sp>
@@ -3296,7 +3003,7 @@
           <a:p>
             <a:fld id="{5BCAD085-E8A6-8845-BD4E-CB4CCA059FC4}" type="datetimeFigureOut">
               <a:rPr lang="en-US" smtClean="0"/>
-              <a:t>1/27/13</a:t>
+              <a:t>9/18/2026</a:t>
             </a:fld>
             <a:endParaRPr lang="en-US"/>
           </a:p>
@@ -3391,7 +3098,7 @@
           <a:p>
             <a:fld id="{5BCAD085-E8A6-8845-BD4E-CB4CCA059FC4}" type="datetimeFigureOut">
               <a:rPr lang="en-US" smtClean="0"/>
-              <a:t>1/27/13</a:t>
+              <a:t>9/18/2026</a:t>
             </a:fld>
             <a:endParaRPr lang="en-US"/>
           </a:p>
@@ -3494,10 +3201,9 @@
           </a:lstStyle>
           <a:p>
             <a:r>
-              <a:rPr lang="en-US" smtClean="0"/>
+              <a:rPr lang="en-US"/>
               <a:t>Click to edit Master title style</a:t>
             </a:r>
-            <a:endParaRPr lang="en-US"/>
           </a:p>
         </p:txBody>
       </p:sp>
@@ -3551,38 +3257,37 @@
           <a:p>
             <a:pPr lvl="0"/>
             <a:r>
-              <a:rPr lang="en-US" smtClean="0"/>
+              <a:rPr lang="en-US"/>
               <a:t>Click to edit Master text styles</a:t>
             </a:r>
           </a:p>
           <a:p>
             <a:pPr lvl="1"/>
             <a:r>
-              <a:rPr lang="en-US" smtClean="0"/>
+              <a:rPr lang="en-US"/>
               <a:t>Second level</a:t>
             </a:r>
           </a:p>
           <a:p>
             <a:pPr lvl="2"/>
             <a:r>
-              <a:rPr lang="en-US" smtClean="0"/>
+              <a:rPr lang="en-US"/>
               <a:t>Third level</a:t>
             </a:r>
           </a:p>
           <a:p>
             <a:pPr lvl="3"/>
             <a:r>
-              <a:rPr lang="en-US" smtClean="0"/>
+              <a:rPr lang="en-US"/>
               <a:t>Fourth level</a:t>
             </a:r>
           </a:p>
           <a:p>
             <a:pPr lvl="4"/>
             <a:r>
-              <a:rPr lang="en-US" smtClean="0"/>
+              <a:rPr lang="en-US"/>
               <a:t>Fifth level</a:t>
             </a:r>
-            <a:endParaRPr lang="en-US"/>
           </a:p>
         </p:txBody>
       </p:sp>
@@ -3645,7 +3350,7 @@
           <a:p>
             <a:pPr lvl="0"/>
             <a:r>
-              <a:rPr lang="en-US" smtClean="0"/>
+              <a:rPr lang="en-US"/>
               <a:t>Click to edit Master text styles</a:t>
             </a:r>
           </a:p>
@@ -3668,7 +3373,7 @@
           <a:p>
             <a:fld id="{5BCAD085-E8A6-8845-BD4E-CB4CCA059FC4}" type="datetimeFigureOut">
               <a:rPr lang="en-US" smtClean="0"/>
-              <a:t>1/27/13</a:t>
+              <a:t>9/18/2026</a:t>
             </a:fld>
             <a:endParaRPr lang="en-US"/>
           </a:p>
@@ -3771,10 +3476,9 @@
           </a:lstStyle>
           <a:p>
             <a:r>
-              <a:rPr lang="en-US" smtClean="0"/>
+              <a:rPr lang="en-US"/>
               <a:t>Click to edit Master title style</a:t>
             </a:r>
-            <a:endParaRPr lang="en-US"/>
           </a:p>
         </p:txBody>
       </p:sp>
@@ -3898,7 +3602,7 @@
           <a:p>
             <a:pPr lvl="0"/>
             <a:r>
-              <a:rPr lang="en-US" smtClean="0"/>
+              <a:rPr lang="en-US"/>
               <a:t>Click to edit Master text styles</a:t>
             </a:r>
           </a:p>
@@ -3921,7 +3625,7 @@
           <a:p>
             <a:fld id="{5BCAD085-E8A6-8845-BD4E-CB4CCA059FC4}" type="datetimeFigureOut">
               <a:rPr lang="en-US" smtClean="0"/>
-              <a:t>1/27/13</a:t>
+              <a:t>9/18/2026</a:t>
             </a:fld>
             <a:endParaRPr lang="en-US"/>
           </a:p>
@@ -4030,10 +3734,9 @@
           <a:lstStyle/>
           <a:p>
             <a:r>
-              <a:rPr lang="en-US" smtClean="0"/>
+              <a:rPr lang="en-US"/>
               <a:t>Click to edit Master title style</a:t>
             </a:r>
-            <a:endParaRPr lang="en-US"/>
           </a:p>
         </p:txBody>
       </p:sp>
@@ -4064,38 +3767,37 @@
           <a:p>
             <a:pPr lvl="0"/>
             <a:r>
-              <a:rPr lang="en-US" smtClean="0"/>
+              <a:rPr lang="en-US"/>
               <a:t>Click to edit Master text styles</a:t>
             </a:r>
           </a:p>
           <a:p>
             <a:pPr lvl="1"/>
             <a:r>
-              <a:rPr lang="en-US" smtClean="0"/>
+              <a:rPr lang="en-US"/>
               <a:t>Second level</a:t>
             </a:r>
           </a:p>
           <a:p>
             <a:pPr lvl="2"/>
             <a:r>
-              <a:rPr lang="en-US" smtClean="0"/>
+              <a:rPr lang="en-US"/>
               <a:t>Third level</a:t>
             </a:r>
           </a:p>
           <a:p>
             <a:pPr lvl="3"/>
             <a:r>
-              <a:rPr lang="en-US" smtClean="0"/>
+              <a:rPr lang="en-US"/>
               <a:t>Fourth level</a:t>
             </a:r>
           </a:p>
           <a:p>
             <a:pPr lvl="4"/>
             <a:r>
-              <a:rPr lang="en-US" smtClean="0"/>
+              <a:rPr lang="en-US"/>
               <a:t>Fifth level</a:t>
             </a:r>
-            <a:endParaRPr lang="en-US"/>
           </a:p>
         </p:txBody>
       </p:sp>
@@ -4134,7 +3836,7 @@
           <a:p>
             <a:fld id="{5BCAD085-E8A6-8845-BD4E-CB4CCA059FC4}" type="datetimeFigureOut">
               <a:rPr lang="en-US" smtClean="0"/>
-              <a:t>1/27/13</a:t>
+              <a:t>9/18/2026</a:t>
             </a:fld>
             <a:endParaRPr lang="en-US"/>
           </a:p>
@@ -4493,7 +4195,7 @@
 </file>
 
 <file path=ppt/slides/slide1.xml><?xml version="1.0" encoding="utf-8"?>
-<p:sld xmlns:a="http://schemas.openxmlformats.org/drawingml/2006/main" xmlns:p="http://schemas.openxmlformats.org/presentationml/2006/main" xmlns:r="http://schemas.openxmlformats.org/officeDocument/2006/relationships">
+<p:sld xmlns:a="http://schemas.openxmlformats.org/drawingml/2006/main" xmlns:r="http://schemas.openxmlformats.org/officeDocument/2006/relationships" xmlns:p="http://schemas.openxmlformats.org/presentationml/2006/main">
   <p:cSld>
     <p:spTree>
       <p:nvGrpSpPr>
@@ -4501,7 +4203,14 @@
         <p:cNvGrpSpPr/>
         <p:nvPr/>
       </p:nvGrpSpPr>
-      <p:grpSpPr/>
+      <p:grpSpPr>
+        <a:xfrm>
+          <a:off x="0" y="0"/>
+          <a:ext cx="0" cy="0"/>
+          <a:chOff x="0" y="0"/>
+          <a:chExt cx="0" cy="0"/>
+        </a:xfrm>
+      </p:grpSpPr>
       <p:sp>
         <p:nvSpPr>
           <p:cNvPr id="2" name="Rectangle 1"/>
@@ -4542,6 +4251,7 @@
           <a:lstStyle/>
           <a:p>
             <a:pPr algn="ctr"/>
+            <a:endParaRPr/>
           </a:p>
         </p:txBody>
       </p:sp>
@@ -4585,6 +4295,7 @@
           <a:lstStyle/>
           <a:p>
             <a:pPr algn="ctr"/>
+            <a:endParaRPr/>
           </a:p>
         </p:txBody>
       </p:sp>
@@ -4628,6 +4339,7 @@
           <a:lstStyle/>
           <a:p>
             <a:pPr algn="ctr"/>
+            <a:endParaRPr/>
           </a:p>
         </p:txBody>
       </p:sp>
@@ -4640,7 +4352,7 @@
           <p:nvPr/>
         </p:nvPicPr>
         <p:blipFill>
-          <a:blip r:embed="rId2"/>
+          <a:blip r:embed="rId3"/>
           <a:stretch>
             <a:fillRect/>
           </a:stretch>
@@ -4747,7 +4459,7 @@
           <a:p>
             <a:pPr algn="l"/>
             <a:r>
-              <a:rPr sz="1800" b="0">
+              <a:rPr sz="1800" b="0" dirty="0" err="1">
                 <a:solidFill>
                   <a:srgbClr val="E9E7E2"/>
                 </a:solidFill>
@@ -4755,8 +4467,74 @@
                 <a:ea typeface="Microsoft JhengHei"/>
                 <a:cs typeface="Microsoft JhengHei"/>
               </a:rPr>
-              <a:t>把餐廳菜單、論壇揪團與帳本收進同一套系統。
-寫入走 Discord，查閱走校內網站。</a:t>
+              <a:t>把餐廳菜單、論壇揪團與帳本收進同一套系統</a:t>
+            </a:r>
+            <a:r>
+              <a:rPr sz="1800" b="0" dirty="0">
+                <a:solidFill>
+                  <a:srgbClr val="E9E7E2"/>
+                </a:solidFill>
+                <a:latin typeface="Microsoft JhengHei"/>
+                <a:ea typeface="Microsoft JhengHei"/>
+                <a:cs typeface="Microsoft JhengHei"/>
+              </a:rPr>
+              <a:t>。
+</a:t>
+            </a:r>
+            <a:r>
+              <a:rPr sz="1800" b="0" dirty="0" err="1">
+                <a:solidFill>
+                  <a:srgbClr val="E9E7E2"/>
+                </a:solidFill>
+                <a:latin typeface="Microsoft JhengHei"/>
+                <a:ea typeface="Microsoft JhengHei"/>
+                <a:cs typeface="Microsoft JhengHei"/>
+              </a:rPr>
+              <a:t>寫入走</a:t>
+            </a:r>
+            <a:r>
+              <a:rPr sz="1800" b="0" dirty="0">
+                <a:solidFill>
+                  <a:srgbClr val="E9E7E2"/>
+                </a:solidFill>
+                <a:latin typeface="Microsoft JhengHei"/>
+                <a:ea typeface="Microsoft JhengHei"/>
+                <a:cs typeface="Microsoft JhengHei"/>
+              </a:rPr>
+              <a:t> </a:t>
+            </a:r>
+            <a:r>
+              <a:rPr sz="1800" b="0" dirty="0" err="1">
+                <a:solidFill>
+                  <a:srgbClr val="E9E7E2"/>
+                </a:solidFill>
+                <a:latin typeface="Microsoft JhengHei"/>
+                <a:ea typeface="Microsoft JhengHei"/>
+                <a:cs typeface="Microsoft JhengHei"/>
+              </a:rPr>
+              <a:t>Discord，查閱走</a:t>
+            </a:r>
+            <a:r>
+              <a:rPr lang="zh-TW" altLang="en-US" sz="1800" b="0" dirty="0">
+                <a:solidFill>
+                  <a:srgbClr val="E9E7E2"/>
+                </a:solidFill>
+                <a:latin typeface="Microsoft JhengHei"/>
+                <a:ea typeface="Microsoft JhengHei"/>
+                <a:cs typeface="Microsoft JhengHei"/>
+              </a:rPr>
+              <a:t>網站</a:t>
+            </a:r>
+            <a:r>
+              <a:rPr sz="1800" b="0" dirty="0">
+                <a:solidFill>
+                  <a:srgbClr val="E9E7E2"/>
+                </a:solidFill>
+                <a:latin typeface="Microsoft JhengHei"/>
+                <a:ea typeface="Microsoft JhengHei"/>
+                <a:cs typeface="Microsoft JhengHei"/>
+              </a:rPr>
+              <a:t>。</a:t>
             </a:r>
           </a:p>
         </p:txBody>
@@ -4805,7 +4583,7 @@
 </file>
 
 <file path=ppt/slides/slide10.xml><?xml version="1.0" encoding="utf-8"?>
-<p:sld xmlns:a="http://schemas.openxmlformats.org/drawingml/2006/main" xmlns:p="http://schemas.openxmlformats.org/presentationml/2006/main" xmlns:r="http://schemas.openxmlformats.org/officeDocument/2006/relationships">
+<p:sld xmlns:a="http://schemas.openxmlformats.org/drawingml/2006/main" xmlns:r="http://schemas.openxmlformats.org/officeDocument/2006/relationships" xmlns:p="http://schemas.openxmlformats.org/presentationml/2006/main">
   <p:cSld>
     <p:spTree>
       <p:nvGrpSpPr>
@@ -4813,7 +4591,14 @@
         <p:cNvGrpSpPr/>
         <p:nvPr/>
       </p:nvGrpSpPr>
-      <p:grpSpPr/>
+      <p:grpSpPr>
+        <a:xfrm>
+          <a:off x="0" y="0"/>
+          <a:ext cx="0" cy="0"/>
+          <a:chOff x="0" y="0"/>
+          <a:chExt cx="0" cy="0"/>
+        </a:xfrm>
+      </p:grpSpPr>
       <p:sp>
         <p:nvSpPr>
           <p:cNvPr id="2" name="Rectangle 1"/>
@@ -4854,6 +4639,7 @@
           <a:lstStyle/>
           <a:p>
             <a:pPr algn="ctr"/>
+            <a:endParaRPr/>
           </a:p>
         </p:txBody>
       </p:sp>
@@ -4897,6 +4683,7 @@
           <a:lstStyle/>
           <a:p>
             <a:pPr algn="ctr"/>
+            <a:endParaRPr/>
           </a:p>
         </p:txBody>
       </p:sp>
@@ -5010,6 +4797,7 @@
           <a:lstStyle/>
           <a:p>
             <a:pPr algn="ctr"/>
+            <a:endParaRPr/>
           </a:p>
         </p:txBody>
       </p:sp>
@@ -5273,6 +5061,7 @@
           <a:lstStyle/>
           <a:p>
             <a:pPr algn="ctr"/>
+            <a:endParaRPr/>
           </a:p>
         </p:txBody>
       </p:sp>
@@ -5285,7 +5074,7 @@
           <p:nvPr/>
         </p:nvPicPr>
         <p:blipFill>
-          <a:blip r:embed="rId2"/>
+          <a:blip r:embed="rId3"/>
           <a:stretch>
             <a:fillRect/>
           </a:stretch>
@@ -5322,7 +5111,7 @@
           <a:p>
             <a:pPr algn="l"/>
             <a:r>
-              <a:rPr sz="1000" b="0">
+              <a:rPr lang="zh-TW" altLang="en-US" sz="1000" b="0" dirty="0">
                 <a:solidFill>
                   <a:srgbClr val="5D5A55"/>
                 </a:solidFill>
@@ -5330,8 +5119,49 @@
                 <a:ea typeface="Microsoft JhengHei"/>
                 <a:cs typeface="Microsoft JhengHei"/>
               </a:rPr>
-              <a:t>校內網站實機截圖　·　儀表板</a:t>
-            </a:r>
+              <a:t>網站</a:t>
+            </a:r>
+            <a:r>
+              <a:rPr sz="1000" b="0" dirty="0" err="1">
+                <a:solidFill>
+                  <a:srgbClr val="5D5A55"/>
+                </a:solidFill>
+                <a:latin typeface="Microsoft JhengHei"/>
+                <a:ea typeface="Microsoft JhengHei"/>
+                <a:cs typeface="Microsoft JhengHei"/>
+              </a:rPr>
+              <a:t>實機截圖</a:t>
+            </a:r>
+            <a:r>
+              <a:rPr sz="1000" b="0" dirty="0">
+                <a:solidFill>
+                  <a:srgbClr val="5D5A55"/>
+                </a:solidFill>
+                <a:latin typeface="Microsoft JhengHei"/>
+                <a:ea typeface="Microsoft JhengHei"/>
+                <a:cs typeface="Microsoft JhengHei"/>
+              </a:rPr>
+              <a:t>　·　</a:t>
+            </a:r>
+            <a:r>
+              <a:rPr sz="1000" b="0" dirty="0" err="1">
+                <a:solidFill>
+                  <a:srgbClr val="5D5A55"/>
+                </a:solidFill>
+                <a:latin typeface="Microsoft JhengHei"/>
+                <a:ea typeface="Microsoft JhengHei"/>
+                <a:cs typeface="Microsoft JhengHei"/>
+              </a:rPr>
+              <a:t>儀表板</a:t>
+            </a:r>
+            <a:endParaRPr sz="1000" b="0" dirty="0">
+              <a:solidFill>
+                <a:srgbClr val="5D5A55"/>
+              </a:solidFill>
+              <a:latin typeface="Microsoft JhengHei"/>
+              <a:ea typeface="Microsoft JhengHei"/>
+              <a:cs typeface="Microsoft JhengHei"/>
+            </a:endParaRPr>
           </a:p>
         </p:txBody>
       </p:sp>
@@ -5344,7 +5174,7 @@
 </file>
 
 <file path=ppt/slides/slide11.xml><?xml version="1.0" encoding="utf-8"?>
-<p:sld xmlns:a="http://schemas.openxmlformats.org/drawingml/2006/main" xmlns:p="http://schemas.openxmlformats.org/presentationml/2006/main" xmlns:r="http://schemas.openxmlformats.org/officeDocument/2006/relationships">
+<p:sld xmlns:a="http://schemas.openxmlformats.org/drawingml/2006/main" xmlns:r="http://schemas.openxmlformats.org/officeDocument/2006/relationships" xmlns:p="http://schemas.openxmlformats.org/presentationml/2006/main">
   <p:cSld>
     <p:spTree>
       <p:nvGrpSpPr>
@@ -5352,7 +5182,14 @@
         <p:cNvGrpSpPr/>
         <p:nvPr/>
       </p:nvGrpSpPr>
-      <p:grpSpPr/>
+      <p:grpSpPr>
+        <a:xfrm>
+          <a:off x="0" y="0"/>
+          <a:ext cx="0" cy="0"/>
+          <a:chOff x="0" y="0"/>
+          <a:chExt cx="0" cy="0"/>
+        </a:xfrm>
+      </p:grpSpPr>
       <p:sp>
         <p:nvSpPr>
           <p:cNvPr id="2" name="Rectangle 1"/>
@@ -5361,7 +5198,7 @@
         </p:nvSpPr>
         <p:spPr>
           <a:xfrm>
-            <a:off x="0" y="0"/>
+            <a:off x="13957" y="0"/>
             <a:ext cx="12191695" cy="6858000"/>
           </a:xfrm>
           <a:prstGeom prst="rect">
@@ -5393,6 +5230,7 @@
           <a:lstStyle/>
           <a:p>
             <a:pPr algn="ctr"/>
+            <a:endParaRPr/>
           </a:p>
         </p:txBody>
       </p:sp>
@@ -5436,6 +5274,7 @@
           <a:lstStyle/>
           <a:p>
             <a:pPr algn="ctr"/>
+            <a:endParaRPr/>
           </a:p>
         </p:txBody>
       </p:sp>
@@ -5460,17 +5299,14 @@
           <a:lstStyle/>
           <a:p>
             <a:pPr algn="l"/>
-            <a:r>
-              <a:rPr sz="1100" b="1">
-                <a:solidFill>
-                  <a:srgbClr val="B8860B"/>
-                </a:solidFill>
-                <a:latin typeface="Microsoft JhengHei"/>
-                <a:ea typeface="Microsoft JhengHei"/>
-                <a:cs typeface="Microsoft JhengHei"/>
-              </a:rPr>
-              <a:t>技術棧</a:t>
-            </a:r>
+            <a:endParaRPr sz="1100" b="1" dirty="0">
+              <a:solidFill>
+                <a:srgbClr val="B8860B"/>
+              </a:solidFill>
+              <a:latin typeface="Microsoft JhengHei"/>
+              <a:ea typeface="Microsoft JhengHei"/>
+              <a:cs typeface="Microsoft JhengHei"/>
+            </a:endParaRPr>
           </a:p>
         </p:txBody>
       </p:sp>
@@ -5494,18 +5330,22 @@
           <a:bodyPr wrap="square" anchor="t"/>
           <a:lstStyle/>
           <a:p>
+            <a:r>
+              <a:rPr lang="zh-TW" altLang="en-US" sz="2800" b="1" dirty="0">
+                <a:latin typeface="Microsoft JhengHei"/>
+                <a:ea typeface="Microsoft JhengHei"/>
+                <a:cs typeface="Microsoft JhengHei"/>
+              </a:rPr>
+              <a:t>技術棧</a:t>
+            </a:r>
+          </a:p>
+          <a:p>
             <a:pPr algn="l"/>
-            <a:r>
-              <a:rPr sz="2800" b="1">
-                <a:solidFill>
-                  <a:srgbClr val="231815"/>
-                </a:solidFill>
-                <a:latin typeface="Microsoft JhengHei"/>
-                <a:ea typeface="Microsoft JhengHei"/>
-                <a:cs typeface="Microsoft JhengHei"/>
-              </a:rPr>
-              <a:t>實驗室機器跑得動的組合</a:t>
-            </a:r>
+            <a:endParaRPr sz="2800" b="1" dirty="0">
+              <a:latin typeface="Microsoft JhengHei"/>
+              <a:ea typeface="Microsoft JhengHei"/>
+              <a:cs typeface="Microsoft JhengHei"/>
+            </a:endParaRPr>
           </a:p>
         </p:txBody>
       </p:sp>
@@ -5549,6 +5389,7 @@
           <a:lstStyle/>
           <a:p>
             <a:pPr algn="ctr"/>
+            <a:endParaRPr/>
           </a:p>
         </p:txBody>
       </p:sp>
@@ -5699,6 +5540,7 @@
           <a:lstStyle/>
           <a:p>
             <a:pPr algn="ctr"/>
+            <a:endParaRPr/>
           </a:p>
         </p:txBody>
       </p:sp>
@@ -5759,7 +5601,7 @@
           <a:p>
             <a:pPr algn="l"/>
             <a:r>
-              <a:rPr sz="1400" b="0">
+              <a:rPr sz="1400" b="0" dirty="0">
                 <a:solidFill>
                   <a:srgbClr val="231815"/>
                 </a:solidFill>
@@ -5767,7 +5609,7 @@
                 <a:ea typeface="Microsoft JhengHei"/>
                 <a:cs typeface="Microsoft JhengHei"/>
               </a:rPr>
-              <a:t>Node.js 24，TypeScript 直接執行，沒有前端建置步驟</a:t>
+              <a:t>Node.js 24，TypeScript</a:t>
             </a:r>
           </a:p>
         </p:txBody>
@@ -5814,6 +5656,7 @@
           <a:lstStyle/>
           <a:p>
             <a:pPr algn="ctr"/>
+            <a:endParaRPr/>
           </a:p>
         </p:txBody>
       </p:sp>
@@ -5839,7 +5682,7 @@
           <a:p>
             <a:pPr algn="l"/>
             <a:r>
-              <a:rPr sz="1300" b="1">
+              <a:rPr sz="1300" b="1" dirty="0" err="1">
                 <a:solidFill>
                   <a:srgbClr val="B8860B"/>
                 </a:solidFill>
@@ -5849,6 +5692,25 @@
               </a:rPr>
               <a:t>資料</a:t>
             </a:r>
+            <a:r>
+              <a:rPr lang="zh-TW" altLang="en-US" sz="1300" b="1" dirty="0">
+                <a:solidFill>
+                  <a:srgbClr val="B8860B"/>
+                </a:solidFill>
+                <a:latin typeface="Microsoft JhengHei"/>
+                <a:ea typeface="Microsoft JhengHei"/>
+                <a:cs typeface="Microsoft JhengHei"/>
+              </a:rPr>
+              <a:t>庫</a:t>
+            </a:r>
+            <a:endParaRPr sz="1300" b="1" dirty="0">
+              <a:solidFill>
+                <a:srgbClr val="B8860B"/>
+              </a:solidFill>
+              <a:latin typeface="Microsoft JhengHei"/>
+              <a:ea typeface="Microsoft JhengHei"/>
+              <a:cs typeface="Microsoft JhengHei"/>
+            </a:endParaRPr>
           </a:p>
         </p:txBody>
       </p:sp>
@@ -5860,7 +5722,7 @@
         </p:nvSpPr>
         <p:spPr>
           <a:xfrm>
-            <a:off x="7909560" y="1527048"/>
+            <a:off x="7321296" y="1412748"/>
             <a:ext cx="3611880" cy="502920"/>
           </a:xfrm>
           <a:prstGeom prst="rect">
@@ -5874,7 +5736,7 @@
           <a:p>
             <a:pPr algn="l"/>
             <a:r>
-              <a:rPr sz="1400" b="0">
+              <a:rPr sz="1400" b="0" dirty="0">
                 <a:solidFill>
                   <a:srgbClr val="231815"/>
                 </a:solidFill>
@@ -5882,7 +5744,7 @@
                 <a:ea typeface="Microsoft JhengHei"/>
                 <a:cs typeface="Microsoft JhengHei"/>
               </a:rPr>
-              <a:t>PostgreSQL 18.6；金額以整數計算，顯示為新台幣元</a:t>
+              <a:t>PostgreSQL 18.6</a:t>
             </a:r>
           </a:p>
         </p:txBody>
@@ -5929,6 +5791,7 @@
           <a:lstStyle/>
           <a:p>
             <a:pPr algn="ctr"/>
+            <a:endParaRPr/>
           </a:p>
         </p:txBody>
       </p:sp>
@@ -5975,7 +5838,7 @@
         </p:nvSpPr>
         <p:spPr>
           <a:xfrm>
-            <a:off x="2194560" y="2715768"/>
+            <a:off x="2164385" y="2558017"/>
             <a:ext cx="3611880" cy="502920"/>
           </a:xfrm>
           <a:prstGeom prst="rect">
@@ -5987,9 +5850,8 @@
           <a:bodyPr wrap="square" anchor="t"/>
           <a:lstStyle/>
           <a:p>
-            <a:pPr algn="l"/>
-            <a:r>
-              <a:rPr sz="1400" b="0">
+            <a:r>
+              <a:rPr sz="1400" b="0" dirty="0">
                 <a:solidFill>
                   <a:srgbClr val="231815"/>
                 </a:solidFill>
@@ -5997,8 +5859,37 @@
                 <a:ea typeface="Microsoft JhengHei"/>
                 <a:cs typeface="Microsoft JhengHei"/>
               </a:rPr>
-              <a:t>Docker Compose：postgres、web、bot 三個容器</a:t>
-            </a:r>
+              <a:t>Docker Compose：</a:t>
+            </a:r>
+            <a:endParaRPr lang="en-US" sz="1400" b="0" dirty="0">
+              <a:solidFill>
+                <a:srgbClr val="231815"/>
+              </a:solidFill>
+              <a:latin typeface="Microsoft JhengHei"/>
+              <a:ea typeface="Microsoft JhengHei"/>
+              <a:cs typeface="Microsoft JhengHei"/>
+            </a:endParaRPr>
+          </a:p>
+          <a:p>
+            <a:r>
+              <a:rPr lang="zh-TW" altLang="zh-TW" sz="1400" dirty="0"/>
+              <a:t>postgres、ocr、web、bot 四容器</a:t>
+            </a:r>
+            <a:endParaRPr lang="en-US" altLang="zh-TW" sz="1400" dirty="0"/>
+          </a:p>
+          <a:p>
+            <a:r>
+              <a:rPr lang="zh-TW" altLang="zh-TW" sz="1400" dirty="0"/>
+              <a:t>（web 與 bot 共用映像）</a:t>
+            </a:r>
+            <a:endParaRPr sz="1400" b="0" dirty="0">
+              <a:solidFill>
+                <a:srgbClr val="231815"/>
+              </a:solidFill>
+              <a:latin typeface="Microsoft JhengHei"/>
+              <a:ea typeface="Microsoft JhengHei"/>
+              <a:cs typeface="Microsoft JhengHei"/>
+            </a:endParaRPr>
           </a:p>
         </p:txBody>
       </p:sp>
@@ -6044,6 +5935,7 @@
           <a:lstStyle/>
           <a:p>
             <a:pPr algn="ctr"/>
+            <a:endParaRPr/>
           </a:p>
         </p:txBody>
       </p:sp>
@@ -6090,7 +5982,7 @@
         </p:nvSpPr>
         <p:spPr>
           <a:xfrm>
-            <a:off x="7909560" y="2715768"/>
+            <a:off x="7321296" y="2624328"/>
             <a:ext cx="3611880" cy="502920"/>
           </a:xfrm>
           <a:prstGeom prst="rect">
@@ -6104,7 +5996,7 @@
           <a:p>
             <a:pPr algn="l"/>
             <a:r>
-              <a:rPr sz="1400" b="0">
+              <a:rPr sz="1400" b="0" dirty="0">
                 <a:solidFill>
                   <a:srgbClr val="231815"/>
                 </a:solidFill>
@@ -6112,7 +6004,7 @@
                 <a:ea typeface="Microsoft JhengHei"/>
                 <a:cs typeface="Microsoft JhengHei"/>
               </a:rPr>
-              <a:t>discord.js 14；斜線指令、Embed、按鈕與下拉</a:t>
+              <a:t>discord.js 14</a:t>
             </a:r>
           </a:p>
         </p:txBody>
@@ -6159,6 +6051,7 @@
           <a:lstStyle/>
           <a:p>
             <a:pPr algn="ctr"/>
+            <a:endParaRPr/>
           </a:p>
         </p:txBody>
       </p:sp>
@@ -6219,7 +6112,7 @@
           <a:p>
             <a:pPr algn="l"/>
             <a:r>
-              <a:rPr sz="1400" b="0">
+              <a:rPr sz="1400" b="0" dirty="0">
                 <a:solidFill>
                   <a:srgbClr val="231815"/>
                 </a:solidFill>
@@ -6227,8 +6120,49 @@
                 <a:ea typeface="Microsoft JhengHei"/>
                 <a:cs typeface="Microsoft JhengHei"/>
               </a:rPr>
-              <a:t>Node 內建 HTTP、伺服器端渲染；刻意不引網頁框架</a:t>
-            </a:r>
+              <a:t>Node </a:t>
+            </a:r>
+            <a:r>
+              <a:rPr sz="1400" b="0" dirty="0" err="1">
+                <a:solidFill>
+                  <a:srgbClr val="231815"/>
+                </a:solidFill>
+                <a:latin typeface="Microsoft JhengHei"/>
+                <a:ea typeface="Microsoft JhengHei"/>
+                <a:cs typeface="Microsoft JhengHei"/>
+              </a:rPr>
+              <a:t>內建</a:t>
+            </a:r>
+            <a:r>
+              <a:rPr sz="1400" b="0" dirty="0">
+                <a:solidFill>
+                  <a:srgbClr val="231815"/>
+                </a:solidFill>
+                <a:latin typeface="Microsoft JhengHei"/>
+                <a:ea typeface="Microsoft JhengHei"/>
+                <a:cs typeface="Microsoft JhengHei"/>
+              </a:rPr>
+              <a:t> </a:t>
+            </a:r>
+            <a:r>
+              <a:rPr sz="1400" b="0" dirty="0" err="1">
+                <a:solidFill>
+                  <a:srgbClr val="231815"/>
+                </a:solidFill>
+                <a:latin typeface="Microsoft JhengHei"/>
+                <a:ea typeface="Microsoft JhengHei"/>
+                <a:cs typeface="Microsoft JhengHei"/>
+              </a:rPr>
+              <a:t>HTTP、伺服器端渲染</a:t>
+            </a:r>
+            <a:endParaRPr sz="1400" b="0" dirty="0">
+              <a:solidFill>
+                <a:srgbClr val="231815"/>
+              </a:solidFill>
+              <a:latin typeface="Microsoft JhengHei"/>
+              <a:ea typeface="Microsoft JhengHei"/>
+              <a:cs typeface="Microsoft JhengHei"/>
+            </a:endParaRPr>
           </a:p>
         </p:txBody>
       </p:sp>
@@ -6274,6 +6208,7 @@
           <a:lstStyle/>
           <a:p>
             <a:pPr algn="ctr"/>
+            <a:endParaRPr/>
           </a:p>
         </p:txBody>
       </p:sp>
@@ -6320,8 +6255,8 @@
         </p:nvSpPr>
         <p:spPr>
           <a:xfrm>
-            <a:off x="7909560" y="3904488"/>
-            <a:ext cx="3611880" cy="502920"/>
+            <a:off x="7321296" y="3680460"/>
+            <a:ext cx="4611624" cy="923544"/>
           </a:xfrm>
           <a:prstGeom prst="rect">
             <a:avLst/>
@@ -6332,9 +6267,8 @@
           <a:bodyPr wrap="square" anchor="t"/>
           <a:lstStyle/>
           <a:p>
-            <a:pPr algn="l"/>
-            <a:r>
-              <a:rPr sz="1400" b="0">
+            <a:r>
+              <a:rPr lang="zh-TW" altLang="en-US" sz="1400" dirty="0">
                 <a:solidFill>
                   <a:srgbClr val="231815"/>
                 </a:solidFill>
@@ -6342,8 +6276,125 @@
                 <a:ea typeface="Microsoft JhengHei"/>
                 <a:cs typeface="Microsoft JhengHei"/>
               </a:rPr>
-              <a:t>自寫免費 LLM 閘道，OpenAI 相容格式，不引 LLM SDK</a:t>
-            </a:r>
+              <a:t>多把</a:t>
+            </a:r>
+            <a:r>
+              <a:rPr sz="1400" b="0" dirty="0" err="1">
+                <a:solidFill>
+                  <a:srgbClr val="231815"/>
+                </a:solidFill>
+                <a:latin typeface="Microsoft JhengHei"/>
+                <a:ea typeface="Microsoft JhengHei"/>
+                <a:cs typeface="Microsoft JhengHei"/>
+              </a:rPr>
+              <a:t>免費</a:t>
+            </a:r>
+            <a:r>
+              <a:rPr sz="1400" b="0" dirty="0">
+                <a:solidFill>
+                  <a:srgbClr val="231815"/>
+                </a:solidFill>
+                <a:latin typeface="Microsoft JhengHei"/>
+                <a:ea typeface="Microsoft JhengHei"/>
+                <a:cs typeface="Microsoft JhengHei"/>
+              </a:rPr>
+              <a:t> LLM </a:t>
+            </a:r>
+            <a:r>
+              <a:rPr lang="en-US" sz="1400" b="0" dirty="0">
+                <a:solidFill>
+                  <a:srgbClr val="231815"/>
+                </a:solidFill>
+                <a:latin typeface="Microsoft JhengHei"/>
+                <a:ea typeface="Microsoft JhengHei"/>
+                <a:cs typeface="Microsoft JhengHei"/>
+              </a:rPr>
+              <a:t>KEY</a:t>
+            </a:r>
+            <a:r>
+              <a:rPr lang="zh-TW" altLang="en-US" sz="1400" b="0" dirty="0">
+                <a:solidFill>
+                  <a:srgbClr val="231815"/>
+                </a:solidFill>
+                <a:latin typeface="Microsoft JhengHei"/>
+                <a:ea typeface="Microsoft JhengHei"/>
+                <a:cs typeface="Microsoft JhengHei"/>
+              </a:rPr>
+              <a:t>供應</a:t>
+            </a:r>
+            <a:r>
+              <a:rPr lang="en-US" altLang="zh-TW" sz="1400" dirty="0">
+                <a:solidFill>
+                  <a:srgbClr val="231815"/>
+                </a:solidFill>
+                <a:latin typeface="Microsoft JhengHei"/>
+                <a:ea typeface="Microsoft JhengHei"/>
+                <a:cs typeface="Microsoft JhengHei"/>
+              </a:rPr>
+              <a:t>(GEMINI, GROQ,</a:t>
+            </a:r>
+            <a:r>
+              <a:rPr lang="zh-TW" altLang="zh-TW" dirty="0"/>
+              <a:t> MISTRAL</a:t>
+            </a:r>
+          </a:p>
+          <a:p>
+            <a:r>
+              <a:rPr lang="en-US" altLang="zh-TW" sz="1400" dirty="0">
+                <a:solidFill>
+                  <a:srgbClr val="231815"/>
+                </a:solidFill>
+                <a:latin typeface="Microsoft JhengHei"/>
+                <a:ea typeface="Microsoft JhengHei"/>
+                <a:cs typeface="Microsoft JhengHei"/>
+              </a:rPr>
+              <a:t>,</a:t>
+            </a:r>
+            <a:r>
+              <a:rPr lang="zh-TW" altLang="zh-TW" dirty="0"/>
+              <a:t> IAI</a:t>
+            </a:r>
+            <a:r>
+              <a:rPr lang="en-US" altLang="zh-TW" sz="1400" dirty="0">
+                <a:solidFill>
+                  <a:srgbClr val="231815"/>
+                </a:solidFill>
+                <a:latin typeface="Microsoft JhengHei"/>
+                <a:ea typeface="Microsoft JhengHei"/>
+                <a:cs typeface="Microsoft JhengHei"/>
+              </a:rPr>
+              <a:t>)</a:t>
+            </a:r>
+            <a:r>
+              <a:rPr sz="1400" b="0" dirty="0">
+                <a:solidFill>
+                  <a:srgbClr val="231815"/>
+                </a:solidFill>
+                <a:latin typeface="Microsoft JhengHei"/>
+                <a:ea typeface="Microsoft JhengHei"/>
+                <a:cs typeface="Microsoft JhengHei"/>
+              </a:rPr>
+              <a:t>，OpenAI </a:t>
+            </a:r>
+            <a:r>
+              <a:rPr sz="1400" b="0" dirty="0" err="1">
+                <a:solidFill>
+                  <a:srgbClr val="231815"/>
+                </a:solidFill>
+                <a:latin typeface="Microsoft JhengHei"/>
+                <a:ea typeface="Microsoft JhengHei"/>
+                <a:cs typeface="Microsoft JhengHei"/>
+              </a:rPr>
+              <a:t>相容格式</a:t>
+            </a:r>
+            <a:endParaRPr sz="1400" b="0" dirty="0">
+              <a:solidFill>
+                <a:srgbClr val="231815"/>
+              </a:solidFill>
+              <a:latin typeface="Microsoft JhengHei"/>
+              <a:ea typeface="Microsoft JhengHei"/>
+              <a:cs typeface="Microsoft JhengHei"/>
+            </a:endParaRPr>
           </a:p>
         </p:txBody>
       </p:sp>
@@ -6389,6 +6440,7 @@
           <a:lstStyle/>
           <a:p>
             <a:pPr algn="ctr"/>
+            <a:endParaRPr/>
           </a:p>
         </p:txBody>
       </p:sp>
@@ -6449,7 +6501,7 @@
           <a:p>
             <a:pPr algn="l"/>
             <a:r>
-              <a:rPr sz="1400" b="0">
+              <a:rPr lang="en-US" sz="1400" b="0" dirty="0" err="1">
                 <a:solidFill>
                   <a:srgbClr val="231815"/>
                 </a:solidFill>
@@ -6457,114 +6509,10 @@
                 <a:ea typeface="Microsoft JhengHei"/>
                 <a:cs typeface="Microsoft JhengHei"/>
               </a:rPr>
-              <a:t>視覺模型讀菜單圖；可選 PP-OCRv6 做版面對帳</a:t>
-            </a:r>
-          </a:p>
-        </p:txBody>
-      </p:sp>
-      <p:sp>
-        <p:nvSpPr>
-          <p:cNvPr id="31" name="Rounded Rectangle 30"/>
-          <p:cNvSpPr/>
-          <p:nvPr/>
-        </p:nvSpPr>
-        <p:spPr>
-          <a:xfrm>
-            <a:off x="6217920" y="4800600"/>
-            <a:ext cx="5532120" cy="1051560"/>
-          </a:xfrm>
-          <a:prstGeom prst="roundRect">
-            <a:avLst>
-              <a:gd name="adj" fmla="val 8000"/>
-            </a:avLst>
-          </a:prstGeom>
-          <a:solidFill>
-            <a:srgbClr val="FFFFFF"/>
-          </a:solidFill>
-          <a:ln>
-            <a:noFill/>
-          </a:ln>
-        </p:spPr>
-        <p:style>
-          <a:lnRef idx="1">
-            <a:schemeClr val="accent1"/>
-          </a:lnRef>
-          <a:fillRef idx="3">
-            <a:schemeClr val="accent1"/>
-          </a:fillRef>
-          <a:effectRef idx="2">
-            <a:schemeClr val="accent1"/>
-          </a:effectRef>
-          <a:fontRef idx="minor">
-            <a:schemeClr val="lt1"/>
-          </a:fontRef>
-        </p:style>
-        <p:txBody>
-          <a:bodyPr rtlCol="0" anchor="ctr"/>
-          <a:lstStyle/>
-          <a:p>
-            <a:pPr algn="ctr"/>
-          </a:p>
-        </p:txBody>
-      </p:sp>
-      <p:sp>
-        <p:nvSpPr>
-          <p:cNvPr id="32" name="TextBox 31"/>
-          <p:cNvSpPr txBox="1"/>
-          <p:nvPr/>
-        </p:nvSpPr>
-        <p:spPr>
-          <a:xfrm>
-            <a:off x="6446520" y="4965192"/>
-            <a:ext cx="1463040" cy="320040"/>
-          </a:xfrm>
-          <a:prstGeom prst="rect">
-            <a:avLst/>
-          </a:prstGeom>
-          <a:noFill/>
-        </p:spPr>
-        <p:txBody>
-          <a:bodyPr wrap="square" anchor="t"/>
-          <a:lstStyle/>
-          <a:p>
-            <a:pPr algn="l"/>
-            <a:r>
-              <a:rPr sz="1300" b="1">
-                <a:solidFill>
-                  <a:srgbClr val="B8860B"/>
-                </a:solidFill>
-                <a:latin typeface="Microsoft JhengHei"/>
-                <a:ea typeface="Microsoft JhengHei"/>
-                <a:cs typeface="Microsoft JhengHei"/>
-              </a:rPr>
-              <a:t>時區</a:t>
-            </a:r>
-          </a:p>
-        </p:txBody>
-      </p:sp>
-      <p:sp>
-        <p:nvSpPr>
-          <p:cNvPr id="33" name="TextBox 32"/>
-          <p:cNvSpPr txBox="1"/>
-          <p:nvPr/>
-        </p:nvSpPr>
-        <p:spPr>
-          <a:xfrm>
-            <a:off x="7909560" y="5093208"/>
-            <a:ext cx="3611880" cy="502920"/>
-          </a:xfrm>
-          <a:prstGeom prst="rect">
-            <a:avLst/>
-          </a:prstGeom>
-          <a:noFill/>
-        </p:spPr>
-        <p:txBody>
-          <a:bodyPr wrap="square" anchor="t"/>
-          <a:lstStyle/>
-          <a:p>
-            <a:pPr algn="l"/>
-            <a:r>
-              <a:rPr sz="1400" b="0">
+              <a:t>LLM</a:t>
+            </a:r>
+            <a:r>
+              <a:rPr sz="1400" b="0" dirty="0" err="1">
                 <a:solidFill>
                   <a:srgbClr val="231815"/>
                 </a:solidFill>
@@ -6572,8 +6520,49 @@
                 <a:ea typeface="Microsoft JhengHei"/>
                 <a:cs typeface="Microsoft JhengHei"/>
               </a:rPr>
-              <a:t>全程台北時間，日期 YYYY-MM-DD、時間 HH:MM:SS</a:t>
-            </a:r>
+              <a:t>視覺模型讀菜單圖；可</a:t>
+            </a:r>
+            <a:r>
+              <a:rPr lang="zh-TW" altLang="en-US" sz="1400" b="0" dirty="0">
+                <a:solidFill>
+                  <a:srgbClr val="231815"/>
+                </a:solidFill>
+                <a:latin typeface="Microsoft JhengHei"/>
+                <a:ea typeface="Microsoft JhengHei"/>
+                <a:cs typeface="Microsoft JhengHei"/>
+              </a:rPr>
+              <a:t>啟用</a:t>
+            </a:r>
+            <a:r>
+              <a:rPr sz="1400" b="0" dirty="0">
+                <a:solidFill>
+                  <a:srgbClr val="231815"/>
+                </a:solidFill>
+                <a:latin typeface="Microsoft JhengHei"/>
+                <a:ea typeface="Microsoft JhengHei"/>
+                <a:cs typeface="Microsoft JhengHei"/>
+              </a:rPr>
+              <a:t> PP-OCRv6 </a:t>
+            </a:r>
+            <a:r>
+              <a:rPr sz="1400" b="0" dirty="0" err="1">
+                <a:solidFill>
+                  <a:srgbClr val="231815"/>
+                </a:solidFill>
+                <a:latin typeface="Microsoft JhengHei"/>
+                <a:ea typeface="Microsoft JhengHei"/>
+                <a:cs typeface="Microsoft JhengHei"/>
+              </a:rPr>
+              <a:t>做版面對帳</a:t>
+            </a:r>
+            <a:endParaRPr sz="1400" b="0" dirty="0">
+              <a:solidFill>
+                <a:srgbClr val="231815"/>
+              </a:solidFill>
+              <a:latin typeface="Microsoft JhengHei"/>
+              <a:ea typeface="Microsoft JhengHei"/>
+              <a:cs typeface="Microsoft JhengHei"/>
+            </a:endParaRPr>
           </a:p>
         </p:txBody>
       </p:sp>
@@ -6586,7 +6575,7 @@
 </file>
 
 <file path=ppt/slides/slide12.xml><?xml version="1.0" encoding="utf-8"?>
-<p:sld xmlns:a="http://schemas.openxmlformats.org/drawingml/2006/main" xmlns:p="http://schemas.openxmlformats.org/presentationml/2006/main" xmlns:r="http://schemas.openxmlformats.org/officeDocument/2006/relationships">
+<p:sld xmlns:a="http://schemas.openxmlformats.org/drawingml/2006/main" xmlns:r="http://schemas.openxmlformats.org/officeDocument/2006/relationships" xmlns:p="http://schemas.openxmlformats.org/presentationml/2006/main">
   <p:cSld>
     <p:spTree>
       <p:nvGrpSpPr>
@@ -6594,7 +6583,14 @@
         <p:cNvGrpSpPr/>
         <p:nvPr/>
       </p:nvGrpSpPr>
-      <p:grpSpPr/>
+      <p:grpSpPr>
+        <a:xfrm>
+          <a:off x="0" y="0"/>
+          <a:ext cx="0" cy="0"/>
+          <a:chOff x="0" y="0"/>
+          <a:chExt cx="0" cy="0"/>
+        </a:xfrm>
+      </p:grpSpPr>
       <p:sp>
         <p:nvSpPr>
           <p:cNvPr id="2" name="Rectangle 1"/>
@@ -6635,6 +6631,7 @@
           <a:lstStyle/>
           <a:p>
             <a:pPr algn="ctr"/>
+            <a:endParaRPr/>
           </a:p>
         </p:txBody>
       </p:sp>
@@ -6678,6 +6675,7 @@
           <a:lstStyle/>
           <a:p>
             <a:pPr algn="ctr"/>
+            <a:endParaRPr/>
           </a:p>
         </p:txBody>
       </p:sp>
@@ -6791,6 +6789,7 @@
           <a:lstStyle/>
           <a:p>
             <a:pPr algn="ctr"/>
+            <a:endParaRPr/>
           </a:p>
         </p:txBody>
       </p:sp>
@@ -6908,7 +6907,7 @@
           <p:nvPr/>
         </p:nvPicPr>
         <p:blipFill>
-          <a:blip r:embed="rId2"/>
+          <a:blip r:embed="rId3"/>
           <a:stretch>
             <a:fillRect/>
           </a:stretch>
@@ -6932,7 +6931,7 @@
 </file>
 
 <file path=ppt/slides/slide13.xml><?xml version="1.0" encoding="utf-8"?>
-<p:sld xmlns:a="http://schemas.openxmlformats.org/drawingml/2006/main" xmlns:p="http://schemas.openxmlformats.org/presentationml/2006/main" xmlns:r="http://schemas.openxmlformats.org/officeDocument/2006/relationships">
+<p:sld xmlns:a="http://schemas.openxmlformats.org/drawingml/2006/main" xmlns:r="http://schemas.openxmlformats.org/officeDocument/2006/relationships" xmlns:p="http://schemas.openxmlformats.org/presentationml/2006/main">
   <p:cSld>
     <p:spTree>
       <p:nvGrpSpPr>
@@ -6940,7 +6939,14 @@
         <p:cNvGrpSpPr/>
         <p:nvPr/>
       </p:nvGrpSpPr>
-      <p:grpSpPr/>
+      <p:grpSpPr>
+        <a:xfrm>
+          <a:off x="0" y="0"/>
+          <a:ext cx="0" cy="0"/>
+          <a:chOff x="0" y="0"/>
+          <a:chExt cx="0" cy="0"/>
+        </a:xfrm>
+      </p:grpSpPr>
       <p:sp>
         <p:nvSpPr>
           <p:cNvPr id="2" name="Rectangle 1"/>
@@ -6981,6 +6987,7 @@
           <a:lstStyle/>
           <a:p>
             <a:pPr algn="ctr"/>
+            <a:endParaRPr/>
           </a:p>
         </p:txBody>
       </p:sp>
@@ -7024,6 +7031,7 @@
           <a:lstStyle/>
           <a:p>
             <a:pPr algn="ctr"/>
+            <a:endParaRPr/>
           </a:p>
         </p:txBody>
       </p:sp>
@@ -7137,6 +7145,7 @@
           <a:lstStyle/>
           <a:p>
             <a:pPr algn="ctr"/>
+            <a:endParaRPr/>
           </a:p>
         </p:txBody>
       </p:sp>
@@ -7287,6 +7296,7 @@
           <a:lstStyle/>
           <a:p>
             <a:pPr algn="ctr"/>
+            <a:endParaRPr/>
           </a:p>
         </p:txBody>
       </p:sp>
@@ -7330,6 +7340,7 @@
           <a:lstStyle/>
           <a:p>
             <a:pPr algn="ctr"/>
+            <a:endParaRPr/>
           </a:p>
         </p:txBody>
       </p:sp>
@@ -7445,6 +7456,7 @@
           <a:lstStyle/>
           <a:p>
             <a:pPr algn="ctr"/>
+            <a:endParaRPr/>
           </a:p>
         </p:txBody>
       </p:sp>
@@ -7488,6 +7500,7 @@
           <a:lstStyle/>
           <a:p>
             <a:pPr algn="ctr"/>
+            <a:endParaRPr/>
           </a:p>
         </p:txBody>
       </p:sp>
@@ -7603,6 +7616,7 @@
           <a:lstStyle/>
           <a:p>
             <a:pPr algn="ctr"/>
+            <a:endParaRPr/>
           </a:p>
         </p:txBody>
       </p:sp>
@@ -7646,6 +7660,7 @@
           <a:lstStyle/>
           <a:p>
             <a:pPr algn="ctr"/>
+            <a:endParaRPr/>
           </a:p>
         </p:txBody>
       </p:sp>
@@ -7761,6 +7776,7 @@
           <a:lstStyle/>
           <a:p>
             <a:pPr algn="ctr"/>
+            <a:endParaRPr/>
           </a:p>
         </p:txBody>
       </p:sp>
@@ -7804,6 +7820,7 @@
           <a:lstStyle/>
           <a:p>
             <a:pPr algn="ctr"/>
+            <a:endParaRPr/>
           </a:p>
         </p:txBody>
       </p:sp>
@@ -7886,7 +7903,7 @@
 </file>
 
 <file path=ppt/slides/slide14.xml><?xml version="1.0" encoding="utf-8"?>
-<p:sld xmlns:a="http://schemas.openxmlformats.org/drawingml/2006/main" xmlns:p="http://schemas.openxmlformats.org/presentationml/2006/main" xmlns:r="http://schemas.openxmlformats.org/officeDocument/2006/relationships">
+<p:sld xmlns:a="http://schemas.openxmlformats.org/drawingml/2006/main" xmlns:r="http://schemas.openxmlformats.org/officeDocument/2006/relationships" xmlns:p="http://schemas.openxmlformats.org/presentationml/2006/main">
   <p:cSld>
     <p:spTree>
       <p:nvGrpSpPr>
@@ -7894,7 +7911,14 @@
         <p:cNvGrpSpPr/>
         <p:nvPr/>
       </p:nvGrpSpPr>
-      <p:grpSpPr/>
+      <p:grpSpPr>
+        <a:xfrm>
+          <a:off x="0" y="0"/>
+          <a:ext cx="0" cy="0"/>
+          <a:chOff x="0" y="0"/>
+          <a:chExt cx="0" cy="0"/>
+        </a:xfrm>
+      </p:grpSpPr>
       <p:sp>
         <p:nvSpPr>
           <p:cNvPr id="2" name="Rectangle 1"/>
@@ -7935,6 +7959,7 @@
           <a:lstStyle/>
           <a:p>
             <a:pPr algn="ctr"/>
+            <a:endParaRPr/>
           </a:p>
         </p:txBody>
       </p:sp>
@@ -7978,6 +8003,7 @@
           <a:lstStyle/>
           <a:p>
             <a:pPr algn="ctr"/>
+            <a:endParaRPr/>
           </a:p>
         </p:txBody>
       </p:sp>
@@ -8038,7 +8064,7 @@
           <a:p>
             <a:pPr algn="l"/>
             <a:r>
-              <a:rPr sz="2800" b="1">
+              <a:rPr sz="2800" b="1" dirty="0" err="1">
                 <a:solidFill>
                   <a:srgbClr val="231815"/>
                 </a:solidFill>
@@ -8046,8 +8072,16 @@
                 <a:ea typeface="Microsoft JhengHei"/>
                 <a:cs typeface="Microsoft JhengHei"/>
               </a:rPr>
-              <a:t>八支斜線指令</a:t>
-            </a:r>
+              <a:t>斜線指令</a:t>
+            </a:r>
+            <a:endParaRPr sz="2800" b="1" dirty="0">
+              <a:solidFill>
+                <a:srgbClr val="231815"/>
+              </a:solidFill>
+              <a:latin typeface="Microsoft JhengHei"/>
+              <a:ea typeface="Microsoft JhengHei"/>
+              <a:cs typeface="Microsoft JhengHei"/>
+            </a:endParaRPr>
           </a:p>
         </p:txBody>
       </p:sp>
@@ -8091,6 +8125,7 @@
           <a:lstStyle/>
           <a:p>
             <a:pPr algn="ctr"/>
+            <a:endParaRPr/>
           </a:p>
         </p:txBody>
       </p:sp>
@@ -8241,6 +8276,7 @@
           <a:lstStyle/>
           <a:p>
             <a:pPr algn="ctr"/>
+            <a:endParaRPr/>
           </a:p>
         </p:txBody>
       </p:sp>
@@ -8356,6 +8392,7 @@
           <a:lstStyle/>
           <a:p>
             <a:pPr algn="ctr"/>
+            <a:endParaRPr/>
           </a:p>
         </p:txBody>
       </p:sp>
@@ -8471,6 +8508,7 @@
           <a:lstStyle/>
           <a:p>
             <a:pPr algn="ctr"/>
+            <a:endParaRPr/>
           </a:p>
         </p:txBody>
       </p:sp>
@@ -8586,6 +8624,7 @@
           <a:lstStyle/>
           <a:p>
             <a:pPr algn="ctr"/>
+            <a:endParaRPr/>
           </a:p>
         </p:txBody>
       </p:sp>
@@ -8701,6 +8740,7 @@
           <a:lstStyle/>
           <a:p>
             <a:pPr algn="ctr"/>
+            <a:endParaRPr/>
           </a:p>
         </p:txBody>
       </p:sp>
@@ -8816,6 +8856,7 @@
           <a:lstStyle/>
           <a:p>
             <a:pPr algn="ctr"/>
+            <a:endParaRPr/>
           </a:p>
         </p:txBody>
       </p:sp>
@@ -8931,6 +8972,7 @@
           <a:lstStyle/>
           <a:p>
             <a:pPr algn="ctr"/>
+            <a:endParaRPr/>
           </a:p>
         </p:txBody>
       </p:sp>
@@ -8991,7 +9033,7 @@
           <a:p>
             <a:pPr algn="l"/>
             <a:r>
-              <a:rPr sz="1200" b="0">
+              <a:rPr sz="1200" b="0" dirty="0" err="1">
                 <a:solidFill>
                   <a:srgbClr val="5D5A55"/>
                 </a:solidFill>
@@ -8999,8 +9041,16 @@
                 <a:ea typeface="Microsoft JhengHei"/>
                 <a:cs typeface="Microsoft JhengHei"/>
               </a:rPr>
-              <a:t>開啟校內網站</a:t>
-            </a:r>
+              <a:t>開啟網站</a:t>
+            </a:r>
+            <a:endParaRPr sz="1200" b="0" dirty="0">
+              <a:solidFill>
+                <a:srgbClr val="5D5A55"/>
+              </a:solidFill>
+              <a:latin typeface="Microsoft JhengHei"/>
+              <a:ea typeface="Microsoft JhengHei"/>
+              <a:cs typeface="Microsoft JhengHei"/>
+            </a:endParaRPr>
           </a:p>
         </p:txBody>
       </p:sp>
@@ -9046,6 +9096,7 @@
           <a:lstStyle/>
           <a:p>
             <a:pPr algn="ctr"/>
+            <a:endParaRPr/>
           </a:p>
         </p:txBody>
       </p:sp>
@@ -9119,379 +9170,36 @@
           </a:p>
         </p:txBody>
       </p:sp>
-      <p:sp>
-        <p:nvSpPr>
-          <p:cNvPr id="34" name="Rounded Rectangle 33"/>
-          <p:cNvSpPr/>
-          <p:nvPr/>
-        </p:nvSpPr>
-        <p:spPr>
-          <a:xfrm>
-            <a:off x="6126480" y="1207008"/>
-            <a:ext cx="5532120" cy="4754880"/>
-          </a:xfrm>
-          <a:prstGeom prst="roundRect">
-            <a:avLst>
-              <a:gd name="adj" fmla="val 8000"/>
-            </a:avLst>
-          </a:prstGeom>
-          <a:solidFill>
-            <a:srgbClr val="131518"/>
-          </a:solidFill>
-          <a:ln>
-            <a:noFill/>
-          </a:ln>
-        </p:spPr>
-        <p:style>
-          <a:lnRef idx="1">
-            <a:schemeClr val="accent1"/>
-          </a:lnRef>
-          <a:fillRef idx="3">
-            <a:schemeClr val="accent1"/>
-          </a:fillRef>
-          <a:effectRef idx="2">
-            <a:schemeClr val="accent1"/>
-          </a:effectRef>
-          <a:fontRef idx="minor">
-            <a:schemeClr val="lt1"/>
-          </a:fontRef>
-        </p:style>
-        <p:txBody>
-          <a:bodyPr rtlCol="0" anchor="ctr"/>
-          <a:lstStyle/>
-          <a:p>
-            <a:pPr algn="ctr"/>
-          </a:p>
-        </p:txBody>
-      </p:sp>
       <p:pic>
         <p:nvPicPr>
-          <p:cNvPr id="35" name="Picture 34" descr="discord-help.png"/>
+          <p:cNvPr id="38" name="圖片 37">
+            <a:extLst>
+              <a:ext uri="{FF2B5EF4-FFF2-40B4-BE49-F238E27FC236}">
+                <a16:creationId xmlns:a16="http://schemas.microsoft.com/office/drawing/2014/main" id="{B56B9C72-BB2C-BFC9-855E-5DA05FA64D0B}"/>
+              </a:ext>
+            </a:extLst>
+          </p:cNvPr>
           <p:cNvPicPr>
             <a:picLocks noChangeAspect="1"/>
           </p:cNvPicPr>
           <p:nvPr/>
         </p:nvPicPr>
         <p:blipFill>
-          <a:blip r:embed="rId2"/>
+          <a:blip r:embed="rId3"/>
           <a:stretch>
             <a:fillRect/>
           </a:stretch>
         </p:blipFill>
         <p:spPr>
           <a:xfrm>
-            <a:off x="6217920" y="1298448"/>
-            <a:ext cx="5349240" cy="3761184"/>
+            <a:off x="6924020" y="633205"/>
+            <a:ext cx="4600468" cy="5044958"/>
           </a:xfrm>
           <a:prstGeom prst="rect">
             <a:avLst/>
           </a:prstGeom>
         </p:spPr>
       </p:pic>
-      <p:sp>
-        <p:nvSpPr>
-          <p:cNvPr id="36" name="TextBox 35"/>
-          <p:cNvSpPr txBox="1"/>
-          <p:nvPr/>
-        </p:nvSpPr>
-        <p:spPr>
-          <a:xfrm>
-            <a:off x="6217920" y="5989320"/>
-            <a:ext cx="5394960" cy="256032"/>
-          </a:xfrm>
-          <a:prstGeom prst="rect">
-            <a:avLst/>
-          </a:prstGeom>
-          <a:noFill/>
-        </p:spPr>
-        <p:txBody>
-          <a:bodyPr wrap="square" anchor="t"/>
-          <a:lstStyle/>
-          <a:p>
-            <a:pPr algn="l"/>
-            <a:r>
-              <a:rPr sz="1000" b="0">
-                <a:solidFill>
-                  <a:srgbClr val="5D5A55"/>
-                </a:solidFill>
-                <a:latin typeface="Microsoft JhengHei"/>
-                <a:ea typeface="Microsoft JhengHei"/>
-                <a:cs typeface="Microsoft JhengHei"/>
-              </a:rPr>
-              <a:t>Discord 介面示意　·　/說明 與「開啟網站」</a:t>
-            </a:r>
-          </a:p>
-        </p:txBody>
-      </p:sp>
-    </p:spTree>
-  </p:cSld>
-  <p:clrMapOvr>
-    <a:masterClrMapping/>
-  </p:clrMapOvr>
-</p:sld>
-</file>
-
-<file path=ppt/slides/slide15.xml><?xml version="1.0" encoding="utf-8"?>
-<p:sld xmlns:a="http://schemas.openxmlformats.org/drawingml/2006/main" xmlns:p="http://schemas.openxmlformats.org/presentationml/2006/main" xmlns:r="http://schemas.openxmlformats.org/officeDocument/2006/relationships">
-  <p:cSld>
-    <p:spTree>
-      <p:nvGrpSpPr>
-        <p:cNvPr id="1" name=""/>
-        <p:cNvGrpSpPr/>
-        <p:nvPr/>
-      </p:nvGrpSpPr>
-      <p:grpSpPr/>
-      <p:sp>
-        <p:nvSpPr>
-          <p:cNvPr id="2" name="Rectangle 1"/>
-          <p:cNvSpPr/>
-          <p:nvPr/>
-        </p:nvSpPr>
-        <p:spPr>
-          <a:xfrm>
-            <a:off x="0" y="0"/>
-            <a:ext cx="12191695" cy="6858000"/>
-          </a:xfrm>
-          <a:prstGeom prst="rect">
-            <a:avLst/>
-          </a:prstGeom>
-          <a:solidFill>
-            <a:srgbClr val="131518"/>
-          </a:solidFill>
-          <a:ln>
-            <a:noFill/>
-          </a:ln>
-        </p:spPr>
-        <p:style>
-          <a:lnRef idx="1">
-            <a:schemeClr val="accent1"/>
-          </a:lnRef>
-          <a:fillRef idx="3">
-            <a:schemeClr val="accent1"/>
-          </a:fillRef>
-          <a:effectRef idx="2">
-            <a:schemeClr val="accent1"/>
-          </a:effectRef>
-          <a:fontRef idx="minor">
-            <a:schemeClr val="lt1"/>
-          </a:fontRef>
-        </p:style>
-        <p:txBody>
-          <a:bodyPr rtlCol="0" anchor="ctr"/>
-          <a:lstStyle/>
-          <a:p>
-            <a:pPr algn="ctr"/>
-          </a:p>
-        </p:txBody>
-      </p:sp>
-      <p:sp>
-        <p:nvSpPr>
-          <p:cNvPr id="3" name="Rectangle 2"/>
-          <p:cNvSpPr/>
-          <p:nvPr/>
-        </p:nvSpPr>
-        <p:spPr>
-          <a:xfrm>
-            <a:off x="0" y="0"/>
-            <a:ext cx="164592" cy="6858000"/>
-          </a:xfrm>
-          <a:prstGeom prst="rect">
-            <a:avLst/>
-          </a:prstGeom>
-          <a:solidFill>
-            <a:srgbClr val="EABF29"/>
-          </a:solidFill>
-          <a:ln>
-            <a:noFill/>
-          </a:ln>
-        </p:spPr>
-        <p:style>
-          <a:lnRef idx="1">
-            <a:schemeClr val="accent1"/>
-          </a:lnRef>
-          <a:fillRef idx="3">
-            <a:schemeClr val="accent1"/>
-          </a:fillRef>
-          <a:effectRef idx="2">
-            <a:schemeClr val="accent1"/>
-          </a:effectRef>
-          <a:fontRef idx="minor">
-            <a:schemeClr val="lt1"/>
-          </a:fontRef>
-        </p:style>
-        <p:txBody>
-          <a:bodyPr rtlCol="0" anchor="ctr"/>
-          <a:lstStyle/>
-          <a:p>
-            <a:pPr algn="ctr"/>
-          </a:p>
-        </p:txBody>
-      </p:sp>
-      <p:pic>
-        <p:nvPicPr>
-          <p:cNvPr id="4" name="Picture 3" descr="logo.png"/>
-          <p:cNvPicPr>
-            <a:picLocks noChangeAspect="1"/>
-          </p:cNvPicPr>
-          <p:nvPr/>
-        </p:nvPicPr>
-        <p:blipFill>
-          <a:blip r:embed="rId2"/>
-          <a:stretch>
-            <a:fillRect/>
-          </a:stretch>
-        </p:blipFill>
-        <p:spPr>
-          <a:xfrm>
-            <a:off x="640080" y="1371600"/>
-            <a:ext cx="1358537" cy="1188720"/>
-          </a:xfrm>
-          <a:prstGeom prst="rect">
-            <a:avLst/>
-          </a:prstGeom>
-        </p:spPr>
-      </p:pic>
-      <p:sp>
-        <p:nvSpPr>
-          <p:cNvPr id="5" name="TextBox 4"/>
-          <p:cNvSpPr txBox="1"/>
-          <p:nvPr/>
-        </p:nvSpPr>
-        <p:spPr>
-          <a:xfrm>
-            <a:off x="640080" y="2834640"/>
-            <a:ext cx="10972800" cy="640080"/>
-          </a:xfrm>
-          <a:prstGeom prst="rect">
-            <a:avLst/>
-          </a:prstGeom>
-          <a:noFill/>
-        </p:spPr>
-        <p:txBody>
-          <a:bodyPr wrap="square" anchor="t"/>
-          <a:lstStyle/>
-          <a:p>
-            <a:pPr algn="l"/>
-            <a:r>
-              <a:rPr sz="3200" b="1">
-                <a:solidFill>
-                  <a:srgbClr val="FFFFFF"/>
-                </a:solidFill>
-                <a:latin typeface="Microsoft JhengHei"/>
-                <a:ea typeface="Microsoft JhengHei"/>
-                <a:cs typeface="Microsoft JhengHei"/>
-              </a:rPr>
-              <a:t>同一份菜單，同一本帳。</a:t>
-            </a:r>
-          </a:p>
-        </p:txBody>
-      </p:sp>
-      <p:sp>
-        <p:nvSpPr>
-          <p:cNvPr id="6" name="TextBox 5"/>
-          <p:cNvSpPr txBox="1"/>
-          <p:nvPr/>
-        </p:nvSpPr>
-        <p:spPr>
-          <a:xfrm>
-            <a:off x="640080" y="3611880"/>
-            <a:ext cx="10058400" cy="1005840"/>
-          </a:xfrm>
-          <a:prstGeom prst="rect">
-            <a:avLst/>
-          </a:prstGeom>
-          <a:noFill/>
-        </p:spPr>
-        <p:txBody>
-          <a:bodyPr wrap="square" anchor="t"/>
-          <a:lstStyle/>
-          <a:p>
-            <a:pPr algn="l"/>
-            <a:r>
-              <a:rPr sz="1800" b="0">
-                <a:solidFill>
-                  <a:srgbClr val="E9E7E2"/>
-                </a:solidFill>
-                <a:latin typeface="Microsoft JhengHei"/>
-                <a:ea typeface="Microsoft JhengHei"/>
-                <a:cs typeface="Microsoft JhengHei"/>
-              </a:rPr>
-              <a:t>菜單先確認再上線，點餐對得到品項，結算由程式算錢。
-Discord 操作，校內網站查閱。</a:t>
-            </a:r>
-          </a:p>
-        </p:txBody>
-      </p:sp>
-      <p:sp>
-        <p:nvSpPr>
-          <p:cNvPr id="7" name="TextBox 6"/>
-          <p:cNvSpPr txBox="1"/>
-          <p:nvPr/>
-        </p:nvSpPr>
-        <p:spPr>
-          <a:xfrm>
-            <a:off x="640080" y="5029200"/>
-            <a:ext cx="10058400" cy="365760"/>
-          </a:xfrm>
-          <a:prstGeom prst="rect">
-            <a:avLst/>
-          </a:prstGeom>
-          <a:noFill/>
-        </p:spPr>
-        <p:txBody>
-          <a:bodyPr wrap="square" anchor="t"/>
-          <a:lstStyle/>
-          <a:p>
-            <a:pPr algn="l"/>
-            <a:r>
-              <a:rPr sz="1600" b="0">
-                <a:solidFill>
-                  <a:srgbClr val="EABF29"/>
-                </a:solidFill>
-                <a:latin typeface="Microsoft JhengHei"/>
-                <a:ea typeface="Microsoft JhengHei"/>
-                <a:cs typeface="Microsoft JhengHei"/>
-              </a:rPr>
-              <a:t>問題歡迎現在提。</a:t>
-            </a:r>
-          </a:p>
-        </p:txBody>
-      </p:sp>
-      <p:sp>
-        <p:nvSpPr>
-          <p:cNvPr id="8" name="TextBox 7"/>
-          <p:cNvSpPr txBox="1"/>
-          <p:nvPr/>
-        </p:nvSpPr>
-        <p:spPr>
-          <a:xfrm>
-            <a:off x="640080" y="5989320"/>
-            <a:ext cx="10058400" cy="320040"/>
-          </a:xfrm>
-          <a:prstGeom prst="rect">
-            <a:avLst/>
-          </a:prstGeom>
-          <a:noFill/>
-        </p:spPr>
-        <p:txBody>
-          <a:bodyPr wrap="square" anchor="t"/>
-          <a:lstStyle/>
-          <a:p>
-            <a:pPr algn="l"/>
-            <a:r>
-              <a:rPr sz="1200" b="0">
-                <a:solidFill>
-                  <a:srgbClr val="A3A8B0"/>
-                </a:solidFill>
-                <a:latin typeface="Microsoft JhengHei"/>
-                <a:ea typeface="Microsoft JhengHei"/>
-                <a:cs typeface="Microsoft JhengHei"/>
-              </a:rPr>
-              <a:t>AIPAR ETA  ·  實驗室伙食系統  ·  2026-09-18</a:t>
-            </a:r>
-          </a:p>
-        </p:txBody>
-      </p:sp>
     </p:spTree>
   </p:cSld>
   <p:clrMapOvr>
@@ -9501,7 +9209,7 @@
 </file>
 
 <file path=ppt/slides/slide2.xml><?xml version="1.0" encoding="utf-8"?>
-<p:sld xmlns:a="http://schemas.openxmlformats.org/drawingml/2006/main" xmlns:p="http://schemas.openxmlformats.org/presentationml/2006/main" xmlns:r="http://schemas.openxmlformats.org/officeDocument/2006/relationships">
+<p:sld xmlns:a="http://schemas.openxmlformats.org/drawingml/2006/main" xmlns:r="http://schemas.openxmlformats.org/officeDocument/2006/relationships" xmlns:p="http://schemas.openxmlformats.org/presentationml/2006/main">
   <p:cSld>
     <p:spTree>
       <p:nvGrpSpPr>
@@ -9509,7 +9217,14 @@
         <p:cNvGrpSpPr/>
         <p:nvPr/>
       </p:nvGrpSpPr>
-      <p:grpSpPr/>
+      <p:grpSpPr>
+        <a:xfrm>
+          <a:off x="0" y="0"/>
+          <a:ext cx="0" cy="0"/>
+          <a:chOff x="0" y="0"/>
+          <a:chExt cx="0" cy="0"/>
+        </a:xfrm>
+      </p:grpSpPr>
       <p:sp>
         <p:nvSpPr>
           <p:cNvPr id="2" name="Rectangle 1"/>
@@ -9550,6 +9265,7 @@
           <a:lstStyle/>
           <a:p>
             <a:pPr algn="ctr"/>
+            <a:endParaRPr/>
           </a:p>
         </p:txBody>
       </p:sp>
@@ -9593,6 +9309,7 @@
           <a:lstStyle/>
           <a:p>
             <a:pPr algn="ctr"/>
+            <a:endParaRPr/>
           </a:p>
         </p:txBody>
       </p:sp>
@@ -9706,6 +9423,7 @@
           <a:lstStyle/>
           <a:p>
             <a:pPr algn="ctr"/>
+            <a:endParaRPr/>
           </a:p>
         </p:txBody>
       </p:sp>
@@ -9856,6 +9574,7 @@
           <a:lstStyle/>
           <a:p>
             <a:pPr algn="ctr"/>
+            <a:endParaRPr/>
           </a:p>
         </p:txBody>
       </p:sp>
@@ -9971,6 +9690,7 @@
           <a:lstStyle/>
           <a:p>
             <a:pPr algn="ctr"/>
+            <a:endParaRPr/>
           </a:p>
         </p:txBody>
       </p:sp>
@@ -10086,6 +9806,7 @@
           <a:lstStyle/>
           <a:p>
             <a:pPr algn="ctr"/>
+            <a:endParaRPr/>
           </a:p>
         </p:txBody>
       </p:sp>
@@ -10201,6 +9922,7 @@
           <a:lstStyle/>
           <a:p>
             <a:pPr algn="ctr"/>
+            <a:endParaRPr/>
           </a:p>
         </p:txBody>
       </p:sp>
@@ -10261,7 +9983,7 @@
           <a:p>
             <a:pPr algn="l"/>
             <a:r>
-              <a:rPr sz="1800" b="0">
+              <a:rPr sz="1800" b="0" dirty="0">
                 <a:solidFill>
                   <a:srgbClr val="231815"/>
                 </a:solidFill>
@@ -10269,8 +9991,38 @@
                 <a:ea typeface="Microsoft JhengHei"/>
                 <a:cs typeface="Microsoft JhengHei"/>
               </a:rPr>
-              <a:t>Discord 與校內網站怎麼分工</a:t>
-            </a:r>
+              <a:t>Discord 與</a:t>
+            </a:r>
+            <a:r>
+              <a:rPr lang="zh-TW" altLang="en-US" sz="1800" b="0" dirty="0">
+                <a:solidFill>
+                  <a:srgbClr val="231815"/>
+                </a:solidFill>
+                <a:latin typeface="Microsoft JhengHei"/>
+                <a:ea typeface="Microsoft JhengHei"/>
+                <a:cs typeface="Microsoft JhengHei"/>
+              </a:rPr>
+              <a:t>網站</a:t>
+            </a:r>
+            <a:r>
+              <a:rPr sz="1800" b="0" dirty="0" err="1">
+                <a:solidFill>
+                  <a:srgbClr val="231815"/>
+                </a:solidFill>
+                <a:latin typeface="Microsoft JhengHei"/>
+                <a:ea typeface="Microsoft JhengHei"/>
+                <a:cs typeface="Microsoft JhengHei"/>
+              </a:rPr>
+              <a:t>怎麼分工</a:t>
+            </a:r>
+            <a:endParaRPr sz="1800" b="0" dirty="0">
+              <a:solidFill>
+                <a:srgbClr val="231815"/>
+              </a:solidFill>
+              <a:latin typeface="Microsoft JhengHei"/>
+              <a:ea typeface="Microsoft JhengHei"/>
+              <a:cs typeface="Microsoft JhengHei"/>
+            </a:endParaRPr>
           </a:p>
         </p:txBody>
       </p:sp>
@@ -10316,6 +10068,7 @@
           <a:lstStyle/>
           <a:p>
             <a:pPr algn="ctr"/>
+            <a:endParaRPr/>
           </a:p>
         </p:txBody>
       </p:sp>
@@ -10431,6 +10184,7 @@
           <a:lstStyle/>
           <a:p>
             <a:pPr algn="ctr"/>
+            <a:endParaRPr/>
           </a:p>
         </p:txBody>
       </p:sp>
@@ -10513,7 +10267,7 @@
 </file>
 
 <file path=ppt/slides/slide3.xml><?xml version="1.0" encoding="utf-8"?>
-<p:sld xmlns:a="http://schemas.openxmlformats.org/drawingml/2006/main" xmlns:p="http://schemas.openxmlformats.org/presentationml/2006/main" xmlns:r="http://schemas.openxmlformats.org/officeDocument/2006/relationships">
+<p:sld xmlns:a="http://schemas.openxmlformats.org/drawingml/2006/main" xmlns:r="http://schemas.openxmlformats.org/officeDocument/2006/relationships" xmlns:p="http://schemas.openxmlformats.org/presentationml/2006/main">
   <p:cSld>
     <p:spTree>
       <p:nvGrpSpPr>
@@ -10521,7 +10275,14 @@
         <p:cNvGrpSpPr/>
         <p:nvPr/>
       </p:nvGrpSpPr>
-      <p:grpSpPr/>
+      <p:grpSpPr>
+        <a:xfrm>
+          <a:off x="0" y="0"/>
+          <a:ext cx="0" cy="0"/>
+          <a:chOff x="0" y="0"/>
+          <a:chExt cx="0" cy="0"/>
+        </a:xfrm>
+      </p:grpSpPr>
       <p:sp>
         <p:nvSpPr>
           <p:cNvPr id="2" name="Rectangle 1"/>
@@ -10562,6 +10323,7 @@
           <a:lstStyle/>
           <a:p>
             <a:pPr algn="ctr"/>
+            <a:endParaRPr/>
           </a:p>
         </p:txBody>
       </p:sp>
@@ -10605,6 +10367,7 @@
           <a:lstStyle/>
           <a:p>
             <a:pPr algn="ctr"/>
+            <a:endParaRPr/>
           </a:p>
         </p:txBody>
       </p:sp>
@@ -10718,6 +10481,7 @@
           <a:lstStyle/>
           <a:p>
             <a:pPr algn="ctr"/>
+            <a:endParaRPr/>
           </a:p>
         </p:txBody>
       </p:sp>
@@ -10868,6 +10632,7 @@
           <a:lstStyle/>
           <a:p>
             <a:pPr algn="ctr"/>
+            <a:endParaRPr/>
           </a:p>
         </p:txBody>
       </p:sp>
@@ -10911,6 +10676,7 @@
           <a:lstStyle/>
           <a:p>
             <a:pPr algn="ctr"/>
+            <a:endParaRPr/>
           </a:p>
         </p:txBody>
       </p:sp>
@@ -11026,6 +10792,7 @@
           <a:lstStyle/>
           <a:p>
             <a:pPr algn="ctr"/>
+            <a:endParaRPr/>
           </a:p>
         </p:txBody>
       </p:sp>
@@ -11069,6 +10836,7 @@
           <a:lstStyle/>
           <a:p>
             <a:pPr algn="ctr"/>
+            <a:endParaRPr/>
           </a:p>
         </p:txBody>
       </p:sp>
@@ -11184,6 +10952,7 @@
           <a:lstStyle/>
           <a:p>
             <a:pPr algn="ctr"/>
+            <a:endParaRPr/>
           </a:p>
         </p:txBody>
       </p:sp>
@@ -11227,6 +10996,7 @@
           <a:lstStyle/>
           <a:p>
             <a:pPr algn="ctr"/>
+            <a:endParaRPr/>
           </a:p>
         </p:txBody>
       </p:sp>
@@ -11309,7 +11079,7 @@
 </file>
 
 <file path=ppt/slides/slide4.xml><?xml version="1.0" encoding="utf-8"?>
-<p:sld xmlns:a="http://schemas.openxmlformats.org/drawingml/2006/main" xmlns:p="http://schemas.openxmlformats.org/presentationml/2006/main" xmlns:r="http://schemas.openxmlformats.org/officeDocument/2006/relationships">
+<p:sld xmlns:a="http://schemas.openxmlformats.org/drawingml/2006/main" xmlns:r="http://schemas.openxmlformats.org/officeDocument/2006/relationships" xmlns:p="http://schemas.openxmlformats.org/presentationml/2006/main">
   <p:cSld>
     <p:spTree>
       <p:nvGrpSpPr>
@@ -11317,7 +11087,14 @@
         <p:cNvGrpSpPr/>
         <p:nvPr/>
       </p:nvGrpSpPr>
-      <p:grpSpPr/>
+      <p:grpSpPr>
+        <a:xfrm>
+          <a:off x="0" y="0"/>
+          <a:ext cx="0" cy="0"/>
+          <a:chOff x="0" y="0"/>
+          <a:chExt cx="0" cy="0"/>
+        </a:xfrm>
+      </p:grpSpPr>
       <p:sp>
         <p:nvSpPr>
           <p:cNvPr id="2" name="Rectangle 1"/>
@@ -11358,6 +11135,7 @@
           <a:lstStyle/>
           <a:p>
             <a:pPr algn="ctr"/>
+            <a:endParaRPr/>
           </a:p>
         </p:txBody>
       </p:sp>
@@ -11401,6 +11179,7 @@
           <a:lstStyle/>
           <a:p>
             <a:pPr algn="ctr"/>
+            <a:endParaRPr/>
           </a:p>
         </p:txBody>
       </p:sp>
@@ -11514,6 +11293,7 @@
           <a:lstStyle/>
           <a:p>
             <a:pPr algn="ctr"/>
+            <a:endParaRPr/>
           </a:p>
         </p:txBody>
       </p:sp>
@@ -11664,6 +11444,7 @@
           <a:lstStyle/>
           <a:p>
             <a:pPr algn="ctr"/>
+            <a:endParaRPr/>
           </a:p>
         </p:txBody>
       </p:sp>
@@ -11689,7 +11470,7 @@
           <a:p>
             <a:pPr algn="l"/>
             <a:r>
-              <a:rPr sz="2000" b="0">
+              <a:rPr sz="2000" b="0" dirty="0">
                 <a:solidFill>
                   <a:srgbClr val="231815"/>
                 </a:solidFill>
@@ -11697,8 +11478,85 @@
                 <a:ea typeface="Microsoft JhengHei"/>
                 <a:cs typeface="Microsoft JhengHei"/>
               </a:rPr>
-              <a:t>Discord 建檔、揪團、點餐、結算；校內網站只負責查閱。
-金額由程式依庫內價格計算，模型不得自行定價。</a:t>
+              <a:t>Discord </a:t>
+            </a:r>
+            <a:r>
+              <a:rPr sz="2000" b="0" dirty="0" err="1">
+                <a:solidFill>
+                  <a:srgbClr val="231815"/>
+                </a:solidFill>
+                <a:latin typeface="Microsoft JhengHei"/>
+                <a:ea typeface="Microsoft JhengHei"/>
+                <a:cs typeface="Microsoft JhengHei"/>
+              </a:rPr>
+              <a:t>建檔、揪團、點餐、結算</a:t>
+            </a:r>
+            <a:r>
+              <a:rPr sz="2000" b="0" dirty="0">
+                <a:solidFill>
+                  <a:srgbClr val="231815"/>
+                </a:solidFill>
+                <a:latin typeface="Microsoft JhengHei"/>
+                <a:ea typeface="Microsoft JhengHei"/>
+                <a:cs typeface="Microsoft JhengHei"/>
+              </a:rPr>
+              <a:t>；</a:t>
+            </a:r>
+            <a:r>
+              <a:rPr lang="zh-TW" altLang="en-US" sz="2000" b="0" dirty="0">
+                <a:solidFill>
+                  <a:srgbClr val="231815"/>
+                </a:solidFill>
+                <a:latin typeface="Microsoft JhengHei"/>
+                <a:ea typeface="Microsoft JhengHei"/>
+                <a:cs typeface="Microsoft JhengHei"/>
+              </a:rPr>
+              <a:t>網站</a:t>
+            </a:r>
+            <a:r>
+              <a:rPr sz="2000" b="0" dirty="0" err="1">
+                <a:solidFill>
+                  <a:srgbClr val="231815"/>
+                </a:solidFill>
+                <a:latin typeface="Microsoft JhengHei"/>
+                <a:ea typeface="Microsoft JhengHei"/>
+                <a:cs typeface="Microsoft JhengHei"/>
+              </a:rPr>
+              <a:t>只負責查閱</a:t>
+            </a:r>
+            <a:r>
+              <a:rPr sz="2000" b="0" dirty="0">
+                <a:solidFill>
+                  <a:srgbClr val="231815"/>
+                </a:solidFill>
+                <a:latin typeface="Microsoft JhengHei"/>
+                <a:ea typeface="Microsoft JhengHei"/>
+                <a:cs typeface="Microsoft JhengHei"/>
+              </a:rPr>
+              <a:t>。
+</a:t>
+            </a:r>
+            <a:r>
+              <a:rPr sz="2000" b="0" dirty="0" err="1">
+                <a:solidFill>
+                  <a:srgbClr val="231815"/>
+                </a:solidFill>
+                <a:latin typeface="Microsoft JhengHei"/>
+                <a:ea typeface="Microsoft JhengHei"/>
+                <a:cs typeface="Microsoft JhengHei"/>
+              </a:rPr>
+              <a:t>金額由程式依庫內價格計算，模型不得自行定價</a:t>
+            </a:r>
+            <a:r>
+              <a:rPr sz="2000" b="0" dirty="0">
+                <a:solidFill>
+                  <a:srgbClr val="231815"/>
+                </a:solidFill>
+                <a:latin typeface="Microsoft JhengHei"/>
+                <a:ea typeface="Microsoft JhengHei"/>
+                <a:cs typeface="Microsoft JhengHei"/>
+              </a:rPr>
+              <a:t>。</a:t>
             </a:r>
           </a:p>
         </p:txBody>
@@ -11745,6 +11603,7 @@
           <a:lstStyle/>
           <a:p>
             <a:pPr algn="ctr"/>
+            <a:endParaRPr/>
           </a:p>
         </p:txBody>
       </p:sp>
@@ -11860,6 +11719,7 @@
           <a:lstStyle/>
           <a:p>
             <a:pPr algn="ctr"/>
+            <a:endParaRPr/>
           </a:p>
         </p:txBody>
       </p:sp>
@@ -11975,6 +11835,7 @@
           <a:lstStyle/>
           <a:p>
             <a:pPr algn="ctr"/>
+            <a:endParaRPr/>
           </a:p>
         </p:txBody>
       </p:sp>
@@ -12035,7 +11896,7 @@
           <a:p>
             <a:pPr algn="l"/>
             <a:r>
-              <a:rPr sz="1500" b="0">
+              <a:rPr sz="1500" b="0" dirty="0" err="1">
                 <a:solidFill>
                   <a:srgbClr val="231815"/>
                 </a:solidFill>
@@ -12043,7 +11904,73 @@
                 <a:ea typeface="Microsoft JhengHei"/>
                 <a:cs typeface="Microsoft JhengHei"/>
               </a:rPr>
-              <a:t>幫忙讀菜單、聽懂自然語言。錢與帳一律由程式決定。</a:t>
+              <a:t>幫忙讀菜單、聽懂自然語言。錢與帳一律由</a:t>
+            </a:r>
+            <a:r>
+              <a:rPr lang="zh-TW" altLang="en-US" sz="1500" b="0" dirty="0">
+                <a:solidFill>
+                  <a:srgbClr val="231815"/>
+                </a:solidFill>
+                <a:latin typeface="Microsoft JhengHei"/>
+                <a:ea typeface="Microsoft JhengHei"/>
+                <a:cs typeface="Microsoft JhengHei"/>
+              </a:rPr>
+              <a:t>不接觸</a:t>
+            </a:r>
+            <a:r>
+              <a:rPr lang="en-US" altLang="zh-TW" sz="1500" b="0" dirty="0">
+                <a:solidFill>
+                  <a:srgbClr val="231815"/>
+                </a:solidFill>
+                <a:latin typeface="Microsoft JhengHei"/>
+                <a:ea typeface="Microsoft JhengHei"/>
+                <a:cs typeface="Microsoft JhengHei"/>
+              </a:rPr>
+              <a:t>LLM</a:t>
+            </a:r>
+            <a:r>
+              <a:rPr lang="zh-TW" altLang="en-US" sz="1500" dirty="0">
+                <a:solidFill>
+                  <a:srgbClr val="231815"/>
+                </a:solidFill>
+                <a:latin typeface="Microsoft JhengHei"/>
+                <a:ea typeface="Microsoft JhengHei"/>
+                <a:cs typeface="Microsoft JhengHei"/>
+              </a:rPr>
+              <a:t>避免</a:t>
+            </a:r>
+            <a:r>
+              <a:rPr lang="en-US" altLang="zh-TW" sz="1500" dirty="0">
+                <a:solidFill>
+                  <a:srgbClr val="231815"/>
+                </a:solidFill>
+                <a:latin typeface="Microsoft JhengHei"/>
+                <a:ea typeface="Microsoft JhengHei"/>
+                <a:cs typeface="Microsoft JhengHei"/>
+              </a:rPr>
+              <a:t>ai</a:t>
+            </a:r>
+            <a:r>
+              <a:rPr lang="zh-TW" altLang="en-US" sz="1500" dirty="0">
+                <a:solidFill>
+                  <a:srgbClr val="231815"/>
+                </a:solidFill>
+                <a:latin typeface="Microsoft JhengHei"/>
+                <a:ea typeface="Microsoft JhengHei"/>
+                <a:cs typeface="Microsoft JhengHei"/>
+              </a:rPr>
+              <a:t>幻覺導致財務失誤</a:t>
+            </a:r>
+            <a:r>
+              <a:rPr sz="1500" b="0" dirty="0">
+                <a:solidFill>
+                  <a:srgbClr val="231815"/>
+                </a:solidFill>
+                <a:latin typeface="Microsoft JhengHei"/>
+                <a:ea typeface="Microsoft JhengHei"/>
+                <a:cs typeface="Microsoft JhengHei"/>
+              </a:rPr>
+              <a:t>。</a:t>
             </a:r>
           </a:p>
         </p:txBody>
@@ -12057,7 +11984,7 @@
 </file>
 
 <file path=ppt/slides/slide5.xml><?xml version="1.0" encoding="utf-8"?>
-<p:sld xmlns:a="http://schemas.openxmlformats.org/drawingml/2006/main" xmlns:p="http://schemas.openxmlformats.org/presentationml/2006/main" xmlns:r="http://schemas.openxmlformats.org/officeDocument/2006/relationships">
+<p:sld xmlns:a="http://schemas.openxmlformats.org/drawingml/2006/main" xmlns:r="http://schemas.openxmlformats.org/officeDocument/2006/relationships" xmlns:p="http://schemas.openxmlformats.org/presentationml/2006/main">
   <p:cSld>
     <p:spTree>
       <p:nvGrpSpPr>
@@ -12065,7 +11992,14 @@
         <p:cNvGrpSpPr/>
         <p:nvPr/>
       </p:nvGrpSpPr>
-      <p:grpSpPr/>
+      <p:grpSpPr>
+        <a:xfrm>
+          <a:off x="0" y="0"/>
+          <a:ext cx="0" cy="0"/>
+          <a:chOff x="0" y="0"/>
+          <a:chExt cx="0" cy="0"/>
+        </a:xfrm>
+      </p:grpSpPr>
       <p:sp>
         <p:nvSpPr>
           <p:cNvPr id="2" name="Rectangle 1"/>
@@ -12106,6 +12040,7 @@
           <a:lstStyle/>
           <a:p>
             <a:pPr algn="ctr"/>
+            <a:endParaRPr/>
           </a:p>
         </p:txBody>
       </p:sp>
@@ -12149,6 +12084,7 @@
           <a:lstStyle/>
           <a:p>
             <a:pPr algn="ctr"/>
+            <a:endParaRPr/>
           </a:p>
         </p:txBody>
       </p:sp>
@@ -12262,6 +12198,7 @@
           <a:lstStyle/>
           <a:p>
             <a:pPr algn="ctr"/>
+            <a:endParaRPr/>
           </a:p>
         </p:txBody>
       </p:sp>
@@ -12412,6 +12349,7 @@
           <a:lstStyle/>
           <a:p>
             <a:pPr algn="ctr"/>
+            <a:endParaRPr/>
           </a:p>
         </p:txBody>
       </p:sp>
@@ -12455,6 +12393,7 @@
           <a:lstStyle/>
           <a:p>
             <a:pPr algn="ctr"/>
+            <a:endParaRPr/>
           </a:p>
         </p:txBody>
       </p:sp>
@@ -12607,6 +12546,7 @@
           <a:lstStyle/>
           <a:p>
             <a:pPr algn="ctr"/>
+            <a:endParaRPr/>
           </a:p>
         </p:txBody>
       </p:sp>
@@ -12650,6 +12590,7 @@
           <a:lstStyle/>
           <a:p>
             <a:pPr algn="ctr"/>
+            <a:endParaRPr/>
           </a:p>
         </p:txBody>
       </p:sp>
@@ -12802,6 +12743,7 @@
           <a:lstStyle/>
           <a:p>
             <a:pPr algn="ctr"/>
+            <a:endParaRPr/>
           </a:p>
         </p:txBody>
       </p:sp>
@@ -12845,6 +12787,7 @@
           <a:lstStyle/>
           <a:p>
             <a:pPr algn="ctr"/>
+            <a:endParaRPr/>
           </a:p>
         </p:txBody>
       </p:sp>
@@ -12964,7 +12907,7 @@
 </file>
 
 <file path=ppt/slides/slide6.xml><?xml version="1.0" encoding="utf-8"?>
-<p:sld xmlns:a="http://schemas.openxmlformats.org/drawingml/2006/main" xmlns:p="http://schemas.openxmlformats.org/presentationml/2006/main" xmlns:r="http://schemas.openxmlformats.org/officeDocument/2006/relationships">
+<p:sld xmlns:a="http://schemas.openxmlformats.org/drawingml/2006/main" xmlns:r="http://schemas.openxmlformats.org/officeDocument/2006/relationships" xmlns:p="http://schemas.openxmlformats.org/presentationml/2006/main">
   <p:cSld>
     <p:spTree>
       <p:nvGrpSpPr>
@@ -12972,7 +12915,14 @@
         <p:cNvGrpSpPr/>
         <p:nvPr/>
       </p:nvGrpSpPr>
-      <p:grpSpPr/>
+      <p:grpSpPr>
+        <a:xfrm>
+          <a:off x="0" y="0"/>
+          <a:ext cx="0" cy="0"/>
+          <a:chOff x="0" y="0"/>
+          <a:chExt cx="0" cy="0"/>
+        </a:xfrm>
+      </p:grpSpPr>
       <p:sp>
         <p:nvSpPr>
           <p:cNvPr id="2" name="Rectangle 1"/>
@@ -13013,6 +12963,7 @@
           <a:lstStyle/>
           <a:p>
             <a:pPr algn="ctr"/>
+            <a:endParaRPr/>
           </a:p>
         </p:txBody>
       </p:sp>
@@ -13056,6 +13007,7 @@
           <a:lstStyle/>
           <a:p>
             <a:pPr algn="ctr"/>
+            <a:endParaRPr/>
           </a:p>
         </p:txBody>
       </p:sp>
@@ -13169,6 +13121,7 @@
           <a:lstStyle/>
           <a:p>
             <a:pPr algn="ctr"/>
+            <a:endParaRPr/>
           </a:p>
         </p:txBody>
       </p:sp>
@@ -13305,7 +13258,7 @@
               </a:spcAft>
             </a:pPr>
             <a:r>
-              <a:rPr sz="1500" b="0">
+              <a:rPr sz="1500" b="0" dirty="0">
                 <a:solidFill>
                   <a:srgbClr val="231815"/>
                 </a:solidFill>
@@ -13313,7 +13266,29 @@
                 <a:ea typeface="Microsoft JhengHei"/>
                 <a:cs typeface="Microsoft JhengHei"/>
               </a:rPr>
-              <a:t>•  先登記餐廳，再為它建立菜單版本。</a:t>
+              <a:t>•  </a:t>
+            </a:r>
+            <a:r>
+              <a:rPr sz="1500" b="0" dirty="0" err="1">
+                <a:solidFill>
+                  <a:srgbClr val="231815"/>
+                </a:solidFill>
+                <a:latin typeface="Microsoft JhengHei"/>
+                <a:ea typeface="Microsoft JhengHei"/>
+                <a:cs typeface="Microsoft JhengHei"/>
+              </a:rPr>
+              <a:t>先登記餐廳，再為它建立菜單版本</a:t>
+            </a:r>
+            <a:r>
+              <a:rPr sz="1500" b="0" dirty="0">
+                <a:solidFill>
+                  <a:srgbClr val="231815"/>
+                </a:solidFill>
+                <a:latin typeface="Microsoft JhengHei"/>
+                <a:ea typeface="Microsoft JhengHei"/>
+                <a:cs typeface="Microsoft JhengHei"/>
+              </a:rPr>
+              <a:t>。</a:t>
             </a:r>
           </a:p>
           <a:p>
@@ -13323,7 +13298,7 @@
               </a:spcAft>
             </a:pPr>
             <a:r>
-              <a:rPr sz="1500" b="0">
+              <a:rPr sz="1500" b="0" dirty="0">
                 <a:solidFill>
                   <a:srgbClr val="231815"/>
                 </a:solidFill>
@@ -13331,7 +13306,29 @@
                 <a:ea typeface="Microsoft JhengHei"/>
                 <a:cs typeface="Microsoft JhengHei"/>
               </a:rPr>
-              <a:t>•  照片辨識支援直書菜單；也可以人工貼文字。</a:t>
+              <a:t>•  </a:t>
+            </a:r>
+            <a:r>
+              <a:rPr sz="1500" b="0" dirty="0" err="1">
+                <a:solidFill>
+                  <a:srgbClr val="231815"/>
+                </a:solidFill>
+                <a:latin typeface="Microsoft JhengHei"/>
+                <a:ea typeface="Microsoft JhengHei"/>
+                <a:cs typeface="Microsoft JhengHei"/>
+              </a:rPr>
+              <a:t>照片辨識支援直書菜單；也可以人工貼文字</a:t>
+            </a:r>
+            <a:r>
+              <a:rPr sz="1500" b="0" dirty="0">
+                <a:solidFill>
+                  <a:srgbClr val="231815"/>
+                </a:solidFill>
+                <a:latin typeface="Microsoft JhengHei"/>
+                <a:ea typeface="Microsoft JhengHei"/>
+                <a:cs typeface="Microsoft JhengHei"/>
+              </a:rPr>
+              <a:t>。</a:t>
             </a:r>
           </a:p>
           <a:p>
@@ -13341,7 +13338,7 @@
               </a:spcAft>
             </a:pPr>
             <a:r>
-              <a:rPr sz="1500" b="0">
+              <a:rPr sz="1500" b="0" dirty="0">
                 <a:solidFill>
                   <a:srgbClr val="231815"/>
                 </a:solidFill>
@@ -13349,7 +13346,51 @@
                 <a:ea typeface="Microsoft JhengHei"/>
                 <a:cs typeface="Microsoft JhengHei"/>
               </a:rPr>
-              <a:t>•  選用 OCR 對帳，預覽時標出需要人工核對的行。</a:t>
+              <a:t>•  </a:t>
+            </a:r>
+            <a:r>
+              <a:rPr sz="1500" b="0" dirty="0" err="1">
+                <a:solidFill>
+                  <a:srgbClr val="231815"/>
+                </a:solidFill>
+                <a:latin typeface="Microsoft JhengHei"/>
+                <a:ea typeface="Microsoft JhengHei"/>
+                <a:cs typeface="Microsoft JhengHei"/>
+              </a:rPr>
+              <a:t>選用</a:t>
+            </a:r>
+            <a:r>
+              <a:rPr sz="1500" b="0" dirty="0">
+                <a:solidFill>
+                  <a:srgbClr val="231815"/>
+                </a:solidFill>
+                <a:latin typeface="Microsoft JhengHei"/>
+                <a:ea typeface="Microsoft JhengHei"/>
+                <a:cs typeface="Microsoft JhengHei"/>
+              </a:rPr>
+              <a:t> OCR </a:t>
+            </a:r>
+            <a:r>
+              <a:rPr sz="1500" b="0" dirty="0" err="1">
+                <a:solidFill>
+                  <a:srgbClr val="231815"/>
+                </a:solidFill>
+                <a:latin typeface="Microsoft JhengHei"/>
+                <a:ea typeface="Microsoft JhengHei"/>
+                <a:cs typeface="Microsoft JhengHei"/>
+              </a:rPr>
+              <a:t>對帳，預覽時標出需要人工核對的行</a:t>
+            </a:r>
+            <a:r>
+              <a:rPr sz="1500" b="0" dirty="0">
+                <a:solidFill>
+                  <a:srgbClr val="231815"/>
+                </a:solidFill>
+                <a:latin typeface="Microsoft JhengHei"/>
+                <a:ea typeface="Microsoft JhengHei"/>
+                <a:cs typeface="Microsoft JhengHei"/>
+              </a:rPr>
+              <a:t>。</a:t>
             </a:r>
           </a:p>
           <a:p>
@@ -13359,7 +13400,7 @@
               </a:spcAft>
             </a:pPr>
             <a:r>
-              <a:rPr sz="1500" b="0">
+              <a:rPr sz="1500" b="0" dirty="0">
                 <a:solidFill>
                   <a:srgbClr val="231815"/>
                 </a:solidFill>
@@ -13367,7 +13408,51 @@
                 <a:ea typeface="Microsoft JhengHei"/>
                 <a:cs typeface="Microsoft JhengHei"/>
               </a:rPr>
-              <a:t>•  沒有人按下「確認寫入」，菜單不會上線。</a:t>
+              <a:t>•  </a:t>
+            </a:r>
+            <a:r>
+              <a:rPr sz="1500" b="0" dirty="0" err="1">
+                <a:solidFill>
+                  <a:srgbClr val="231815"/>
+                </a:solidFill>
+                <a:latin typeface="Microsoft JhengHei"/>
+                <a:ea typeface="Microsoft JhengHei"/>
+                <a:cs typeface="Microsoft JhengHei"/>
+              </a:rPr>
+              <a:t>沒有人按下「確認寫入</a:t>
+            </a:r>
+            <a:r>
+              <a:rPr sz="1500" b="0" dirty="0">
+                <a:solidFill>
+                  <a:srgbClr val="231815"/>
+                </a:solidFill>
+                <a:latin typeface="Microsoft JhengHei"/>
+                <a:ea typeface="Microsoft JhengHei"/>
+                <a:cs typeface="Microsoft JhengHei"/>
+              </a:rPr>
+              <a:t>」，</a:t>
+            </a:r>
+            <a:r>
+              <a:rPr sz="1500" b="0" dirty="0" err="1">
+                <a:solidFill>
+                  <a:srgbClr val="231815"/>
+                </a:solidFill>
+                <a:latin typeface="Microsoft JhengHei"/>
+                <a:ea typeface="Microsoft JhengHei"/>
+                <a:cs typeface="Microsoft JhengHei"/>
+              </a:rPr>
+              <a:t>菜單不會上線</a:t>
+            </a:r>
+            <a:r>
+              <a:rPr sz="1500" b="0" dirty="0">
+                <a:solidFill>
+                  <a:srgbClr val="231815"/>
+                </a:solidFill>
+                <a:latin typeface="Microsoft JhengHei"/>
+                <a:ea typeface="Microsoft JhengHei"/>
+                <a:cs typeface="Microsoft JhengHei"/>
+              </a:rPr>
+              <a:t>。</a:t>
             </a:r>
           </a:p>
           <a:p>
@@ -13377,7 +13462,7 @@
               </a:spcAft>
             </a:pPr>
             <a:r>
-              <a:rPr sz="1500" b="0">
+              <a:rPr sz="1500" b="0" dirty="0">
                 <a:solidFill>
                   <a:srgbClr val="231815"/>
                 </a:solidFill>
@@ -13385,7 +13470,51 @@
                 <a:ea typeface="Microsoft JhengHei"/>
                 <a:cs typeface="Microsoft JhengHei"/>
               </a:rPr>
-              <a:t>•  之後可用指令或 @ bot 問「這家有什麼」。</a:t>
+              <a:t>•  </a:t>
+            </a:r>
+            <a:r>
+              <a:rPr sz="1500" b="0" dirty="0" err="1">
+                <a:solidFill>
+                  <a:srgbClr val="231815"/>
+                </a:solidFill>
+                <a:latin typeface="Microsoft JhengHei"/>
+                <a:ea typeface="Microsoft JhengHei"/>
+                <a:cs typeface="Microsoft JhengHei"/>
+              </a:rPr>
+              <a:t>之後可用指令或</a:t>
+            </a:r>
+            <a:r>
+              <a:rPr sz="1500" b="0" dirty="0">
+                <a:solidFill>
+                  <a:srgbClr val="231815"/>
+                </a:solidFill>
+                <a:latin typeface="Microsoft JhengHei"/>
+                <a:ea typeface="Microsoft JhengHei"/>
+                <a:cs typeface="Microsoft JhengHei"/>
+              </a:rPr>
+              <a:t> @ bot </a:t>
+            </a:r>
+            <a:r>
+              <a:rPr sz="1500" b="0" dirty="0" err="1">
+                <a:solidFill>
+                  <a:srgbClr val="231815"/>
+                </a:solidFill>
+                <a:latin typeface="Microsoft JhengHei"/>
+                <a:ea typeface="Microsoft JhengHei"/>
+                <a:cs typeface="Microsoft JhengHei"/>
+              </a:rPr>
+              <a:t>問「這家有什麼</a:t>
+            </a:r>
+            <a:r>
+              <a:rPr sz="1500" b="0" dirty="0">
+                <a:solidFill>
+                  <a:srgbClr val="231815"/>
+                </a:solidFill>
+                <a:latin typeface="Microsoft JhengHei"/>
+                <a:ea typeface="Microsoft JhengHei"/>
+                <a:cs typeface="Microsoft JhengHei"/>
+              </a:rPr>
+              <a:t>」。</a:t>
             </a:r>
           </a:p>
         </p:txBody>
@@ -13432,6 +13561,7 @@
           <a:lstStyle/>
           <a:p>
             <a:pPr algn="ctr"/>
+            <a:endParaRPr/>
           </a:p>
         </p:txBody>
       </p:sp>
@@ -13444,7 +13574,7 @@
           <p:nvPr/>
         </p:nvPicPr>
         <p:blipFill>
-          <a:blip r:embed="rId2"/>
+          <a:blip r:embed="rId3"/>
           <a:stretch>
             <a:fillRect/>
           </a:stretch>
@@ -13481,7 +13611,7 @@
           <a:p>
             <a:pPr algn="l"/>
             <a:r>
-              <a:rPr sz="1000" b="0">
+              <a:rPr lang="zh-TW" altLang="en-US" sz="1000" b="0" dirty="0">
                 <a:solidFill>
                   <a:srgbClr val="5D5A55"/>
                 </a:solidFill>
@@ -13489,7 +13619,51 @@
                 <a:ea typeface="Microsoft JhengHei"/>
                 <a:cs typeface="Microsoft JhengHei"/>
               </a:rPr>
-              <a:t>校內網站實機截圖　·　雷荷豆腐鍋專賣店菜單 v1</a:t>
+              <a:t>網站</a:t>
+            </a:r>
+            <a:r>
+              <a:rPr sz="1000" b="0" dirty="0" err="1">
+                <a:solidFill>
+                  <a:srgbClr val="5D5A55"/>
+                </a:solidFill>
+                <a:latin typeface="Microsoft JhengHei"/>
+                <a:ea typeface="Microsoft JhengHei"/>
+                <a:cs typeface="Microsoft JhengHei"/>
+              </a:rPr>
+              <a:t>實機截圖</a:t>
+            </a:r>
+            <a:r>
+              <a:rPr sz="1000" b="0" dirty="0">
+                <a:solidFill>
+                  <a:srgbClr val="5D5A55"/>
+                </a:solidFill>
+                <a:latin typeface="Microsoft JhengHei"/>
+                <a:ea typeface="Microsoft JhengHei"/>
+                <a:cs typeface="Microsoft JhengHei"/>
+              </a:rPr>
+              <a:t>　·　</a:t>
+            </a:r>
+            <a:r>
+              <a:rPr sz="1000" b="0" dirty="0" err="1">
+                <a:solidFill>
+                  <a:srgbClr val="5D5A55"/>
+                </a:solidFill>
+                <a:latin typeface="Microsoft JhengHei"/>
+                <a:ea typeface="Microsoft JhengHei"/>
+                <a:cs typeface="Microsoft JhengHei"/>
+              </a:rPr>
+              <a:t>雷荷豆腐鍋專賣店菜單</a:t>
+            </a:r>
+            <a:r>
+              <a:rPr sz="1000" b="0" dirty="0">
+                <a:solidFill>
+                  <a:srgbClr val="5D5A55"/>
+                </a:solidFill>
+                <a:latin typeface="Microsoft JhengHei"/>
+                <a:ea typeface="Microsoft JhengHei"/>
+                <a:cs typeface="Microsoft JhengHei"/>
+              </a:rPr>
+              <a:t> v1</a:t>
             </a:r>
           </a:p>
         </p:txBody>
@@ -13503,7 +13677,7 @@
 </file>
 
 <file path=ppt/slides/slide7.xml><?xml version="1.0" encoding="utf-8"?>
-<p:sld xmlns:a="http://schemas.openxmlformats.org/drawingml/2006/main" xmlns:p="http://schemas.openxmlformats.org/presentationml/2006/main" xmlns:r="http://schemas.openxmlformats.org/officeDocument/2006/relationships">
+<p:sld xmlns:a="http://schemas.openxmlformats.org/drawingml/2006/main" xmlns:r="http://schemas.openxmlformats.org/officeDocument/2006/relationships" xmlns:p="http://schemas.openxmlformats.org/presentationml/2006/main">
   <p:cSld>
     <p:spTree>
       <p:nvGrpSpPr>
@@ -13511,7 +13685,14 @@
         <p:cNvGrpSpPr/>
         <p:nvPr/>
       </p:nvGrpSpPr>
-      <p:grpSpPr/>
+      <p:grpSpPr>
+        <a:xfrm>
+          <a:off x="0" y="0"/>
+          <a:ext cx="0" cy="0"/>
+          <a:chOff x="0" y="0"/>
+          <a:chExt cx="0" cy="0"/>
+        </a:xfrm>
+      </p:grpSpPr>
       <p:sp>
         <p:nvSpPr>
           <p:cNvPr id="2" name="Rectangle 1"/>
@@ -13552,6 +13733,7 @@
           <a:lstStyle/>
           <a:p>
             <a:pPr algn="ctr"/>
+            <a:endParaRPr/>
           </a:p>
         </p:txBody>
       </p:sp>
@@ -13595,6 +13777,7 @@
           <a:lstStyle/>
           <a:p>
             <a:pPr algn="ctr"/>
+            <a:endParaRPr/>
           </a:p>
         </p:txBody>
       </p:sp>
@@ -13708,6 +13891,7 @@
           <a:lstStyle/>
           <a:p>
             <a:pPr algn="ctr"/>
+            <a:endParaRPr/>
           </a:p>
         </p:txBody>
       </p:sp>
@@ -13947,110 +14131,37 @@
           </a:p>
         </p:txBody>
       </p:sp>
-      <p:sp>
-        <p:nvSpPr>
-          <p:cNvPr id="11" name="Rounded Rectangle 10"/>
-          <p:cNvSpPr/>
-          <p:nvPr/>
-        </p:nvSpPr>
-        <p:spPr>
-          <a:xfrm>
-            <a:off x="5806440" y="1170432"/>
-            <a:ext cx="5897880" cy="5074920"/>
-          </a:xfrm>
-          <a:prstGeom prst="roundRect">
-            <a:avLst>
-              <a:gd name="adj" fmla="val 8000"/>
-            </a:avLst>
-          </a:prstGeom>
-          <a:solidFill>
-            <a:srgbClr val="131518"/>
-          </a:solidFill>
-          <a:ln>
-            <a:noFill/>
-          </a:ln>
-        </p:spPr>
-        <p:style>
-          <a:lnRef idx="1">
-            <a:schemeClr val="accent1"/>
-          </a:lnRef>
-          <a:fillRef idx="3">
-            <a:schemeClr val="accent1"/>
-          </a:fillRef>
-          <a:effectRef idx="2">
-            <a:schemeClr val="accent1"/>
-          </a:effectRef>
-          <a:fontRef idx="minor">
-            <a:schemeClr val="lt1"/>
-          </a:fontRef>
-        </p:style>
-        <p:txBody>
-          <a:bodyPr rtlCol="0" anchor="ctr"/>
-          <a:lstStyle/>
-          <a:p>
-            <a:pPr algn="ctr"/>
-          </a:p>
-        </p:txBody>
-      </p:sp>
       <p:pic>
         <p:nvPicPr>
-          <p:cNvPr id="12" name="Picture 11" descr="discord-summary.png"/>
+          <p:cNvPr id="15" name="圖片 14">
+            <a:extLst>
+              <a:ext uri="{FF2B5EF4-FFF2-40B4-BE49-F238E27FC236}">
+                <a16:creationId xmlns:a16="http://schemas.microsoft.com/office/drawing/2014/main" id="{44713F72-C3B0-A620-F6D1-105E3446E7C9}"/>
+              </a:ext>
+            </a:extLst>
+          </p:cNvPr>
           <p:cNvPicPr>
             <a:picLocks noChangeAspect="1"/>
           </p:cNvPicPr>
           <p:nvPr/>
         </p:nvPicPr>
         <p:blipFill>
-          <a:blip r:embed="rId2"/>
+          <a:blip r:embed="rId3"/>
+          <a:srcRect l="18930" t="61954" r="43381" b="6133"/>
           <a:stretch>
             <a:fillRect/>
           </a:stretch>
         </p:blipFill>
         <p:spPr>
           <a:xfrm>
-            <a:off x="5897880" y="1261872"/>
-            <a:ext cx="5715000" cy="3661171"/>
+            <a:off x="6108192" y="2011680"/>
+            <a:ext cx="5376662" cy="2629072"/>
           </a:xfrm>
           <a:prstGeom prst="rect">
             <a:avLst/>
           </a:prstGeom>
         </p:spPr>
       </p:pic>
-      <p:sp>
-        <p:nvSpPr>
-          <p:cNvPr id="13" name="TextBox 12"/>
-          <p:cNvSpPr txBox="1"/>
-          <p:nvPr/>
-        </p:nvSpPr>
-        <p:spPr>
-          <a:xfrm>
-            <a:off x="5897880" y="5989320"/>
-            <a:ext cx="5669280" cy="256032"/>
-          </a:xfrm>
-          <a:prstGeom prst="rect">
-            <a:avLst/>
-          </a:prstGeom>
-          <a:noFill/>
-        </p:spPr>
-        <p:txBody>
-          <a:bodyPr wrap="square" anchor="t"/>
-          <a:lstStyle/>
-          <a:p>
-            <a:pPr algn="l"/>
-            <a:r>
-              <a:rPr sz="1000" b="0">
-                <a:solidFill>
-                  <a:srgbClr val="5D5A55"/>
-                </a:solidFill>
-                <a:latin typeface="Microsoft JhengHei"/>
-                <a:ea typeface="Microsoft JhengHei"/>
-                <a:cs typeface="Microsoft JhengHei"/>
-              </a:rPr>
-              <a:t>Discord 介面示意　·　字串、按鈕與標誌取自本專案</a:t>
-            </a:r>
-          </a:p>
-        </p:txBody>
-      </p:sp>
     </p:spTree>
   </p:cSld>
   <p:clrMapOvr>
@@ -14060,7 +14171,7 @@
 </file>
 
 <file path=ppt/slides/slide8.xml><?xml version="1.0" encoding="utf-8"?>
-<p:sld xmlns:a="http://schemas.openxmlformats.org/drawingml/2006/main" xmlns:p="http://schemas.openxmlformats.org/presentationml/2006/main" xmlns:r="http://schemas.openxmlformats.org/officeDocument/2006/relationships">
+<p:sld xmlns:a="http://schemas.openxmlformats.org/drawingml/2006/main" xmlns:r="http://schemas.openxmlformats.org/officeDocument/2006/relationships" xmlns:p="http://schemas.openxmlformats.org/presentationml/2006/main">
   <p:cSld>
     <p:spTree>
       <p:nvGrpSpPr>
@@ -14068,7 +14179,14 @@
         <p:cNvGrpSpPr/>
         <p:nvPr/>
       </p:nvGrpSpPr>
-      <p:grpSpPr/>
+      <p:grpSpPr>
+        <a:xfrm>
+          <a:off x="0" y="0"/>
+          <a:ext cx="0" cy="0"/>
+          <a:chOff x="0" y="0"/>
+          <a:chExt cx="0" cy="0"/>
+        </a:xfrm>
+      </p:grpSpPr>
       <p:sp>
         <p:nvSpPr>
           <p:cNvPr id="2" name="Rectangle 1"/>
@@ -14109,6 +14227,7 @@
           <a:lstStyle/>
           <a:p>
             <a:pPr algn="ctr"/>
+            <a:endParaRPr/>
           </a:p>
         </p:txBody>
       </p:sp>
@@ -14152,6 +14271,7 @@
           <a:lstStyle/>
           <a:p>
             <a:pPr algn="ctr"/>
+            <a:endParaRPr/>
           </a:p>
         </p:txBody>
       </p:sp>
@@ -14265,6 +14385,7 @@
           <a:lstStyle/>
           <a:p>
             <a:pPr algn="ctr"/>
+            <a:endParaRPr/>
           </a:p>
         </p:txBody>
       </p:sp>
@@ -14415,6 +14536,7 @@
           <a:lstStyle/>
           <a:p>
             <a:pPr algn="ctr"/>
+            <a:endParaRPr/>
           </a:p>
         </p:txBody>
       </p:sp>
@@ -14496,6 +14618,7 @@
           <a:lstStyle/>
           <a:p>
             <a:pPr algn="ctr"/>
+            <a:endParaRPr/>
           </a:p>
         </p:txBody>
       </p:sp>
@@ -14611,6 +14734,7 @@
           <a:lstStyle/>
           <a:p>
             <a:pPr algn="ctr"/>
+            <a:endParaRPr/>
           </a:p>
         </p:txBody>
       </p:sp>
@@ -14726,6 +14850,7 @@
           <a:lstStyle/>
           <a:p>
             <a:pPr algn="ctr"/>
+            <a:endParaRPr/>
           </a:p>
         </p:txBody>
       </p:sp>
@@ -14841,6 +14966,7 @@
           <a:lstStyle/>
           <a:p>
             <a:pPr algn="ctr"/>
+            <a:endParaRPr/>
           </a:p>
         </p:txBody>
       </p:sp>
@@ -14923,7 +15049,7 @@
 </file>
 
 <file path=ppt/slides/slide9.xml><?xml version="1.0" encoding="utf-8"?>
-<p:sld xmlns:a="http://schemas.openxmlformats.org/drawingml/2006/main" xmlns:p="http://schemas.openxmlformats.org/presentationml/2006/main" xmlns:r="http://schemas.openxmlformats.org/officeDocument/2006/relationships">
+<p:sld xmlns:a="http://schemas.openxmlformats.org/drawingml/2006/main" xmlns:r="http://schemas.openxmlformats.org/officeDocument/2006/relationships" xmlns:p="http://schemas.openxmlformats.org/presentationml/2006/main">
   <p:cSld>
     <p:spTree>
       <p:nvGrpSpPr>
@@ -14931,7 +15057,14 @@
         <p:cNvGrpSpPr/>
         <p:nvPr/>
       </p:nvGrpSpPr>
-      <p:grpSpPr/>
+      <p:grpSpPr>
+        <a:xfrm>
+          <a:off x="0" y="0"/>
+          <a:ext cx="0" cy="0"/>
+          <a:chOff x="0" y="0"/>
+          <a:chExt cx="0" cy="0"/>
+        </a:xfrm>
+      </p:grpSpPr>
       <p:sp>
         <p:nvSpPr>
           <p:cNvPr id="2" name="Rectangle 1"/>
@@ -14972,6 +15105,7 @@
           <a:lstStyle/>
           <a:p>
             <a:pPr algn="ctr"/>
+            <a:endParaRPr/>
           </a:p>
         </p:txBody>
       </p:sp>
@@ -15015,6 +15149,7 @@
           <a:lstStyle/>
           <a:p>
             <a:pPr algn="ctr"/>
+            <a:endParaRPr/>
           </a:p>
         </p:txBody>
       </p:sp>
@@ -15128,6 +15263,7 @@
           <a:lstStyle/>
           <a:p>
             <a:pPr algn="ctr"/>
+            <a:endParaRPr/>
           </a:p>
         </p:txBody>
       </p:sp>
@@ -15245,7 +15381,7 @@
           <p:nvPr/>
         </p:nvPicPr>
         <p:blipFill>
-          <a:blip r:embed="rId2"/>
+          <a:blip r:embed="rId3"/>
           <a:stretch>
             <a:fillRect/>
           </a:stretch>
@@ -15589,7 +15725,7 @@
 </file>
 
 <file path=ppt/theme/theme2.xml><?xml version="1.0" encoding="utf-8"?>
-<a:theme xmlns:a="http://schemas.openxmlformats.org/drawingml/2006/main" name="Office Theme">
+<a:theme xmlns:a="http://schemas.openxmlformats.org/drawingml/2006/main" name="Office 佈景主題">
   <a:themeElements>
     <a:clrScheme name="Office">
       <a:dk1>
@@ -15599,44 +15735,44 @@
         <a:sysClr val="window" lastClr="FFFFFF"/>
       </a:lt1>
       <a:dk2>
-        <a:srgbClr val="1F497D"/>
+        <a:srgbClr val="0E2841"/>
       </a:dk2>
       <a:lt2>
-        <a:srgbClr val="EEECE1"/>
+        <a:srgbClr val="E8E8E8"/>
       </a:lt2>
       <a:accent1>
-        <a:srgbClr val="4F81BD"/>
+        <a:srgbClr val="156082"/>
       </a:accent1>
       <a:accent2>
-        <a:srgbClr val="C0504D"/>
+        <a:srgbClr val="E97132"/>
       </a:accent2>
       <a:accent3>
-        <a:srgbClr val="9BBB59"/>
+        <a:srgbClr val="196B24"/>
       </a:accent3>
       <a:accent4>
-        <a:srgbClr val="8064A2"/>
+        <a:srgbClr val="0F9ED5"/>
       </a:accent4>
       <a:accent5>
-        <a:srgbClr val="4BACC6"/>
+        <a:srgbClr val="A02B93"/>
       </a:accent5>
       <a:accent6>
-        <a:srgbClr val="F79646"/>
+        <a:srgbClr val="4EA72E"/>
       </a:accent6>
       <a:hlink>
-        <a:srgbClr val="0000FF"/>
+        <a:srgbClr val="467886"/>
       </a:hlink>
       <a:folHlink>
-        <a:srgbClr val="800080"/>
+        <a:srgbClr val="96607D"/>
       </a:folHlink>
     </a:clrScheme>
     <a:fontScheme name="Office">
       <a:majorFont>
-        <a:latin typeface="Calibri"/>
+        <a:latin typeface="Aptos Display" panose="02110004020202020204"/>
         <a:ea typeface=""/>
         <a:cs typeface=""/>
-        <a:font script="Jpan" typeface="ＭＳ Ｐゴシック"/>
+        <a:font script="Jpan" typeface="游ゴシック Light"/>
         <a:font script="Hang" typeface="맑은 고딕"/>
-        <a:font script="Hans" typeface="宋体"/>
+        <a:font script="Hans" typeface="等线 Light"/>
         <a:font script="Hant" typeface="新細明體"/>
         <a:font script="Arab" typeface="Times New Roman"/>
         <a:font script="Hebr" typeface="Times New Roman"/>
@@ -15664,14 +15800,31 @@
         <a:font script="Viet" typeface="Times New Roman"/>
         <a:font script="Uigh" typeface="Microsoft Uighur"/>
         <a:font script="Geor" typeface="Sylfaen"/>
+        <a:font script="Armn" typeface="Arial"/>
+        <a:font script="Bugi" typeface="Leelawadee UI"/>
+        <a:font script="Bopo" typeface="Microsoft JhengHei"/>
+        <a:font script="Java" typeface="Javanese Text"/>
+        <a:font script="Lisu" typeface="Segoe UI"/>
+        <a:font script="Mymr" typeface="Myanmar Text"/>
+        <a:font script="Nkoo" typeface="Ebrima"/>
+        <a:font script="Olck" typeface="Nirmala UI"/>
+        <a:font script="Osma" typeface="Ebrima"/>
+        <a:font script="Phag" typeface="Phagspa"/>
+        <a:font script="Syrn" typeface="Estrangelo Edessa"/>
+        <a:font script="Syrj" typeface="Estrangelo Edessa"/>
+        <a:font script="Syre" typeface="Estrangelo Edessa"/>
+        <a:font script="Sora" typeface="Nirmala UI"/>
+        <a:font script="Tale" typeface="Microsoft Tai Le"/>
+        <a:font script="Talu" typeface="Microsoft New Tai Lue"/>
+        <a:font script="Tfng" typeface="Ebrima"/>
       </a:majorFont>
       <a:minorFont>
-        <a:latin typeface="Calibri"/>
+        <a:latin typeface="Aptos" panose="02110004020202020204"/>
         <a:ea typeface=""/>
         <a:cs typeface=""/>
-        <a:font script="Jpan" typeface="ＭＳ Ｐゴシック"/>
+        <a:font script="Jpan" typeface="游ゴシック"/>
         <a:font script="Hang" typeface="맑은 고딕"/>
-        <a:font script="Hans" typeface="宋体"/>
+        <a:font script="Hans" typeface="等线"/>
         <a:font script="Hant" typeface="新細明體"/>
         <a:font script="Arab" typeface="Arial"/>
         <a:font script="Hebr" typeface="Arial"/>
@@ -15699,6 +15852,23 @@
         <a:font script="Viet" typeface="Arial"/>
         <a:font script="Uigh" typeface="Microsoft Uighur"/>
         <a:font script="Geor" typeface="Sylfaen"/>
+        <a:font script="Armn" typeface="Arial"/>
+        <a:font script="Bugi" typeface="Leelawadee UI"/>
+        <a:font script="Bopo" typeface="Microsoft JhengHei"/>
+        <a:font script="Java" typeface="Javanese Text"/>
+        <a:font script="Lisu" typeface="Segoe UI"/>
+        <a:font script="Mymr" typeface="Myanmar Text"/>
+        <a:font script="Nkoo" typeface="Ebrima"/>
+        <a:font script="Olck" typeface="Nirmala UI"/>
+        <a:font script="Osma" typeface="Ebrima"/>
+        <a:font script="Phag" typeface="Phagspa"/>
+        <a:font script="Syrn" typeface="Estrangelo Edessa"/>
+        <a:font script="Syrj" typeface="Estrangelo Edessa"/>
+        <a:font script="Syre" typeface="Estrangelo Edessa"/>
+        <a:font script="Sora" typeface="Nirmala UI"/>
+        <a:font script="Tale" typeface="Microsoft Tai Le"/>
+        <a:font script="Talu" typeface="Microsoft New Tai Lue"/>
+        <a:font script="Tfng" typeface="Ebrima"/>
       </a:minorFont>
     </a:fontScheme>
     <a:fmtScheme name="Office">
@@ -15710,180 +15880,136 @@
           <a:gsLst>
             <a:gs pos="0">
               <a:schemeClr val="phClr">
-                <a:tint val="50000"/>
-                <a:satMod val="300000"/>
+                <a:lumMod val="110000"/>
+                <a:satMod val="105000"/>
+                <a:tint val="67000"/>
               </a:schemeClr>
             </a:gs>
-            <a:gs pos="35000">
+            <a:gs pos="50000">
               <a:schemeClr val="phClr">
-                <a:tint val="37000"/>
-                <a:satMod val="300000"/>
+                <a:lumMod val="105000"/>
+                <a:satMod val="103000"/>
+                <a:tint val="73000"/>
               </a:schemeClr>
             </a:gs>
             <a:gs pos="100000">
               <a:schemeClr val="phClr">
-                <a:tint val="15000"/>
-                <a:satMod val="350000"/>
+                <a:lumMod val="105000"/>
+                <a:satMod val="109000"/>
+                <a:tint val="81000"/>
               </a:schemeClr>
             </a:gs>
           </a:gsLst>
-          <a:lin ang="16200000" scaled="1"/>
+          <a:lin ang="5400000" scaled="0"/>
         </a:gradFill>
         <a:gradFill rotWithShape="1">
           <a:gsLst>
             <a:gs pos="0">
               <a:schemeClr val="phClr">
-                <a:tint val="100000"/>
+                <a:satMod val="103000"/>
+                <a:lumMod val="102000"/>
+                <a:tint val="94000"/>
+              </a:schemeClr>
+            </a:gs>
+            <a:gs pos="50000">
+              <a:schemeClr val="phClr">
+                <a:satMod val="110000"/>
+                <a:lumMod val="100000"/>
                 <a:shade val="100000"/>
-                <a:satMod val="130000"/>
               </a:schemeClr>
             </a:gs>
             <a:gs pos="100000">
               <a:schemeClr val="phClr">
-                <a:tint val="50000"/>
-                <a:shade val="100000"/>
-                <a:satMod val="350000"/>
+                <a:lumMod val="99000"/>
+                <a:satMod val="120000"/>
+                <a:shade val="78000"/>
               </a:schemeClr>
             </a:gs>
           </a:gsLst>
-          <a:lin ang="16200000" scaled="0"/>
+          <a:lin ang="5400000" scaled="0"/>
         </a:gradFill>
       </a:fillStyleLst>
       <a:lnStyleLst>
-        <a:ln w="9525" cap="flat" cmpd="sng" algn="ctr">
+        <a:ln w="12700" cap="flat" cmpd="sng" algn="ctr">
           <a:solidFill>
-            <a:schemeClr val="phClr">
-              <a:shade val="95000"/>
-              <a:satMod val="105000"/>
-            </a:schemeClr>
+            <a:schemeClr val="phClr"/>
           </a:solidFill>
           <a:prstDash val="solid"/>
+          <a:miter lim="800000"/>
+        </a:ln>
+        <a:ln w="19050" cap="flat" cmpd="sng" algn="ctr">
+          <a:solidFill>
+            <a:schemeClr val="phClr"/>
+          </a:solidFill>
+          <a:prstDash val="solid"/>
+          <a:miter lim="800000"/>
         </a:ln>
         <a:ln w="25400" cap="flat" cmpd="sng" algn="ctr">
           <a:solidFill>
             <a:schemeClr val="phClr"/>
           </a:solidFill>
           <a:prstDash val="solid"/>
-        </a:ln>
-        <a:ln w="38100" cap="flat" cmpd="sng" algn="ctr">
-          <a:solidFill>
-            <a:schemeClr val="phClr"/>
-          </a:solidFill>
-          <a:prstDash val="solid"/>
+          <a:miter lim="800000"/>
         </a:ln>
       </a:lnStyleLst>
       <a:effectStyleLst>
         <a:effectStyle>
+          <a:effectLst/>
+        </a:effectStyle>
+        <a:effectStyle>
+          <a:effectLst/>
+        </a:effectStyle>
+        <a:effectStyle>
           <a:effectLst>
-            <a:outerShdw blurRad="40000" dist="20000" dir="5400000" rotWithShape="0">
+            <a:outerShdw blurRad="57150" dist="19050" dir="5400000" algn="ctr" rotWithShape="0">
               <a:srgbClr val="000000">
-                <a:alpha val="38000"/>
+                <a:alpha val="63000"/>
               </a:srgbClr>
             </a:outerShdw>
           </a:effectLst>
-        </a:effectStyle>
-        <a:effectStyle>
-          <a:effectLst>
-            <a:outerShdw blurRad="40000" dist="23000" dir="5400000" rotWithShape="0">
-              <a:srgbClr val="000000">
-                <a:alpha val="35000"/>
-              </a:srgbClr>
-            </a:outerShdw>
-          </a:effectLst>
-        </a:effectStyle>
-        <a:effectStyle>
-          <a:effectLst>
-            <a:outerShdw blurRad="40000" dist="23000" dir="5400000" rotWithShape="0">
-              <a:srgbClr val="000000">
-                <a:alpha val="35000"/>
-              </a:srgbClr>
-            </a:outerShdw>
-          </a:effectLst>
-          <a:scene3d>
-            <a:camera prst="orthographicFront">
-              <a:rot lat="0" lon="0" rev="0"/>
-            </a:camera>
-            <a:lightRig rig="threePt" dir="t">
-              <a:rot lat="0" lon="0" rev="1200000"/>
-            </a:lightRig>
-          </a:scene3d>
-          <a:sp3d>
-            <a:bevelT w="63500" h="25400"/>
-          </a:sp3d>
         </a:effectStyle>
       </a:effectStyleLst>
       <a:bgFillStyleLst>
         <a:solidFill>
           <a:schemeClr val="phClr"/>
         </a:solidFill>
+        <a:solidFill>
+          <a:schemeClr val="phClr">
+            <a:tint val="95000"/>
+            <a:satMod val="170000"/>
+          </a:schemeClr>
+        </a:solidFill>
         <a:gradFill rotWithShape="1">
           <a:gsLst>
             <a:gs pos="0">
               <a:schemeClr val="phClr">
-                <a:tint val="40000"/>
-                <a:satMod val="350000"/>
+                <a:tint val="93000"/>
+                <a:satMod val="150000"/>
+                <a:shade val="98000"/>
+                <a:lumMod val="102000"/>
               </a:schemeClr>
             </a:gs>
-            <a:gs pos="40000">
+            <a:gs pos="50000">
               <a:schemeClr val="phClr">
-                <a:tint val="45000"/>
-                <a:shade val="99000"/>
-                <a:satMod val="350000"/>
+                <a:tint val="98000"/>
+                <a:satMod val="130000"/>
+                <a:shade val="90000"/>
+                <a:lumMod val="103000"/>
               </a:schemeClr>
             </a:gs>
             <a:gs pos="100000">
               <a:schemeClr val="phClr">
-                <a:shade val="20000"/>
-                <a:satMod val="255000"/>
+                <a:shade val="63000"/>
+                <a:satMod val="120000"/>
               </a:schemeClr>
             </a:gs>
           </a:gsLst>
-          <a:path path="circle">
-            <a:fillToRect l="50000" t="-80000" r="50000" b="180000"/>
-          </a:path>
-        </a:gradFill>
-        <a:gradFill rotWithShape="1">
-          <a:gsLst>
-            <a:gs pos="0">
-              <a:schemeClr val="phClr">
-                <a:tint val="80000"/>
-                <a:satMod val="300000"/>
-              </a:schemeClr>
-            </a:gs>
-            <a:gs pos="100000">
-              <a:schemeClr val="phClr">
-                <a:shade val="30000"/>
-                <a:satMod val="200000"/>
-              </a:schemeClr>
-            </a:gs>
-          </a:gsLst>
-          <a:path path="circle">
-            <a:fillToRect l="50000" t="50000" r="50000" b="50000"/>
-          </a:path>
+          <a:lin ang="5400000" scaled="0"/>
         </a:gradFill>
       </a:bgFillStyleLst>
     </a:fmtScheme>
   </a:themeElements>
   <a:objectDefaults>
-    <a:spDef>
-      <a:spPr/>
-      <a:bodyPr/>
-      <a:lstStyle/>
-      <a:style>
-        <a:lnRef idx="1">
-          <a:schemeClr val="accent1"/>
-        </a:lnRef>
-        <a:fillRef idx="3">
-          <a:schemeClr val="accent1"/>
-        </a:fillRef>
-        <a:effectRef idx="2">
-          <a:schemeClr val="accent1"/>
-        </a:effectRef>
-        <a:fontRef idx="minor">
-          <a:schemeClr val="lt1"/>
-        </a:fontRef>
-      </a:style>
-    </a:spDef>
     <a:lnDef>
       <a:spPr/>
       <a:bodyPr/>
@@ -15905,5 +16031,10 @@
     </a:lnDef>
   </a:objectDefaults>
   <a:extraClrSchemeLst/>
+  <a:extLst>
+    <a:ext uri="{05A4C25C-085E-4340-85A3-A5531E510DB2}">
+      <thm15:themeFamily xmlns:thm15="http://schemas.microsoft.com/office/thememl/2012/main" name="Office Theme" id="{2E142A2C-CD16-42D6-873A-C26D2A0506FA}" vid="{1BDDFF52-6CD6-40A5-AB3C-68EB2F1E4D0A}"/>
+    </a:ext>
+  </a:extLst>
 </a:theme>
 </file>
--- a/docs/presentations/AIPAR-ETA-intro.pptx
+++ b/docs/presentations/AIPAR-ETA-intro.pptx
@@ -6520,7 +6520,29 @@
                 <a:ea typeface="Microsoft JhengHei"/>
                 <a:cs typeface="Microsoft JhengHei"/>
               </a:rPr>
-              <a:t>視覺模型讀菜單圖；可</a:t>
+              <a:t>視覺模型讀菜單圖</a:t>
+            </a:r>
+            <a:r>
+              <a:rPr lang="en-US" altLang="zh-TW" sz="1400" dirty="0" err="1">
+                <a:solidFill>
+                  <a:srgbClr val="231815"/>
+                </a:solidFill>
+                <a:latin typeface="Microsoft JhengHei"/>
+                <a:ea typeface="Microsoft JhengHei"/>
+                <a:cs typeface="Microsoft JhengHei"/>
+              </a:rPr>
+              <a:t>+</a:t>
+            </a:r>
+            <a:r>
+              <a:rPr sz="1400" b="0" dirty="0" err="1">
+                <a:solidFill>
+                  <a:srgbClr val="231815"/>
+                </a:solidFill>
+                <a:latin typeface="Microsoft JhengHei"/>
+                <a:ea typeface="Microsoft JhengHei"/>
+                <a:cs typeface="Microsoft JhengHei"/>
+              </a:rPr>
+              <a:t>可</a:t>
             </a:r>
             <a:r>
               <a:rPr lang="zh-TW" altLang="en-US" sz="1400" b="0" dirty="0">
@@ -6542,27 +6564,8 @@
                 <a:ea typeface="Microsoft JhengHei"/>
                 <a:cs typeface="Microsoft JhengHei"/>
               </a:rPr>
-              <a:t> PP-OCRv6 </a:t>
-            </a:r>
-            <a:r>
-              <a:rPr sz="1400" b="0" dirty="0" err="1">
-                <a:solidFill>
-                  <a:srgbClr val="231815"/>
-                </a:solidFill>
-                <a:latin typeface="Microsoft JhengHei"/>
-                <a:ea typeface="Microsoft JhengHei"/>
-                <a:cs typeface="Microsoft JhengHei"/>
-              </a:rPr>
-              <a:t>做版面對帳</a:t>
-            </a:r>
-            <a:endParaRPr sz="1400" b="0" dirty="0">
-              <a:solidFill>
-                <a:srgbClr val="231815"/>
-              </a:solidFill>
-              <a:latin typeface="Microsoft JhengHei"/>
-              <a:ea typeface="Microsoft JhengHei"/>
-              <a:cs typeface="Microsoft JhengHei"/>
-            </a:endParaRPr>
+              <a:t> PP-OCRv6</a:t>
+            </a:r>
           </a:p>
         </p:txBody>
       </p:sp>
@@ -6922,6 +6925,110 @@
           </a:prstGeom>
         </p:spPr>
       </p:pic>
+      <p:sp>
+        <p:nvSpPr>
+          <p:cNvPr id="12" name="矩形 11">
+            <a:extLst>
+              <a:ext uri="{FF2B5EF4-FFF2-40B4-BE49-F238E27FC236}">
+                <a16:creationId xmlns:a16="http://schemas.microsoft.com/office/drawing/2014/main" id="{0A96E307-A285-A03D-A545-B744E54BA90E}"/>
+              </a:ext>
+            </a:extLst>
+          </p:cNvPr>
+          <p:cNvSpPr/>
+          <p:nvPr/>
+        </p:nvSpPr>
+        <p:spPr>
+          <a:xfrm>
+            <a:off x="720711" y="3464560"/>
+            <a:ext cx="275007" cy="242350"/>
+          </a:xfrm>
+          <a:prstGeom prst="rect">
+            <a:avLst/>
+          </a:prstGeom>
+          <a:solidFill>
+            <a:schemeClr val="bg1"/>
+          </a:solidFill>
+          <a:ln>
+            <a:solidFill>
+              <a:schemeClr val="bg1"/>
+            </a:solidFill>
+          </a:ln>
+        </p:spPr>
+        <p:style>
+          <a:lnRef idx="2">
+            <a:schemeClr val="dk1"/>
+          </a:lnRef>
+          <a:fillRef idx="1">
+            <a:schemeClr val="lt1"/>
+          </a:fillRef>
+          <a:effectRef idx="0">
+            <a:schemeClr val="dk1"/>
+          </a:effectRef>
+          <a:fontRef idx="minor">
+            <a:schemeClr val="dk1"/>
+          </a:fontRef>
+        </p:style>
+        <p:txBody>
+          <a:bodyPr rtlCol="0" anchor="ctr"/>
+          <a:lstStyle/>
+          <a:p>
+            <a:pPr algn="ctr"/>
+            <a:endParaRPr lang="zh-TW" altLang="en-US"/>
+          </a:p>
+        </p:txBody>
+      </p:sp>
+      <p:sp>
+        <p:nvSpPr>
+          <p:cNvPr id="14" name="矩形 13">
+            <a:extLst>
+              <a:ext uri="{FF2B5EF4-FFF2-40B4-BE49-F238E27FC236}">
+                <a16:creationId xmlns:a16="http://schemas.microsoft.com/office/drawing/2014/main" id="{D92731B9-1F98-4249-2B73-3A348460A05E}"/>
+              </a:ext>
+            </a:extLst>
+          </p:cNvPr>
+          <p:cNvSpPr/>
+          <p:nvPr/>
+        </p:nvSpPr>
+        <p:spPr>
+          <a:xfrm>
+            <a:off x="4572000" y="3447830"/>
+            <a:ext cx="275007" cy="242350"/>
+          </a:xfrm>
+          <a:prstGeom prst="rect">
+            <a:avLst/>
+          </a:prstGeom>
+          <a:solidFill>
+            <a:schemeClr val="bg1"/>
+          </a:solidFill>
+          <a:ln>
+            <a:solidFill>
+              <a:schemeClr val="bg1"/>
+            </a:solidFill>
+          </a:ln>
+        </p:spPr>
+        <p:style>
+          <a:lnRef idx="2">
+            <a:schemeClr val="dk1"/>
+          </a:lnRef>
+          <a:fillRef idx="1">
+            <a:schemeClr val="lt1"/>
+          </a:fillRef>
+          <a:effectRef idx="0">
+            <a:schemeClr val="dk1"/>
+          </a:effectRef>
+          <a:fontRef idx="minor">
+            <a:schemeClr val="dk1"/>
+          </a:fontRef>
+        </p:style>
+        <p:txBody>
+          <a:bodyPr rtlCol="0" anchor="ctr"/>
+          <a:lstStyle/>
+          <a:p>
+            <a:pPr algn="ctr"/>
+            <a:endParaRPr lang="zh-TW" altLang="en-US"/>
+          </a:p>
+        </p:txBody>
+      </p:sp>
     </p:spTree>
   </p:cSld>
   <p:clrMapOvr>
@@ -13238,8 +13345,8 @@
         </p:nvSpPr>
         <p:spPr>
           <a:xfrm>
-            <a:off x="502920" y="1234440"/>
-            <a:ext cx="5212080" cy="4206240"/>
+            <a:off x="1965960" y="1179576"/>
+            <a:ext cx="5212080" cy="707886"/>
           </a:xfrm>
           <a:prstGeom prst="rect">
             <a:avLst/>
@@ -13277,7 +13384,40 @@
                 <a:ea typeface="Microsoft JhengHei"/>
                 <a:cs typeface="Microsoft JhengHei"/>
               </a:rPr>
-              <a:t>先登記餐廳，再為它建立菜單版本</a:t>
+              <a:t>先登記餐廳</a:t>
+            </a:r>
+            <a:r>
+              <a:rPr sz="1500" b="0" dirty="0">
+                <a:solidFill>
+                  <a:srgbClr val="231815"/>
+                </a:solidFill>
+                <a:latin typeface="Microsoft JhengHei"/>
+                <a:ea typeface="Microsoft JhengHei"/>
+                <a:cs typeface="Microsoft JhengHei"/>
+              </a:rPr>
+              <a:t>，</a:t>
+            </a:r>
+            <a:r>
+              <a:rPr lang="zh-TW" altLang="en-US" sz="1500" dirty="0">
+                <a:solidFill>
+                  <a:srgbClr val="231815"/>
+                </a:solidFill>
+                <a:latin typeface="Microsoft JhengHei"/>
+                <a:ea typeface="Microsoft JhengHei"/>
+                <a:cs typeface="Microsoft JhengHei"/>
+              </a:rPr>
+              <a:t>後</a:t>
+            </a:r>
+            <a:r>
+              <a:rPr sz="1500" b="0" dirty="0" err="1">
+                <a:solidFill>
+                  <a:srgbClr val="231815"/>
+                </a:solidFill>
+                <a:latin typeface="Microsoft JhengHei"/>
+                <a:ea typeface="Microsoft JhengHei"/>
+                <a:cs typeface="Microsoft JhengHei"/>
+              </a:rPr>
+              <a:t>建立菜單版本</a:t>
             </a:r>
             <a:r>
               <a:rPr sz="1500" b="0" dirty="0">
@@ -13317,7 +13457,62 @@
                 <a:ea typeface="Microsoft JhengHei"/>
                 <a:cs typeface="Microsoft JhengHei"/>
               </a:rPr>
-              <a:t>照片辨識支援直書菜單；也可以人工貼文字</a:t>
+              <a:t>照片辨識支援</a:t>
+            </a:r>
+            <a:r>
+              <a:rPr lang="zh-TW" altLang="en-US" sz="1500" b="0" dirty="0">
+                <a:solidFill>
+                  <a:srgbClr val="231815"/>
+                </a:solidFill>
+                <a:latin typeface="Microsoft JhengHei"/>
+                <a:ea typeface="Microsoft JhengHei"/>
+                <a:cs typeface="Microsoft JhengHei"/>
+              </a:rPr>
+              <a:t>簡單橫</a:t>
+            </a:r>
+            <a:r>
+              <a:rPr sz="1500" b="0" dirty="0" err="1">
+                <a:solidFill>
+                  <a:srgbClr val="231815"/>
+                </a:solidFill>
+                <a:latin typeface="Microsoft JhengHei"/>
+                <a:ea typeface="Microsoft JhengHei"/>
+                <a:cs typeface="Microsoft JhengHei"/>
+              </a:rPr>
+              <a:t>書菜單</a:t>
+            </a:r>
+            <a:r>
+              <a:rPr lang="zh-TW" altLang="en-US" sz="1500" b="0" dirty="0">
+                <a:solidFill>
+                  <a:srgbClr val="231815"/>
+                </a:solidFill>
+                <a:latin typeface="Microsoft JhengHei"/>
+                <a:ea typeface="Microsoft JhengHei"/>
+                <a:cs typeface="Microsoft JhengHei"/>
+              </a:rPr>
+              <a:t>，不足</a:t>
+            </a:r>
+            <a:r>
+              <a:rPr sz="1500" b="0" dirty="0" err="1">
+                <a:solidFill>
+                  <a:srgbClr val="231815"/>
+                </a:solidFill>
+                <a:latin typeface="Microsoft JhengHei"/>
+                <a:ea typeface="Microsoft JhengHei"/>
+                <a:cs typeface="Microsoft JhengHei"/>
+              </a:rPr>
+              <a:t>也可以人工</a:t>
+            </a:r>
+            <a:r>
+              <a:rPr lang="zh-TW" altLang="en-US" sz="1500" b="0" dirty="0">
+                <a:solidFill>
+                  <a:srgbClr val="231815"/>
+                </a:solidFill>
+                <a:latin typeface="Microsoft JhengHei"/>
+                <a:ea typeface="Microsoft JhengHei"/>
+                <a:cs typeface="Microsoft JhengHei"/>
+              </a:rPr>
+              <a:t>輸入</a:t>
             </a:r>
             <a:r>
               <a:rPr sz="1500" b="0" dirty="0">
@@ -13330,244 +13525,18 @@
               </a:rPr>
               <a:t>。</a:t>
             </a:r>
-          </a:p>
-          <a:p>
-            <a:pPr algn="l">
-              <a:spcAft>
-                <a:spcPts val="1200"/>
-              </a:spcAft>
-            </a:pPr>
-            <a:r>
-              <a:rPr sz="1500" b="0" dirty="0">
-                <a:solidFill>
-                  <a:srgbClr val="231815"/>
-                </a:solidFill>
-                <a:latin typeface="Microsoft JhengHei"/>
-                <a:ea typeface="Microsoft JhengHei"/>
-                <a:cs typeface="Microsoft JhengHei"/>
-              </a:rPr>
-              <a:t>•  </a:t>
-            </a:r>
-            <a:r>
-              <a:rPr sz="1500" b="0" dirty="0" err="1">
-                <a:solidFill>
-                  <a:srgbClr val="231815"/>
-                </a:solidFill>
-                <a:latin typeface="Microsoft JhengHei"/>
-                <a:ea typeface="Microsoft JhengHei"/>
-                <a:cs typeface="Microsoft JhengHei"/>
-              </a:rPr>
-              <a:t>選用</a:t>
-            </a:r>
-            <a:r>
-              <a:rPr sz="1500" b="0" dirty="0">
-                <a:solidFill>
-                  <a:srgbClr val="231815"/>
-                </a:solidFill>
-                <a:latin typeface="Microsoft JhengHei"/>
-                <a:ea typeface="Microsoft JhengHei"/>
-                <a:cs typeface="Microsoft JhengHei"/>
-              </a:rPr>
-              <a:t> OCR </a:t>
-            </a:r>
-            <a:r>
-              <a:rPr sz="1500" b="0" dirty="0" err="1">
-                <a:solidFill>
-                  <a:srgbClr val="231815"/>
-                </a:solidFill>
-                <a:latin typeface="Microsoft JhengHei"/>
-                <a:ea typeface="Microsoft JhengHei"/>
-                <a:cs typeface="Microsoft JhengHei"/>
-              </a:rPr>
-              <a:t>對帳，預覽時標出需要人工核對的行</a:t>
-            </a:r>
-            <a:r>
-              <a:rPr sz="1500" b="0" dirty="0">
-                <a:solidFill>
-                  <a:srgbClr val="231815"/>
-                </a:solidFill>
-                <a:latin typeface="Microsoft JhengHei"/>
-                <a:ea typeface="Microsoft JhengHei"/>
-                <a:cs typeface="Microsoft JhengHei"/>
-              </a:rPr>
-              <a:t>。</a:t>
-            </a:r>
-          </a:p>
-          <a:p>
-            <a:pPr algn="l">
-              <a:spcAft>
-                <a:spcPts val="1200"/>
-              </a:spcAft>
-            </a:pPr>
-            <a:r>
-              <a:rPr sz="1500" b="0" dirty="0">
-                <a:solidFill>
-                  <a:srgbClr val="231815"/>
-                </a:solidFill>
-                <a:latin typeface="Microsoft JhengHei"/>
-                <a:ea typeface="Microsoft JhengHei"/>
-                <a:cs typeface="Microsoft JhengHei"/>
-              </a:rPr>
-              <a:t>•  </a:t>
-            </a:r>
-            <a:r>
-              <a:rPr sz="1500" b="0" dirty="0" err="1">
-                <a:solidFill>
-                  <a:srgbClr val="231815"/>
-                </a:solidFill>
-                <a:latin typeface="Microsoft JhengHei"/>
-                <a:ea typeface="Microsoft JhengHei"/>
-                <a:cs typeface="Microsoft JhengHei"/>
-              </a:rPr>
-              <a:t>沒有人按下「確認寫入</a:t>
-            </a:r>
-            <a:r>
-              <a:rPr sz="1500" b="0" dirty="0">
-                <a:solidFill>
-                  <a:srgbClr val="231815"/>
-                </a:solidFill>
-                <a:latin typeface="Microsoft JhengHei"/>
-                <a:ea typeface="Microsoft JhengHei"/>
-                <a:cs typeface="Microsoft JhengHei"/>
-              </a:rPr>
-              <a:t>」，</a:t>
-            </a:r>
-            <a:r>
-              <a:rPr sz="1500" b="0" dirty="0" err="1">
-                <a:solidFill>
-                  <a:srgbClr val="231815"/>
-                </a:solidFill>
-                <a:latin typeface="Microsoft JhengHei"/>
-                <a:ea typeface="Microsoft JhengHei"/>
-                <a:cs typeface="Microsoft JhengHei"/>
-              </a:rPr>
-              <a:t>菜單不會上線</a:t>
-            </a:r>
-            <a:r>
-              <a:rPr sz="1500" b="0" dirty="0">
-                <a:solidFill>
-                  <a:srgbClr val="231815"/>
-                </a:solidFill>
-                <a:latin typeface="Microsoft JhengHei"/>
-                <a:ea typeface="Microsoft JhengHei"/>
-                <a:cs typeface="Microsoft JhengHei"/>
-              </a:rPr>
-              <a:t>。</a:t>
-            </a:r>
-          </a:p>
-          <a:p>
-            <a:pPr algn="l">
-              <a:spcAft>
-                <a:spcPts val="1200"/>
-              </a:spcAft>
-            </a:pPr>
-            <a:r>
-              <a:rPr sz="1500" b="0" dirty="0">
-                <a:solidFill>
-                  <a:srgbClr val="231815"/>
-                </a:solidFill>
-                <a:latin typeface="Microsoft JhengHei"/>
-                <a:ea typeface="Microsoft JhengHei"/>
-                <a:cs typeface="Microsoft JhengHei"/>
-              </a:rPr>
-              <a:t>•  </a:t>
-            </a:r>
-            <a:r>
-              <a:rPr sz="1500" b="0" dirty="0" err="1">
-                <a:solidFill>
-                  <a:srgbClr val="231815"/>
-                </a:solidFill>
-                <a:latin typeface="Microsoft JhengHei"/>
-                <a:ea typeface="Microsoft JhengHei"/>
-                <a:cs typeface="Microsoft JhengHei"/>
-              </a:rPr>
-              <a:t>之後可用指令或</a:t>
-            </a:r>
-            <a:r>
-              <a:rPr sz="1500" b="0" dirty="0">
-                <a:solidFill>
-                  <a:srgbClr val="231815"/>
-                </a:solidFill>
-                <a:latin typeface="Microsoft JhengHei"/>
-                <a:ea typeface="Microsoft JhengHei"/>
-                <a:cs typeface="Microsoft JhengHei"/>
-              </a:rPr>
-              <a:t> @ bot </a:t>
-            </a:r>
-            <a:r>
-              <a:rPr sz="1500" b="0" dirty="0" err="1">
-                <a:solidFill>
-                  <a:srgbClr val="231815"/>
-                </a:solidFill>
-                <a:latin typeface="Microsoft JhengHei"/>
-                <a:ea typeface="Microsoft JhengHei"/>
-                <a:cs typeface="Microsoft JhengHei"/>
-              </a:rPr>
-              <a:t>問「這家有什麼</a:t>
-            </a:r>
-            <a:r>
-              <a:rPr sz="1500" b="0" dirty="0">
-                <a:solidFill>
-                  <a:srgbClr val="231815"/>
-                </a:solidFill>
-                <a:latin typeface="Microsoft JhengHei"/>
-                <a:ea typeface="Microsoft JhengHei"/>
-                <a:cs typeface="Microsoft JhengHei"/>
-              </a:rPr>
-              <a:t>」。</a:t>
-            </a:r>
-          </a:p>
-        </p:txBody>
-      </p:sp>
-      <p:sp>
-        <p:nvSpPr>
-          <p:cNvPr id="11" name="Rounded Rectangle 10"/>
-          <p:cNvSpPr/>
-          <p:nvPr/>
-        </p:nvSpPr>
-        <p:spPr>
-          <a:xfrm>
-            <a:off x="5806440" y="1170432"/>
-            <a:ext cx="5897880" cy="5074920"/>
-          </a:xfrm>
-          <a:prstGeom prst="roundRect">
-            <a:avLst>
-              <a:gd name="adj" fmla="val 8000"/>
-            </a:avLst>
-          </a:prstGeom>
-          <a:solidFill>
-            <a:srgbClr val="FFFFFF"/>
-          </a:solidFill>
-          <a:ln>
-            <a:noFill/>
-          </a:ln>
-        </p:spPr>
-        <p:style>
-          <a:lnRef idx="1">
-            <a:schemeClr val="accent1"/>
-          </a:lnRef>
-          <a:fillRef idx="3">
-            <a:schemeClr val="accent1"/>
-          </a:fillRef>
-          <a:effectRef idx="2">
-            <a:schemeClr val="accent1"/>
-          </a:effectRef>
-          <a:fontRef idx="minor">
-            <a:schemeClr val="lt1"/>
-          </a:fontRef>
-        </p:style>
-        <p:txBody>
-          <a:bodyPr rtlCol="0" anchor="ctr"/>
-          <a:lstStyle/>
-          <a:p>
-            <a:pPr algn="ctr"/>
-            <a:endParaRPr/>
           </a:p>
         </p:txBody>
       </p:sp>
       <p:pic>
         <p:nvPicPr>
-          <p:cNvPr id="12" name="Picture 11" descr="web-menu.png"/>
+          <p:cNvPr id="15" name="圖片 14">
+            <a:extLst>
+              <a:ext uri="{FF2B5EF4-FFF2-40B4-BE49-F238E27FC236}">
+                <a16:creationId xmlns:a16="http://schemas.microsoft.com/office/drawing/2014/main" id="{1C4ECB31-EA0B-1B64-FC15-F7C397B39284}"/>
+              </a:ext>
+            </a:extLst>
+          </p:cNvPr>
           <p:cNvPicPr>
             <a:picLocks noChangeAspect="1"/>
           </p:cNvPicPr>
@@ -13581,93 +13550,14 @@
         </p:blipFill>
         <p:spPr>
           <a:xfrm>
-            <a:off x="5943600" y="1280160"/>
-            <a:ext cx="3694176" cy="4617720"/>
+            <a:off x="2116074" y="2108864"/>
+            <a:ext cx="7681590" cy="3789016"/>
           </a:xfrm>
           <a:prstGeom prst="rect">
             <a:avLst/>
           </a:prstGeom>
         </p:spPr>
       </p:pic>
-      <p:sp>
-        <p:nvSpPr>
-          <p:cNvPr id="13" name="TextBox 12"/>
-          <p:cNvSpPr txBox="1"/>
-          <p:nvPr/>
-        </p:nvSpPr>
-        <p:spPr>
-          <a:xfrm>
-            <a:off x="5943600" y="5989320"/>
-            <a:ext cx="5623560" cy="256032"/>
-          </a:xfrm>
-          <a:prstGeom prst="rect">
-            <a:avLst/>
-          </a:prstGeom>
-          <a:noFill/>
-        </p:spPr>
-        <p:txBody>
-          <a:bodyPr wrap="square" anchor="t"/>
-          <a:lstStyle/>
-          <a:p>
-            <a:pPr algn="l"/>
-            <a:r>
-              <a:rPr lang="zh-TW" altLang="en-US" sz="1000" b="0" dirty="0">
-                <a:solidFill>
-                  <a:srgbClr val="5D5A55"/>
-                </a:solidFill>
-                <a:latin typeface="Microsoft JhengHei"/>
-                <a:ea typeface="Microsoft JhengHei"/>
-                <a:cs typeface="Microsoft JhengHei"/>
-              </a:rPr>
-              <a:t>網站</a:t>
-            </a:r>
-            <a:r>
-              <a:rPr sz="1000" b="0" dirty="0" err="1">
-                <a:solidFill>
-                  <a:srgbClr val="5D5A55"/>
-                </a:solidFill>
-                <a:latin typeface="Microsoft JhengHei"/>
-                <a:ea typeface="Microsoft JhengHei"/>
-                <a:cs typeface="Microsoft JhengHei"/>
-              </a:rPr>
-              <a:t>實機截圖</a:t>
-            </a:r>
-            <a:r>
-              <a:rPr sz="1000" b="0" dirty="0">
-                <a:solidFill>
-                  <a:srgbClr val="5D5A55"/>
-                </a:solidFill>
-                <a:latin typeface="Microsoft JhengHei"/>
-                <a:ea typeface="Microsoft JhengHei"/>
-                <a:cs typeface="Microsoft JhengHei"/>
-              </a:rPr>
-              <a:t>　·　</a:t>
-            </a:r>
-            <a:r>
-              <a:rPr sz="1000" b="0" dirty="0" err="1">
-                <a:solidFill>
-                  <a:srgbClr val="5D5A55"/>
-                </a:solidFill>
-                <a:latin typeface="Microsoft JhengHei"/>
-                <a:ea typeface="Microsoft JhengHei"/>
-                <a:cs typeface="Microsoft JhengHei"/>
-              </a:rPr>
-              <a:t>雷荷豆腐鍋專賣店菜單</a:t>
-            </a:r>
-            <a:r>
-              <a:rPr sz="1000" b="0" dirty="0">
-                <a:solidFill>
-                  <a:srgbClr val="5D5A55"/>
-                </a:solidFill>
-                <a:latin typeface="Microsoft JhengHei"/>
-                <a:ea typeface="Microsoft JhengHei"/>
-                <a:cs typeface="Microsoft JhengHei"/>
-              </a:rPr>
-              <a:t> v1</a:t>
-            </a:r>
-          </a:p>
-        </p:txBody>
-      </p:sp>
     </p:spTree>
   </p:cSld>
   <p:clrMapOvr>
@@ -14028,7 +13918,7 @@
               </a:spcAft>
             </a:pPr>
             <a:r>
-              <a:rPr sz="1500" b="0">
+              <a:rPr sz="1500" b="0" dirty="0">
                 <a:solidFill>
                   <a:srgbClr val="231815"/>
                 </a:solidFill>
@@ -14036,7 +13926,51 @@
                 <a:ea typeface="Microsoft JhengHei"/>
                 <a:cs typeface="Microsoft JhengHei"/>
               </a:rPr>
-              <a:t>•  管理員先指定論壇頻道，開團可 ping 身分組。</a:t>
+              <a:t>•  </a:t>
+            </a:r>
+            <a:r>
+              <a:rPr sz="1500" b="0" dirty="0" err="1">
+                <a:solidFill>
+                  <a:srgbClr val="231815"/>
+                </a:solidFill>
+                <a:latin typeface="Microsoft JhengHei"/>
+                <a:ea typeface="Microsoft JhengHei"/>
+                <a:cs typeface="Microsoft JhengHei"/>
+              </a:rPr>
+              <a:t>管理員先指定論壇頻道，開團可</a:t>
+            </a:r>
+            <a:r>
+              <a:rPr sz="1500" b="0" dirty="0">
+                <a:solidFill>
+                  <a:srgbClr val="231815"/>
+                </a:solidFill>
+                <a:latin typeface="Microsoft JhengHei"/>
+                <a:ea typeface="Microsoft JhengHei"/>
+                <a:cs typeface="Microsoft JhengHei"/>
+              </a:rPr>
+              <a:t> ping </a:t>
+            </a:r>
+            <a:r>
+              <a:rPr sz="1500" b="0" dirty="0" err="1">
+                <a:solidFill>
+                  <a:srgbClr val="231815"/>
+                </a:solidFill>
+                <a:latin typeface="Microsoft JhengHei"/>
+                <a:ea typeface="Microsoft JhengHei"/>
+                <a:cs typeface="Microsoft JhengHei"/>
+              </a:rPr>
+              <a:t>身分組</a:t>
+            </a:r>
+            <a:r>
+              <a:rPr sz="1500" b="0" dirty="0">
+                <a:solidFill>
+                  <a:srgbClr val="231815"/>
+                </a:solidFill>
+                <a:latin typeface="Microsoft JhengHei"/>
+                <a:ea typeface="Microsoft JhengHei"/>
+                <a:cs typeface="Microsoft JhengHei"/>
+              </a:rPr>
+              <a:t>。</a:t>
             </a:r>
           </a:p>
           <a:p>
@@ -14046,7 +13980,7 @@
               </a:spcAft>
             </a:pPr>
             <a:r>
-              <a:rPr sz="1500" b="0">
+              <a:rPr sz="1500" b="0" dirty="0">
                 <a:solidFill>
                   <a:srgbClr val="231815"/>
                 </a:solidFill>
@@ -14054,7 +13988,29 @@
                 <a:ea typeface="Microsoft JhengHei"/>
                 <a:cs typeface="Microsoft JhengHei"/>
               </a:rPr>
-              <a:t>•  Bot 開論壇貼文，貼上菜單與持續更新的彙總。</a:t>
+              <a:t>•  Bot </a:t>
+            </a:r>
+            <a:r>
+              <a:rPr sz="1500" b="0" dirty="0" err="1">
+                <a:solidFill>
+                  <a:srgbClr val="231815"/>
+                </a:solidFill>
+                <a:latin typeface="Microsoft JhengHei"/>
+                <a:ea typeface="Microsoft JhengHei"/>
+                <a:cs typeface="Microsoft JhengHei"/>
+              </a:rPr>
+              <a:t>開論壇貼文，貼上菜單與持續更新的彙總</a:t>
+            </a:r>
+            <a:r>
+              <a:rPr sz="1500" b="0" dirty="0">
+                <a:solidFill>
+                  <a:srgbClr val="231815"/>
+                </a:solidFill>
+                <a:latin typeface="Microsoft JhengHei"/>
+                <a:ea typeface="Microsoft JhengHei"/>
+                <a:cs typeface="Microsoft JhengHei"/>
+              </a:rPr>
+              <a:t>。</a:t>
             </a:r>
           </a:p>
           <a:p>
@@ -14064,7 +14020,7 @@
               </a:spcAft>
             </a:pPr>
             <a:r>
-              <a:rPr sz="1500" b="0">
+              <a:rPr sz="1500" b="0" dirty="0">
                 <a:solidFill>
                   <a:srgbClr val="231815"/>
                 </a:solidFill>
@@ -14072,7 +14028,51 @@
                 <a:ea typeface="Microsoft JhengHei"/>
                 <a:cs typeface="Microsoft JhengHei"/>
               </a:rPr>
-              <a:t>•  點餐面板可選 1–10 份，品項可複選。</a:t>
+              <a:t>•  </a:t>
+            </a:r>
+            <a:r>
+              <a:rPr sz="1500" b="0" dirty="0" err="1">
+                <a:solidFill>
+                  <a:srgbClr val="231815"/>
+                </a:solidFill>
+                <a:latin typeface="Microsoft JhengHei"/>
+                <a:ea typeface="Microsoft JhengHei"/>
+                <a:cs typeface="Microsoft JhengHei"/>
+              </a:rPr>
+              <a:t>點餐面板可選</a:t>
+            </a:r>
+            <a:r>
+              <a:rPr sz="1500" b="0" dirty="0">
+                <a:solidFill>
+                  <a:srgbClr val="231815"/>
+                </a:solidFill>
+                <a:latin typeface="Microsoft JhengHei"/>
+                <a:ea typeface="Microsoft JhengHei"/>
+                <a:cs typeface="Microsoft JhengHei"/>
+              </a:rPr>
+              <a:t> 1–10 </a:t>
+            </a:r>
+            <a:r>
+              <a:rPr sz="1500" b="0" dirty="0" err="1">
+                <a:solidFill>
+                  <a:srgbClr val="231815"/>
+                </a:solidFill>
+                <a:latin typeface="Microsoft JhengHei"/>
+                <a:ea typeface="Microsoft JhengHei"/>
+                <a:cs typeface="Microsoft JhengHei"/>
+              </a:rPr>
+              <a:t>份，品項可複選</a:t>
+            </a:r>
+            <a:r>
+              <a:rPr sz="1500" b="0" dirty="0">
+                <a:solidFill>
+                  <a:srgbClr val="231815"/>
+                </a:solidFill>
+                <a:latin typeface="Microsoft JhengHei"/>
+                <a:ea typeface="Microsoft JhengHei"/>
+                <a:cs typeface="Microsoft JhengHei"/>
+              </a:rPr>
+              <a:t>。</a:t>
             </a:r>
           </a:p>
           <a:p>
@@ -14082,7 +14082,7 @@
               </a:spcAft>
             </a:pPr>
             <a:r>
-              <a:rPr sz="1500" b="0">
+              <a:rPr sz="1500" b="0" dirty="0">
                 <a:solidFill>
                   <a:srgbClr val="231815"/>
                 </a:solidFill>
@@ -14090,7 +14090,29 @@
                 <a:ea typeface="Microsoft JhengHei"/>
                 <a:cs typeface="Microsoft JhengHei"/>
               </a:rPr>
-              <a:t>•  也可以打「我要一個豆腐鍋跟一份地瓜薯條」。</a:t>
+              <a:t>•  </a:t>
+            </a:r>
+            <a:r>
+              <a:rPr sz="1500" b="0" dirty="0" err="1">
+                <a:solidFill>
+                  <a:srgbClr val="231815"/>
+                </a:solidFill>
+                <a:latin typeface="Microsoft JhengHei"/>
+                <a:ea typeface="Microsoft JhengHei"/>
+                <a:cs typeface="Microsoft JhengHei"/>
+              </a:rPr>
+              <a:t>也可以打「我要一個豆腐鍋跟一份地瓜薯條</a:t>
+            </a:r>
+            <a:r>
+              <a:rPr sz="1500" b="0" dirty="0">
+                <a:solidFill>
+                  <a:srgbClr val="231815"/>
+                </a:solidFill>
+                <a:latin typeface="Microsoft JhengHei"/>
+                <a:ea typeface="Microsoft JhengHei"/>
+                <a:cs typeface="Microsoft JhengHei"/>
+              </a:rPr>
+              <a:t>」。</a:t>
             </a:r>
           </a:p>
           <a:p>
@@ -14100,7 +14122,7 @@
               </a:spcAft>
             </a:pPr>
             <a:r>
-              <a:rPr sz="1500" b="0">
+              <a:rPr sz="1500" b="0" dirty="0">
                 <a:solidFill>
                   <a:srgbClr val="231815"/>
                 </a:solidFill>
@@ -14108,7 +14130,51 @@
                 <a:ea typeface="Microsoft JhengHei"/>
                 <a:cs typeface="Microsoft JhengHei"/>
               </a:rPr>
-              <a:t>•  要改就說「取消地瓜薯條」，或按「清除我的」。</a:t>
+              <a:t>•  </a:t>
+            </a:r>
+            <a:r>
+              <a:rPr sz="1500" b="0" dirty="0" err="1">
+                <a:solidFill>
+                  <a:srgbClr val="231815"/>
+                </a:solidFill>
+                <a:latin typeface="Microsoft JhengHei"/>
+                <a:ea typeface="Microsoft JhengHei"/>
+                <a:cs typeface="Microsoft JhengHei"/>
+              </a:rPr>
+              <a:t>要改就說「取消地瓜薯條</a:t>
+            </a:r>
+            <a:r>
+              <a:rPr sz="1500" b="0" dirty="0">
+                <a:solidFill>
+                  <a:srgbClr val="231815"/>
+                </a:solidFill>
+                <a:latin typeface="Microsoft JhengHei"/>
+                <a:ea typeface="Microsoft JhengHei"/>
+                <a:cs typeface="Microsoft JhengHei"/>
+              </a:rPr>
+              <a:t>」，</a:t>
+            </a:r>
+            <a:r>
+              <a:rPr sz="1500" b="0" dirty="0" err="1">
+                <a:solidFill>
+                  <a:srgbClr val="231815"/>
+                </a:solidFill>
+                <a:latin typeface="Microsoft JhengHei"/>
+                <a:ea typeface="Microsoft JhengHei"/>
+                <a:cs typeface="Microsoft JhengHei"/>
+              </a:rPr>
+              <a:t>或按「清除我的</a:t>
+            </a:r>
+            <a:r>
+              <a:rPr sz="1500" b="0" dirty="0">
+                <a:solidFill>
+                  <a:srgbClr val="231815"/>
+                </a:solidFill>
+                <a:latin typeface="Microsoft JhengHei"/>
+                <a:ea typeface="Microsoft JhengHei"/>
+                <a:cs typeface="Microsoft JhengHei"/>
+              </a:rPr>
+              <a:t>」。</a:t>
             </a:r>
           </a:p>
           <a:p>
@@ -14118,7 +14184,7 @@
               </a:spcAft>
             </a:pPr>
             <a:r>
-              <a:rPr sz="1500" b="0">
+              <a:rPr sz="1500" b="0" dirty="0">
                 <a:solidFill>
                   <a:srgbClr val="231815"/>
                 </a:solidFill>
@@ -14126,7 +14192,29 @@
                 <a:ea typeface="Microsoft JhengHei"/>
                 <a:cs typeface="Microsoft JhengHei"/>
               </a:rPr>
-              <a:t>•  價格永遠取自已上線的菜單，不接受口頭報價。</a:t>
+              <a:t>•  </a:t>
+            </a:r>
+            <a:r>
+              <a:rPr sz="1500" b="0" dirty="0" err="1">
+                <a:solidFill>
+                  <a:srgbClr val="231815"/>
+                </a:solidFill>
+                <a:latin typeface="Microsoft JhengHei"/>
+                <a:ea typeface="Microsoft JhengHei"/>
+                <a:cs typeface="Microsoft JhengHei"/>
+              </a:rPr>
+              <a:t>價格永遠取自已上線的菜單，不接受口頭報價</a:t>
+            </a:r>
+            <a:r>
+              <a:rPr sz="1500" b="0" dirty="0">
+                <a:solidFill>
+                  <a:srgbClr val="231815"/>
+                </a:solidFill>
+                <a:latin typeface="Microsoft JhengHei"/>
+                <a:ea typeface="Microsoft JhengHei"/>
+                <a:cs typeface="Microsoft JhengHei"/>
+              </a:rPr>
+              <a:t>。</a:t>
             </a:r>
           </a:p>
         </p:txBody>
